--- a/第1章 信息系统项目的特点与规划.pptx
+++ b/第1章 信息系统项目的特点与规划.pptx
@@ -6,7 +6,7 @@
     <p:sldMasterId id="2147484033" r:id="rId2"/>
   </p:sldMasterIdLst>
   <p:notesMasterIdLst>
-    <p:notesMasterId r:id="rId62"/>
+    <p:notesMasterId r:id="rId64"/>
   </p:notesMasterIdLst>
   <p:sldIdLst>
     <p:sldId id="327" r:id="rId3"/>
@@ -16,58 +16,60 @@
     <p:sldId id="256" r:id="rId7"/>
     <p:sldId id="320" r:id="rId8"/>
     <p:sldId id="257" r:id="rId9"/>
-    <p:sldId id="287" r:id="rId10"/>
-    <p:sldId id="288" r:id="rId11"/>
-    <p:sldId id="292" r:id="rId12"/>
-    <p:sldId id="258" r:id="rId13"/>
-    <p:sldId id="293" r:id="rId14"/>
-    <p:sldId id="294" r:id="rId15"/>
-    <p:sldId id="295" r:id="rId16"/>
-    <p:sldId id="259" r:id="rId17"/>
-    <p:sldId id="296" r:id="rId18"/>
-    <p:sldId id="395" r:id="rId19"/>
-    <p:sldId id="297" r:id="rId20"/>
-    <p:sldId id="396" r:id="rId21"/>
-    <p:sldId id="397" r:id="rId22"/>
+    <p:sldId id="402" r:id="rId10"/>
+    <p:sldId id="287" r:id="rId11"/>
+    <p:sldId id="288" r:id="rId12"/>
+    <p:sldId id="292" r:id="rId13"/>
+    <p:sldId id="258" r:id="rId14"/>
+    <p:sldId id="293" r:id="rId15"/>
+    <p:sldId id="294" r:id="rId16"/>
+    <p:sldId id="295" r:id="rId17"/>
+    <p:sldId id="259" r:id="rId18"/>
+    <p:sldId id="296" r:id="rId19"/>
+    <p:sldId id="395" r:id="rId20"/>
+    <p:sldId id="297" r:id="rId21"/>
+    <p:sldId id="396" r:id="rId22"/>
     <p:sldId id="398" r:id="rId23"/>
-    <p:sldId id="399" r:id="rId24"/>
-    <p:sldId id="322" r:id="rId25"/>
-    <p:sldId id="261" r:id="rId26"/>
-    <p:sldId id="299" r:id="rId27"/>
-    <p:sldId id="300" r:id="rId28"/>
-    <p:sldId id="301" r:id="rId29"/>
-    <p:sldId id="262" r:id="rId30"/>
-    <p:sldId id="302" r:id="rId31"/>
-    <p:sldId id="303" r:id="rId32"/>
-    <p:sldId id="304" r:id="rId33"/>
-    <p:sldId id="305" r:id="rId34"/>
-    <p:sldId id="263" r:id="rId35"/>
-    <p:sldId id="306" r:id="rId36"/>
-    <p:sldId id="323" r:id="rId37"/>
-    <p:sldId id="264" r:id="rId38"/>
-    <p:sldId id="401" r:id="rId39"/>
-    <p:sldId id="307" r:id="rId40"/>
-    <p:sldId id="309" r:id="rId41"/>
-    <p:sldId id="324" r:id="rId42"/>
-    <p:sldId id="283" r:id="rId43"/>
-    <p:sldId id="308" r:id="rId44"/>
-    <p:sldId id="284" r:id="rId45"/>
-    <p:sldId id="310" r:id="rId46"/>
-    <p:sldId id="311" r:id="rId47"/>
-    <p:sldId id="312" r:id="rId48"/>
-    <p:sldId id="325" r:id="rId49"/>
-    <p:sldId id="265" r:id="rId50"/>
-    <p:sldId id="285" r:id="rId51"/>
-    <p:sldId id="313" r:id="rId52"/>
-    <p:sldId id="314" r:id="rId53"/>
-    <p:sldId id="316" r:id="rId54"/>
-    <p:sldId id="315" r:id="rId55"/>
-    <p:sldId id="266" r:id="rId56"/>
-    <p:sldId id="317" r:id="rId57"/>
-    <p:sldId id="286" r:id="rId58"/>
-    <p:sldId id="318" r:id="rId59"/>
-    <p:sldId id="326" r:id="rId60"/>
-    <p:sldId id="329" r:id="rId61"/>
+    <p:sldId id="397" r:id="rId24"/>
+    <p:sldId id="403" r:id="rId25"/>
+    <p:sldId id="399" r:id="rId26"/>
+    <p:sldId id="322" r:id="rId27"/>
+    <p:sldId id="261" r:id="rId28"/>
+    <p:sldId id="299" r:id="rId29"/>
+    <p:sldId id="300" r:id="rId30"/>
+    <p:sldId id="301" r:id="rId31"/>
+    <p:sldId id="262" r:id="rId32"/>
+    <p:sldId id="302" r:id="rId33"/>
+    <p:sldId id="303" r:id="rId34"/>
+    <p:sldId id="304" r:id="rId35"/>
+    <p:sldId id="305" r:id="rId36"/>
+    <p:sldId id="263" r:id="rId37"/>
+    <p:sldId id="306" r:id="rId38"/>
+    <p:sldId id="323" r:id="rId39"/>
+    <p:sldId id="264" r:id="rId40"/>
+    <p:sldId id="401" r:id="rId41"/>
+    <p:sldId id="307" r:id="rId42"/>
+    <p:sldId id="309" r:id="rId43"/>
+    <p:sldId id="324" r:id="rId44"/>
+    <p:sldId id="283" r:id="rId45"/>
+    <p:sldId id="308" r:id="rId46"/>
+    <p:sldId id="284" r:id="rId47"/>
+    <p:sldId id="310" r:id="rId48"/>
+    <p:sldId id="311" r:id="rId49"/>
+    <p:sldId id="312" r:id="rId50"/>
+    <p:sldId id="325" r:id="rId51"/>
+    <p:sldId id="265" r:id="rId52"/>
+    <p:sldId id="285" r:id="rId53"/>
+    <p:sldId id="313" r:id="rId54"/>
+    <p:sldId id="314" r:id="rId55"/>
+    <p:sldId id="316" r:id="rId56"/>
+    <p:sldId id="315" r:id="rId57"/>
+    <p:sldId id="266" r:id="rId58"/>
+    <p:sldId id="317" r:id="rId59"/>
+    <p:sldId id="286" r:id="rId60"/>
+    <p:sldId id="318" r:id="rId61"/>
+    <p:sldId id="326" r:id="rId62"/>
+    <p:sldId id="329" r:id="rId63"/>
   </p:sldIdLst>
   <p:sldSz cx="9144000" cy="6858000" type="screen4x3"/>
   <p:notesSz cx="6858000" cy="9144000"/>
@@ -345,7 +347,7 @@
               <a:pPr>
                 <a:defRPr/>
               </a:pPr>
-              <a:t>2/27/2026</a:t>
+              <a:t>3/1/2026</a:t>
             </a:fld>
             <a:endParaRPr lang="en-US" altLang="zh-CN"/>
           </a:p>
@@ -361,7 +363,7 @@
             </a:extLst>
           </p:cNvPr>
           <p:cNvSpPr>
-            <a:spLocks noGrp="1" noChangeArrowheads="1"/>
+            <a:spLocks noGrp="1" noRot="1" noChangeAspect="1" noChangeArrowheads="1"/>
           </p:cNvSpPr>
           <p:nvPr>
             <p:ph type="sldImg" idx="2"/>
@@ -921,7 +923,7 @@
             </a:extLst>
           </p:cNvPr>
           <p:cNvSpPr>
-            <a:spLocks noChangeArrowheads="1" noTextEdit="1"/>
+            <a:spLocks noGrp="1" noRot="1" noChangeAspect="1" noChangeArrowheads="1" noTextEdit="1"/>
           </p:cNvSpPr>
           <p:nvPr>
             <p:ph type="sldImg"/>
@@ -1205,7 +1207,7 @@
             </a:extLst>
           </p:cNvPr>
           <p:cNvSpPr>
-            <a:spLocks noChangeArrowheads="1" noTextEdit="1"/>
+            <a:spLocks noGrp="1" noRot="1" noChangeAspect="1" noChangeArrowheads="1" noTextEdit="1"/>
           </p:cNvSpPr>
           <p:nvPr>
             <p:ph type="sldImg"/>
@@ -1489,7 +1491,7 @@
             </a:extLst>
           </p:cNvPr>
           <p:cNvSpPr>
-            <a:spLocks noChangeArrowheads="1" noTextEdit="1"/>
+            <a:spLocks noGrp="1" noRot="1" noChangeAspect="1" noChangeArrowheads="1" noTextEdit="1"/>
           </p:cNvSpPr>
           <p:nvPr>
             <p:ph type="sldImg"/>
@@ -3047,7 +3049,7 @@
           <a:p>
             <a:fld id="{48A87A34-81AB-432B-8DAE-1953F412C126}" type="datetimeFigureOut">
               <a:rPr lang="en-US" smtClean="0"/>
-              <a:t>2/27/2026</a:t>
+              <a:t>3/1/2026</a:t>
             </a:fld>
             <a:endParaRPr lang="en-US" dirty="0"/>
           </a:p>
@@ -3217,7 +3219,7 @@
           <a:p>
             <a:fld id="{48A87A34-81AB-432B-8DAE-1953F412C126}" type="datetimeFigureOut">
               <a:rPr lang="en-US" smtClean="0"/>
-              <a:t>2/27/2026</a:t>
+              <a:t>3/1/2026</a:t>
             </a:fld>
             <a:endParaRPr lang="en-US" dirty="0"/>
           </a:p>
@@ -3461,7 +3463,7 @@
           <a:p>
             <a:fld id="{48A87A34-81AB-432B-8DAE-1953F412C126}" type="datetimeFigureOut">
               <a:rPr lang="en-US" smtClean="0"/>
-              <a:t>2/27/2026</a:t>
+              <a:t>3/1/2026</a:t>
             </a:fld>
             <a:endParaRPr lang="en-US" dirty="0"/>
           </a:p>
@@ -3693,7 +3695,7 @@
           <a:p>
             <a:fld id="{48A87A34-81AB-432B-8DAE-1953F412C126}" type="datetimeFigureOut">
               <a:rPr lang="en-US" smtClean="0"/>
-              <a:t>2/27/2026</a:t>
+              <a:t>3/1/2026</a:t>
             </a:fld>
             <a:endParaRPr lang="en-US" dirty="0"/>
           </a:p>
@@ -4164,7 +4166,7 @@
           <a:p>
             <a:fld id="{48A87A34-81AB-432B-8DAE-1953F412C126}" type="datetimeFigureOut">
               <a:rPr lang="en-US" smtClean="0"/>
-              <a:t>2/27/2026</a:t>
+              <a:t>3/1/2026</a:t>
             </a:fld>
             <a:endParaRPr lang="en-US" dirty="0"/>
           </a:p>
@@ -4282,7 +4284,7 @@
           <a:p>
             <a:fld id="{48A87A34-81AB-432B-8DAE-1953F412C126}" type="datetimeFigureOut">
               <a:rPr lang="en-US" smtClean="0"/>
-              <a:t>2/27/2026</a:t>
+              <a:t>3/1/2026</a:t>
             </a:fld>
             <a:endParaRPr lang="en-US" dirty="0"/>
           </a:p>
@@ -4377,7 +4379,7 @@
           <a:p>
             <a:fld id="{48A87A34-81AB-432B-8DAE-1953F412C126}" type="datetimeFigureOut">
               <a:rPr lang="en-US" smtClean="0"/>
-              <a:t>2/27/2026</a:t>
+              <a:t>3/1/2026</a:t>
             </a:fld>
             <a:endParaRPr lang="en-US" dirty="0"/>
           </a:p>
@@ -4654,7 +4656,7 @@
           <a:p>
             <a:fld id="{48A87A34-81AB-432B-8DAE-1953F412C126}" type="datetimeFigureOut">
               <a:rPr lang="en-US" smtClean="0"/>
-              <a:t>2/27/2026</a:t>
+              <a:t>3/1/2026</a:t>
             </a:fld>
             <a:endParaRPr lang="en-US" dirty="0"/>
           </a:p>
@@ -4912,7 +4914,7 @@
             <a:fld id="{48A87A34-81AB-432B-8DAE-1953F412C126}" type="datetimeFigureOut">
               <a:rPr lang="en-US" smtClean="0"/>
               <a:pPr/>
-              <a:t>2/27/2026</a:t>
+              <a:t>3/1/2026</a:t>
             </a:fld>
             <a:endParaRPr lang="en-US" dirty="0"/>
           </a:p>
@@ -5082,7 +5084,7 @@
           <a:p>
             <a:fld id="{48A87A34-81AB-432B-8DAE-1953F412C126}" type="datetimeFigureOut">
               <a:rPr lang="en-US" smtClean="0"/>
-              <a:t>2/27/2026</a:t>
+              <a:t>3/1/2026</a:t>
             </a:fld>
             <a:endParaRPr lang="en-US" dirty="0"/>
           </a:p>
@@ -5262,7 +5264,7 @@
           <a:p>
             <a:fld id="{48A87A34-81AB-432B-8DAE-1953F412C126}" type="datetimeFigureOut">
               <a:rPr lang="en-US" smtClean="0"/>
-              <a:t>2/27/2026</a:t>
+              <a:t>3/1/2026</a:t>
             </a:fld>
             <a:endParaRPr lang="en-US" dirty="0"/>
           </a:p>
@@ -7606,7 +7608,7 @@
           <a:p>
             <a:fld id="{C764DE79-268F-4C1A-8933-263129D2AF90}" type="datetimeFigureOut">
               <a:rPr lang="en-US" dirty="0"/>
-              <a:t>2/27/2026</a:t>
+              <a:t>3/1/2026</a:t>
             </a:fld>
             <a:endParaRPr lang="en-US" dirty="0"/>
           </a:p>
@@ -8515,6 +8517,417 @@
       </p:grpSpPr>
       <p:sp>
         <p:nvSpPr>
+          <p:cNvPr id="9218" name="Rectangle 5">
+            <a:extLst>
+              <a:ext uri="{FF2B5EF4-FFF2-40B4-BE49-F238E27FC236}">
+                <a16:creationId xmlns:a16="http://schemas.microsoft.com/office/drawing/2014/main" id="{2AD482B6-3F37-42EC-9122-5AFB93B58125}"/>
+              </a:ext>
+            </a:extLst>
+          </p:cNvPr>
+          <p:cNvSpPr>
+            <a:spLocks noGrp="1" noChangeArrowheads="1"/>
+          </p:cNvSpPr>
+          <p:nvPr>
+            <p:ph type="body" idx="4294967295"/>
+          </p:nvPr>
+        </p:nvSpPr>
+        <p:spPr>
+          <a:xfrm>
+            <a:off x="179512" y="548680"/>
+            <a:ext cx="8568952" cy="6048670"/>
+          </a:xfrm>
+        </p:spPr>
+        <p:txBody>
+          <a:bodyPr>
+            <a:noAutofit/>
+          </a:bodyPr>
+          <a:lstStyle/>
+          <a:p>
+            <a:pPr>
+              <a:defRPr/>
+            </a:pPr>
+            <a:r>
+              <a:rPr lang="en-US" altLang="zh-CN" sz="4000" dirty="0"/>
+              <a:t>1.1.2 </a:t>
+            </a:r>
+            <a:r>
+              <a:rPr lang="zh-CN" altLang="en-US" sz="4000" dirty="0"/>
+              <a:t>推广项目管理的权威机构</a:t>
+            </a:r>
+            <a:endParaRPr lang="en-US" altLang="zh-CN" dirty="0"/>
+          </a:p>
+          <a:p>
+            <a:pPr marL="0" lvl="1" indent="0">
+              <a:lnSpc>
+                <a:spcPct val="160000"/>
+              </a:lnSpc>
+              <a:spcBef>
+                <a:spcPts val="0"/>
+              </a:spcBef>
+              <a:buFontTx/>
+              <a:buAutoNum type="arabicPeriod"/>
+              <a:defRPr/>
+            </a:pPr>
+            <a:r>
+              <a:rPr lang="zh-CN" altLang="en-US" dirty="0"/>
+              <a:t>美国项目管理学会（</a:t>
+            </a:r>
+            <a:r>
+              <a:rPr lang="en-US" altLang="zh-CN" dirty="0"/>
+              <a:t>PMI</a:t>
+            </a:r>
+            <a:r>
+              <a:rPr lang="zh-CN" altLang="en-US" dirty="0"/>
+              <a:t>）</a:t>
+            </a:r>
+            <a:endParaRPr lang="en-US" altLang="zh-CN" dirty="0"/>
+          </a:p>
+          <a:p>
+            <a:pPr marL="0" lvl="1" indent="0">
+              <a:lnSpc>
+                <a:spcPct val="160000"/>
+              </a:lnSpc>
+              <a:spcBef>
+                <a:spcPts val="0"/>
+              </a:spcBef>
+              <a:buFont typeface="Wingdings" panose="05000000000000000000" pitchFamily="2" charset="2"/>
+              <a:buChar char="Ø"/>
+              <a:defRPr/>
+            </a:pPr>
+            <a:r>
+              <a:rPr lang="en-US" altLang="zh-CN" dirty="0"/>
+              <a:t>PMI</a:t>
+            </a:r>
+            <a:r>
+              <a:rPr lang="zh-CN" altLang="en-US" dirty="0"/>
+              <a:t>（</a:t>
+            </a:r>
+            <a:r>
+              <a:rPr lang="en-US" altLang="zh-CN" dirty="0"/>
+              <a:t>Project Management Institute</a:t>
+            </a:r>
+            <a:r>
+              <a:rPr lang="zh-CN" altLang="en-US" dirty="0"/>
+              <a:t>），是成立于</a:t>
+            </a:r>
+            <a:r>
+              <a:rPr lang="en-US" altLang="zh-CN" dirty="0"/>
+              <a:t>1969</a:t>
+            </a:r>
+            <a:r>
+              <a:rPr lang="zh-CN" altLang="en-US" dirty="0"/>
+              <a:t>年一个国际性组织，是项目管理专业领域中最大的、由研究人员、学者、顾问和经理组成的全球性专业组织</a:t>
+            </a:r>
+            <a:endParaRPr lang="en-US" altLang="zh-CN" dirty="0"/>
+          </a:p>
+          <a:p>
+            <a:pPr marL="0" lvl="1" indent="0">
+              <a:lnSpc>
+                <a:spcPct val="160000"/>
+              </a:lnSpc>
+              <a:spcBef>
+                <a:spcPts val="0"/>
+              </a:spcBef>
+              <a:buFont typeface="Wingdings" panose="05000000000000000000" pitchFamily="2" charset="2"/>
+              <a:buChar char="Ø"/>
+              <a:defRPr/>
+            </a:pPr>
+            <a:r>
+              <a:rPr lang="zh-CN" altLang="en-US" dirty="0"/>
+              <a:t>其推出了项目管理知识体系指南（</a:t>
+            </a:r>
+            <a:r>
+              <a:rPr lang="en-US" altLang="zh-CN" dirty="0"/>
+              <a:t>Project Management Body of Knowledge</a:t>
+            </a:r>
+            <a:r>
+              <a:rPr lang="zh-CN" altLang="en-US" dirty="0"/>
+              <a:t>，</a:t>
+            </a:r>
+            <a:r>
+              <a:rPr lang="en-US" altLang="zh-CN" dirty="0"/>
+              <a:t>PMBOK</a:t>
+            </a:r>
+            <a:r>
+              <a:rPr lang="zh-CN" altLang="en-US" dirty="0"/>
+              <a:t>）是项目管理发展史上地一个里程碑。</a:t>
+            </a:r>
+            <a:r>
+              <a:rPr lang="en-US" altLang="zh-CN" dirty="0"/>
+              <a:t>PMBOK</a:t>
+            </a:r>
+            <a:r>
+              <a:rPr lang="zh-CN" altLang="en-US" dirty="0"/>
+              <a:t>定义了项目管理的</a:t>
+            </a:r>
+            <a:r>
+              <a:rPr lang="zh-CN" altLang="en-US" dirty="0">
+                <a:solidFill>
+                  <a:srgbClr val="FF0000"/>
+                </a:solidFill>
+              </a:rPr>
+              <a:t>十大知识领域</a:t>
+            </a:r>
+            <a:r>
+              <a:rPr lang="zh-CN" altLang="en-US" dirty="0"/>
+              <a:t>和</a:t>
+            </a:r>
+            <a:r>
+              <a:rPr lang="zh-CN" altLang="en-US" dirty="0">
+                <a:solidFill>
+                  <a:srgbClr val="FF0000"/>
+                </a:solidFill>
+              </a:rPr>
+              <a:t>五大管理过程</a:t>
+            </a:r>
+            <a:r>
+              <a:rPr lang="zh-CN" altLang="en-US" dirty="0"/>
+              <a:t>。</a:t>
+            </a:r>
+            <a:endParaRPr lang="en-US" altLang="zh-CN" dirty="0"/>
+          </a:p>
+          <a:p>
+            <a:pPr marL="0" lvl="1" indent="0">
+              <a:lnSpc>
+                <a:spcPct val="160000"/>
+              </a:lnSpc>
+              <a:spcBef>
+                <a:spcPts val="0"/>
+              </a:spcBef>
+              <a:buFont typeface="Wingdings" panose="05000000000000000000" pitchFamily="2" charset="2"/>
+              <a:buChar char="Ø"/>
+              <a:defRPr/>
+            </a:pPr>
+            <a:r>
+              <a:rPr lang="en-US" altLang="zh-CN" dirty="0"/>
+              <a:t>PMI</a:t>
+            </a:r>
+            <a:r>
+              <a:rPr lang="zh-CN" altLang="en-US" dirty="0"/>
+              <a:t>组织的项目管理资格认证考试（</a:t>
+            </a:r>
+            <a:r>
+              <a:rPr lang="en-US" altLang="zh-CN" dirty="0"/>
+              <a:t>PMP</a:t>
+            </a:r>
+            <a:r>
+              <a:rPr lang="zh-CN" altLang="en-US" dirty="0"/>
+              <a:t>，</a:t>
+            </a:r>
+            <a:r>
+              <a:rPr lang="en-US" altLang="zh-CN" dirty="0"/>
+              <a:t>Project Management Professional</a:t>
+            </a:r>
+            <a:r>
+              <a:rPr lang="zh-CN" altLang="en-US" dirty="0"/>
+              <a:t>）已经成为项目管理领域的权威认证。</a:t>
+            </a:r>
+            <a:endParaRPr lang="en-US" altLang="zh-CN" dirty="0"/>
+          </a:p>
+        </p:txBody>
+      </p:sp>
+      <p:sp>
+        <p:nvSpPr>
+          <p:cNvPr id="16388" name="Line 7">
+            <a:extLst>
+              <a:ext uri="{FF2B5EF4-FFF2-40B4-BE49-F238E27FC236}">
+                <a16:creationId xmlns:a16="http://schemas.microsoft.com/office/drawing/2014/main" id="{9910477A-33AD-4F94-961F-2ADBEC6D3793}"/>
+              </a:ext>
+            </a:extLst>
+          </p:cNvPr>
+          <p:cNvSpPr>
+            <a:spLocks noChangeShapeType="1"/>
+          </p:cNvSpPr>
+          <p:nvPr/>
+        </p:nvSpPr>
+        <p:spPr bwMode="auto">
+          <a:xfrm>
+            <a:off x="0" y="476250"/>
+            <a:ext cx="9144000" cy="0"/>
+          </a:xfrm>
+          <a:prstGeom prst="line">
+            <a:avLst/>
+          </a:prstGeom>
+          <a:noFill/>
+          <a:ln w="9525">
+            <a:solidFill>
+              <a:srgbClr val="9900CC"/>
+            </a:solidFill>
+            <a:round/>
+            <a:headEnd/>
+            <a:tailEnd/>
+          </a:ln>
+          <a:extLst>
+            <a:ext uri="{909E8E84-426E-40DD-AFC4-6F175D3DCCD1}">
+              <a14:hiddenFill xmlns:a14="http://schemas.microsoft.com/office/drawing/2010/main">
+                <a:noFill/>
+              </a14:hiddenFill>
+            </a:ext>
+          </a:extLst>
+        </p:spPr>
+        <p:txBody>
+          <a:bodyPr/>
+          <a:lstStyle/>
+          <a:p>
+            <a:endParaRPr lang="zh-CN" altLang="en-US"/>
+          </a:p>
+        </p:txBody>
+      </p:sp>
+    </p:spTree>
+  </p:cSld>
+  <p:clrMapOvr>
+    <a:masterClrMapping/>
+  </p:clrMapOvr>
+  <p:timing>
+    <p:tnLst>
+      <p:par>
+        <p:cTn id="1" dur="indefinite" restart="never" nodeType="tmRoot">
+          <p:childTnLst>
+            <p:seq concurrent="1" nextAc="seek">
+              <p:cTn id="2" dur="indefinite" nodeType="mainSeq">
+                <p:childTnLst>
+                  <p:par>
+                    <p:cTn id="3" fill="hold">
+                      <p:stCondLst>
+                        <p:cond delay="indefinite"/>
+                      </p:stCondLst>
+                      <p:childTnLst>
+                        <p:par>
+                          <p:cTn id="4" fill="hold">
+                            <p:stCondLst>
+                              <p:cond delay="0"/>
+                            </p:stCondLst>
+                            <p:childTnLst>
+                              <p:par>
+                                <p:cTn id="5" presetID="1" presetClass="entr" presetSubtype="0" fill="hold" nodeType="clickEffect">
+                                  <p:stCondLst>
+                                    <p:cond delay="0"/>
+                                  </p:stCondLst>
+                                  <p:childTnLst>
+                                    <p:set>
+                                      <p:cBhvr>
+                                        <p:cTn id="6" dur="1" fill="hold">
+                                          <p:stCondLst>
+                                            <p:cond delay="0"/>
+                                          </p:stCondLst>
+                                        </p:cTn>
+                                        <p:tgtEl>
+                                          <p:spTgt spid="9218">
+                                            <p:txEl>
+                                              <p:pRg st="3" end="3"/>
+                                            </p:txEl>
+                                          </p:spTgt>
+                                        </p:tgtEl>
+                                        <p:attrNameLst>
+                                          <p:attrName>style.visibility</p:attrName>
+                                        </p:attrNameLst>
+                                      </p:cBhvr>
+                                      <p:to>
+                                        <p:strVal val="visible"/>
+                                      </p:to>
+                                    </p:set>
+                                  </p:childTnLst>
+                                </p:cTn>
+                              </p:par>
+                            </p:childTnLst>
+                          </p:cTn>
+                        </p:par>
+                      </p:childTnLst>
+                    </p:cTn>
+                  </p:par>
+                  <p:par>
+                    <p:cTn id="7" fill="hold">
+                      <p:stCondLst>
+                        <p:cond delay="indefinite"/>
+                      </p:stCondLst>
+                      <p:childTnLst>
+                        <p:par>
+                          <p:cTn id="8" fill="hold">
+                            <p:stCondLst>
+                              <p:cond delay="0"/>
+                            </p:stCondLst>
+                            <p:childTnLst>
+                              <p:par>
+                                <p:cTn id="9" presetID="1" presetClass="entr" presetSubtype="0" fill="hold" nodeType="clickEffect">
+                                  <p:stCondLst>
+                                    <p:cond delay="0"/>
+                                  </p:stCondLst>
+                                  <p:childTnLst>
+                                    <p:set>
+                                      <p:cBhvr>
+                                        <p:cTn id="10" dur="1" fill="hold">
+                                          <p:stCondLst>
+                                            <p:cond delay="0"/>
+                                          </p:stCondLst>
+                                        </p:cTn>
+                                        <p:tgtEl>
+                                          <p:spTgt spid="9218">
+                                            <p:txEl>
+                                              <p:pRg st="4" end="4"/>
+                                            </p:txEl>
+                                          </p:spTgt>
+                                        </p:tgtEl>
+                                        <p:attrNameLst>
+                                          <p:attrName>style.visibility</p:attrName>
+                                        </p:attrNameLst>
+                                      </p:cBhvr>
+                                      <p:to>
+                                        <p:strVal val="visible"/>
+                                      </p:to>
+                                    </p:set>
+                                  </p:childTnLst>
+                                </p:cTn>
+                              </p:par>
+                            </p:childTnLst>
+                          </p:cTn>
+                        </p:par>
+                      </p:childTnLst>
+                    </p:cTn>
+                  </p:par>
+                </p:childTnLst>
+              </p:cTn>
+              <p:prevCondLst>
+                <p:cond evt="onPrev" delay="0">
+                  <p:tgtEl>
+                    <p:sldTgt/>
+                  </p:tgtEl>
+                </p:cond>
+              </p:prevCondLst>
+              <p:nextCondLst>
+                <p:cond evt="onNext" delay="0">
+                  <p:tgtEl>
+                    <p:sldTgt/>
+                  </p:tgtEl>
+                </p:cond>
+              </p:nextCondLst>
+            </p:seq>
+          </p:childTnLst>
+        </p:cTn>
+      </p:par>
+    </p:tnLst>
+  </p:timing>
+</p:sld>
+</file>
+
+<file path=ppt/slides/slide11.xml><?xml version="1.0" encoding="utf-8"?>
+<p:sld xmlns:a="http://schemas.openxmlformats.org/drawingml/2006/main" xmlns:r="http://schemas.openxmlformats.org/officeDocument/2006/relationships" xmlns:p="http://schemas.openxmlformats.org/presentationml/2006/main">
+  <p:cSld>
+    <p:spTree>
+      <p:nvGrpSpPr>
+        <p:cNvPr id="1" name=""/>
+        <p:cNvGrpSpPr/>
+        <p:nvPr/>
+      </p:nvGrpSpPr>
+      <p:grpSpPr>
+        <a:xfrm>
+          <a:off x="0" y="0"/>
+          <a:ext cx="0" cy="0"/>
+          <a:chOff x="0" y="0"/>
+          <a:chExt cx="0" cy="0"/>
+        </a:xfrm>
+      </p:grpSpPr>
+      <p:sp>
+        <p:nvSpPr>
           <p:cNvPr id="10242" name="Rectangle 5">
             <a:extLst>
               <a:ext uri="{FF2B5EF4-FFF2-40B4-BE49-F238E27FC236}">
@@ -8532,34 +8945,124 @@
         <p:spPr>
           <a:xfrm>
             <a:off x="0" y="831850"/>
-            <a:ext cx="8229600" cy="4525963"/>
+            <a:ext cx="8964488" cy="4525963"/>
           </a:xfrm>
         </p:spPr>
         <p:txBody>
           <a:bodyPr>
-            <a:normAutofit/>
+            <a:noAutofit/>
           </a:bodyPr>
           <a:lstStyle/>
-          <a:p>
-            <a:pPr>
-              <a:defRPr/>
-            </a:pPr>
-            <a:r>
-              <a:rPr lang="en-US" altLang="zh-CN" sz="4000"/>
-              <a:t>1.1.2 </a:t>
-            </a:r>
-            <a:r>
-              <a:rPr lang="zh-CN" altLang="en-US" sz="4000"/>
-              <a:t>推广项目管理的权威机构</a:t>
-            </a:r>
-          </a:p>
           <a:p>
             <a:pPr marL="971550" lvl="1" indent="-514350">
               <a:buFontTx/>
               <a:buNone/>
               <a:defRPr/>
             </a:pPr>
-            <a:endParaRPr lang="en-US" altLang="zh-CN"/>
+            <a:r>
+              <a:rPr lang="en-US" altLang="zh-CN" sz="2800" dirty="0"/>
+              <a:t>2. </a:t>
+            </a:r>
+            <a:r>
+              <a:rPr lang="zh-CN" altLang="en-US" sz="2800" dirty="0"/>
+              <a:t>国际项目管理协会（</a:t>
+            </a:r>
+            <a:r>
+              <a:rPr lang="en-US" altLang="zh-CN" sz="2800" dirty="0"/>
+              <a:t>IPMA</a:t>
+            </a:r>
+            <a:r>
+              <a:rPr lang="zh-CN" altLang="en-US" sz="2800" dirty="0"/>
+              <a:t>）</a:t>
+            </a:r>
+            <a:endParaRPr lang="en-US" altLang="zh-CN" sz="2800" dirty="0"/>
+          </a:p>
+          <a:p>
+            <a:pPr marL="971550" lvl="1" indent="-514350">
+              <a:buFont typeface="Wingdings" panose="05000000000000000000" pitchFamily="2" charset="2"/>
+              <a:buChar char="Ø"/>
+              <a:defRPr/>
+            </a:pPr>
+            <a:r>
+              <a:rPr lang="en-US" altLang="zh-CN" sz="2800" dirty="0"/>
+              <a:t>IPMA</a:t>
+            </a:r>
+            <a:r>
+              <a:rPr lang="zh-CN" altLang="en-US" sz="2800" dirty="0"/>
+              <a:t>（</a:t>
+            </a:r>
+            <a:r>
+              <a:rPr lang="en-US" altLang="zh-CN" sz="2800" dirty="0"/>
+              <a:t>International Project Management Association</a:t>
+            </a:r>
+            <a:r>
+              <a:rPr lang="zh-CN" altLang="en-US" sz="2800" dirty="0"/>
+              <a:t>），创建于</a:t>
+            </a:r>
+            <a:r>
+              <a:rPr lang="en-US" altLang="zh-CN" sz="2800" dirty="0"/>
+              <a:t>1965</a:t>
+            </a:r>
+            <a:r>
+              <a:rPr lang="zh-CN" altLang="en-US" sz="2800" dirty="0"/>
+              <a:t>年，是国际上成立最早的项目管理专业组织</a:t>
+            </a:r>
+            <a:r>
+              <a:rPr lang="en-US" altLang="zh-CN" sz="2800" dirty="0"/>
+              <a:t>;</a:t>
+            </a:r>
+          </a:p>
+          <a:p>
+            <a:pPr marL="971550" lvl="1" indent="-514350">
+              <a:buFont typeface="Wingdings" panose="05000000000000000000" pitchFamily="2" charset="2"/>
+              <a:buChar char="Ø"/>
+              <a:defRPr/>
+            </a:pPr>
+            <a:r>
+              <a:rPr lang="zh-CN" altLang="en-US" sz="2800" dirty="0"/>
+              <a:t>国际项目管理专业资质认证（</a:t>
+            </a:r>
+            <a:r>
+              <a:rPr lang="en-US" altLang="zh-CN" sz="2800" dirty="0"/>
+              <a:t>International Project Management Professional</a:t>
+            </a:r>
+            <a:r>
+              <a:rPr lang="zh-CN" altLang="en-US" sz="2800" dirty="0"/>
+              <a:t>，简称</a:t>
+            </a:r>
+            <a:r>
+              <a:rPr lang="en-US" altLang="zh-CN" sz="2800" dirty="0"/>
+              <a:t>IPMP</a:t>
+            </a:r>
+            <a:r>
+              <a:rPr lang="zh-CN" altLang="en-US" sz="2800" dirty="0"/>
+              <a:t>）是</a:t>
+            </a:r>
+            <a:r>
+              <a:rPr lang="en-US" altLang="zh-CN" sz="2800" dirty="0"/>
+              <a:t>IPMA</a:t>
+            </a:r>
+            <a:r>
+              <a:rPr lang="zh-CN" altLang="en-US" sz="2800" dirty="0"/>
+              <a:t>在全球推行的四级项目管理专业资质认证体系的总称。</a:t>
+            </a:r>
+            <a:endParaRPr lang="en-US" altLang="zh-CN" sz="2800" dirty="0"/>
+          </a:p>
+          <a:p>
+            <a:pPr marL="971550" lvl="1" indent="-514350">
+              <a:buFont typeface="Wingdings" panose="05000000000000000000" pitchFamily="2" charset="2"/>
+              <a:buChar char="Ø"/>
+              <a:defRPr/>
+            </a:pPr>
+            <a:r>
+              <a:rPr lang="en-US" altLang="zh-CN" sz="2800" dirty="0"/>
+              <a:t>IPMA</a:t>
+            </a:r>
+            <a:r>
+              <a:rPr lang="zh-CN" altLang="en-US" sz="2800" dirty="0"/>
+              <a:t>四级分别对应大型国际项目、大型复杂项目、一般复杂项目与项目管理专业能力</a:t>
+            </a:r>
+            <a:endParaRPr lang="en-US" altLang="zh-CN" sz="2800" dirty="0"/>
           </a:p>
           <a:p>
             <a:pPr marL="971550" lvl="1" indent="-514350">
@@ -8567,115 +9070,7 @@
               <a:buNone/>
               <a:defRPr/>
             </a:pPr>
-            <a:r>
-              <a:rPr lang="en-US" altLang="zh-CN"/>
-              <a:t>2. </a:t>
-            </a:r>
-            <a:r>
-              <a:rPr lang="zh-CN" altLang="en-US"/>
-              <a:t>国际项目管理协会（</a:t>
-            </a:r>
-            <a:r>
-              <a:rPr lang="en-US" altLang="zh-CN"/>
-              <a:t>IPMA</a:t>
-            </a:r>
-            <a:r>
-              <a:rPr lang="zh-CN" altLang="en-US"/>
-              <a:t>）</a:t>
-            </a:r>
-            <a:endParaRPr lang="en-US" altLang="zh-CN"/>
-          </a:p>
-          <a:p>
-            <a:pPr marL="971550" lvl="1" indent="-514350">
-              <a:buFont typeface="Wingdings" panose="05000000000000000000" pitchFamily="2" charset="2"/>
-              <a:buChar char="Ø"/>
-              <a:defRPr/>
-            </a:pPr>
-            <a:r>
-              <a:rPr lang="en-US" altLang="zh-CN"/>
-              <a:t>IPMA</a:t>
-            </a:r>
-            <a:r>
-              <a:rPr lang="zh-CN" altLang="en-US"/>
-              <a:t>（</a:t>
-            </a:r>
-            <a:r>
-              <a:rPr lang="en-US" altLang="zh-CN"/>
-              <a:t>International Project Management Association</a:t>
-            </a:r>
-            <a:r>
-              <a:rPr lang="zh-CN" altLang="en-US"/>
-              <a:t>），创建于</a:t>
-            </a:r>
-            <a:r>
-              <a:rPr lang="en-US" altLang="zh-CN"/>
-              <a:t>1965</a:t>
-            </a:r>
-            <a:r>
-              <a:rPr lang="zh-CN" altLang="en-US"/>
-              <a:t>年，是国际上成立最早的项目管理专业组织</a:t>
-            </a:r>
-            <a:endParaRPr lang="en-US" altLang="zh-CN"/>
-          </a:p>
-          <a:p>
-            <a:pPr marL="971550" lvl="1" indent="-514350">
-              <a:buFont typeface="Wingdings" panose="05000000000000000000" pitchFamily="2" charset="2"/>
-              <a:buChar char="Ø"/>
-              <a:defRPr/>
-            </a:pPr>
-            <a:r>
-              <a:rPr lang="zh-CN" altLang="en-US"/>
-              <a:t>国际项目管理专业资质认证（</a:t>
-            </a:r>
-            <a:r>
-              <a:rPr lang="en-US" altLang="zh-CN"/>
-              <a:t>International Project Management Professional</a:t>
-            </a:r>
-            <a:r>
-              <a:rPr lang="zh-CN" altLang="en-US"/>
-              <a:t>，简称</a:t>
-            </a:r>
-            <a:r>
-              <a:rPr lang="en-US" altLang="zh-CN"/>
-              <a:t>IPMP</a:t>
-            </a:r>
-            <a:r>
-              <a:rPr lang="zh-CN" altLang="en-US"/>
-              <a:t>）是</a:t>
-            </a:r>
-            <a:r>
-              <a:rPr lang="en-US" altLang="zh-CN"/>
-              <a:t>IPMA</a:t>
-            </a:r>
-            <a:r>
-              <a:rPr lang="zh-CN" altLang="en-US"/>
-              <a:t>在全球推行的四级项目管理专业资质认证体系的总称。</a:t>
-            </a:r>
-            <a:endParaRPr lang="en-US" altLang="zh-CN"/>
-          </a:p>
-          <a:p>
-            <a:pPr marL="971550" lvl="1" indent="-514350">
-              <a:buFont typeface="Wingdings" panose="05000000000000000000" pitchFamily="2" charset="2"/>
-              <a:buChar char="Ø"/>
-              <a:defRPr/>
-            </a:pPr>
-            <a:r>
-              <a:rPr lang="en-US" altLang="zh-CN"/>
-              <a:t>IPMA</a:t>
-            </a:r>
-            <a:r>
-              <a:rPr lang="zh-CN" altLang="en-US"/>
-              <a:t>四级分别对应大型国际项目、大型复杂项目、一般复杂项目与项目管理专业能力</a:t>
-            </a:r>
-            <a:endParaRPr lang="en-US" altLang="zh-CN"/>
-          </a:p>
-          <a:p>
-            <a:pPr marL="971550" lvl="1" indent="-514350">
-              <a:buFontTx/>
-              <a:buNone/>
-              <a:defRPr/>
-            </a:pPr>
-            <a:endParaRPr lang="zh-CN" altLang="en-US"/>
+            <a:endParaRPr lang="zh-CN" altLang="en-US" dirty="0"/>
           </a:p>
         </p:txBody>
       </p:sp>
@@ -8734,7 +9129,7 @@
 </p:sld>
 </file>
 
-<file path=ppt/slides/slide11.xml><?xml version="1.0" encoding="utf-8"?>
+<file path=ppt/slides/slide12.xml><?xml version="1.0" encoding="utf-8"?>
 <p:sld xmlns:a="http://schemas.openxmlformats.org/drawingml/2006/main" xmlns:r="http://schemas.openxmlformats.org/officeDocument/2006/relationships" xmlns:p="http://schemas.openxmlformats.org/presentationml/2006/main">
   <p:cSld>
     <p:spTree>
@@ -8775,46 +9170,25 @@
         </p:spPr>
         <p:txBody>
           <a:bodyPr>
-            <a:normAutofit/>
+            <a:noAutofit/>
           </a:bodyPr>
           <a:lstStyle/>
-          <a:p>
-            <a:pPr>
-              <a:defRPr/>
-            </a:pPr>
-            <a:r>
-              <a:rPr lang="en-US" altLang="zh-CN" sz="4000"/>
-              <a:t>1.1.2 </a:t>
-            </a:r>
-            <a:r>
-              <a:rPr lang="zh-CN" altLang="en-US" sz="4000"/>
-              <a:t>推广项目管理的权威机构</a:t>
-            </a:r>
-          </a:p>
           <a:p>
             <a:pPr marL="971550" lvl="1" indent="-514350">
               <a:buFontTx/>
               <a:buNone/>
               <a:defRPr/>
             </a:pPr>
-            <a:endParaRPr lang="en-US" altLang="zh-CN"/>
-          </a:p>
-          <a:p>
-            <a:pPr marL="971550" lvl="1" indent="-514350">
-              <a:buFontTx/>
-              <a:buNone/>
-              <a:defRPr/>
-            </a:pPr>
-            <a:r>
-              <a:rPr lang="en-US" altLang="zh-CN"/>
+            <a:r>
+              <a:rPr lang="en-US" altLang="zh-CN" sz="2800" dirty="0"/>
               <a:t>3. </a:t>
             </a:r>
             <a:r>
-              <a:rPr lang="zh-CN" altLang="en-US"/>
+              <a:rPr lang="zh-CN" altLang="en-US" sz="2800" dirty="0"/>
               <a:t>英国商务部与</a:t>
             </a:r>
             <a:r>
-              <a:rPr lang="en-US" altLang="zh-CN"/>
+              <a:rPr lang="en-US" altLang="zh-CN" sz="2800" dirty="0"/>
               <a:t>PRINCE 2:</a:t>
             </a:r>
           </a:p>
@@ -8825,34 +9199,38 @@
               <a:defRPr/>
             </a:pPr>
             <a:r>
-              <a:rPr lang="zh-CN" altLang="en-US"/>
+              <a:rPr lang="zh-CN" altLang="en-US" sz="2800" dirty="0"/>
               <a:t>英国商务部出资研发的</a:t>
             </a:r>
             <a:r>
-              <a:rPr lang="en-US" altLang="zh-CN"/>
+              <a:rPr lang="en-US" altLang="zh-CN" sz="2800" dirty="0"/>
               <a:t>PRINCE</a:t>
             </a:r>
             <a:r>
-              <a:rPr lang="zh-CN" altLang="en-US"/>
+              <a:rPr lang="zh-CN" altLang="en-US" sz="2800" dirty="0"/>
               <a:t>（</a:t>
             </a:r>
             <a:r>
-              <a:rPr lang="en-US" altLang="zh-CN"/>
-              <a:t>PRojects IN Controlled Environments</a:t>
-            </a:r>
-            <a:r>
-              <a:rPr lang="zh-CN" altLang="en-US"/>
+              <a:rPr lang="en-US" altLang="zh-CN" sz="2800" dirty="0" err="1"/>
+              <a:t>PRojects</a:t>
+            </a:r>
+            <a:r>
+              <a:rPr lang="en-US" altLang="zh-CN" sz="2800" dirty="0"/>
+              <a:t> IN Controlled Environments</a:t>
+            </a:r>
+            <a:r>
+              <a:rPr lang="zh-CN" altLang="en-US" sz="2800" dirty="0"/>
               <a:t>）是组织、管理和控制项目的方法，改进后的</a:t>
             </a:r>
             <a:r>
-              <a:rPr lang="en-US" altLang="zh-CN"/>
+              <a:rPr lang="en-US" altLang="zh-CN" sz="2800" dirty="0"/>
               <a:t>2</a:t>
             </a:r>
             <a:r>
-              <a:rPr lang="zh-CN" altLang="en-US"/>
+              <a:rPr lang="zh-CN" altLang="en-US" sz="2800" dirty="0"/>
               <a:t>代成为面向所有类型项目的、通用的、最佳实践的项目管理方法。</a:t>
             </a:r>
-            <a:endParaRPr lang="en-US" altLang="zh-CN"/>
+            <a:endParaRPr lang="en-US" altLang="zh-CN" sz="2800" dirty="0"/>
           </a:p>
           <a:p>
             <a:pPr marL="971550" lvl="1" indent="-514350">
@@ -8861,27 +9239,27 @@
               <a:defRPr/>
             </a:pPr>
             <a:r>
-              <a:rPr lang="en-US" altLang="zh-CN"/>
+              <a:rPr lang="en-US" altLang="zh-CN" sz="2800" dirty="0"/>
               <a:t>PRINCE2</a:t>
             </a:r>
             <a:r>
-              <a:rPr lang="zh-CN" altLang="en-US"/>
+              <a:rPr lang="zh-CN" altLang="en-US" sz="2800" dirty="0"/>
               <a:t>是基于过程（</a:t>
             </a:r>
             <a:r>
-              <a:rPr lang="en-US" altLang="zh-CN"/>
+              <a:rPr lang="en-US" altLang="zh-CN" sz="2800" dirty="0"/>
               <a:t>process-based</a:t>
             </a:r>
             <a:r>
-              <a:rPr lang="zh-CN" altLang="en-US"/>
+              <a:rPr lang="zh-CN" altLang="en-US" sz="2800" dirty="0"/>
               <a:t>）的方法，它提供从项目开始到项目结束覆盖整个项目生命期的基于过程的结构化的项目管理方法，适合于所有类型项目（不管项目的大小和领域，不再局限于</a:t>
             </a:r>
             <a:r>
-              <a:rPr lang="en-US" altLang="zh-CN"/>
+              <a:rPr lang="en-US" altLang="zh-CN" sz="2800" dirty="0"/>
               <a:t>IT</a:t>
             </a:r>
             <a:r>
-              <a:rPr lang="zh-CN" altLang="en-US"/>
+              <a:rPr lang="zh-CN" altLang="en-US" sz="2800" dirty="0"/>
               <a:t>项目），是一种易于剪裁和灵活使用的管理方法</a:t>
             </a:r>
           </a:p>
@@ -8942,7 +9320,7 @@
 </p:sld>
 </file>
 
-<file path=ppt/slides/slide12.xml><?xml version="1.0" encoding="utf-8"?>
+<file path=ppt/slides/slide13.xml><?xml version="1.0" encoding="utf-8"?>
 <p:sld xmlns:a="http://schemas.openxmlformats.org/drawingml/2006/main" xmlns:r="http://schemas.openxmlformats.org/officeDocument/2006/relationships" xmlns:p="http://schemas.openxmlformats.org/presentationml/2006/main">
   <p:cSld>
     <p:spTree>
@@ -8978,58 +9356,37 @@
         <p:spPr>
           <a:xfrm>
             <a:off x="0" y="760413"/>
-            <a:ext cx="8229600" cy="4525962"/>
+            <a:ext cx="9036496" cy="4525962"/>
           </a:xfrm>
         </p:spPr>
         <p:txBody>
           <a:bodyPr>
-            <a:normAutofit/>
+            <a:noAutofit/>
           </a:bodyPr>
           <a:lstStyle/>
-          <a:p>
-            <a:pPr>
-              <a:defRPr/>
-            </a:pPr>
-            <a:r>
-              <a:rPr lang="en-US" altLang="zh-CN" sz="4000"/>
-              <a:t>1.1.2 </a:t>
-            </a:r>
-            <a:r>
-              <a:rPr lang="zh-CN" altLang="en-US" sz="4000"/>
-              <a:t>推广项目管理的权威机构</a:t>
-            </a:r>
-          </a:p>
           <a:p>
             <a:pPr marL="971550" lvl="1" indent="-514350">
               <a:buFontTx/>
               <a:buNone/>
               <a:defRPr/>
             </a:pPr>
-            <a:endParaRPr lang="en-US" altLang="zh-CN"/>
-          </a:p>
-          <a:p>
-            <a:pPr marL="971550" lvl="1" indent="-514350">
-              <a:buFontTx/>
-              <a:buNone/>
-              <a:defRPr/>
-            </a:pPr>
-            <a:r>
-              <a:rPr lang="en-US" altLang="zh-CN"/>
+            <a:r>
+              <a:rPr lang="en-US" altLang="zh-CN" sz="2800" dirty="0"/>
               <a:t>4. </a:t>
             </a:r>
             <a:r>
-              <a:rPr lang="zh-CN" altLang="en-US"/>
+              <a:rPr lang="zh-CN" altLang="en-US" sz="2800" dirty="0"/>
               <a:t>中国项目管理研究委员会（</a:t>
             </a:r>
             <a:r>
-              <a:rPr lang="en-US" altLang="zh-CN"/>
+              <a:rPr lang="en-US" altLang="zh-CN" sz="2800" dirty="0"/>
               <a:t>PMRC</a:t>
             </a:r>
             <a:r>
-              <a:rPr lang="zh-CN" altLang="en-US"/>
+              <a:rPr lang="zh-CN" altLang="en-US" sz="2800" dirty="0"/>
               <a:t>）</a:t>
             </a:r>
-            <a:endParaRPr lang="en-US" altLang="zh-CN"/>
+            <a:endParaRPr lang="en-US" altLang="zh-CN" sz="2800" dirty="0"/>
           </a:p>
           <a:p>
             <a:pPr marL="971550" lvl="1" indent="-514350">
@@ -9038,31 +9395,31 @@
               <a:defRPr/>
             </a:pPr>
             <a:r>
-              <a:rPr lang="en-US" altLang="zh-CN"/>
+              <a:rPr lang="en-US" altLang="zh-CN" sz="2800" dirty="0"/>
               <a:t>PMRC</a:t>
             </a:r>
             <a:r>
-              <a:rPr lang="zh-CN" altLang="en-US"/>
+              <a:rPr lang="zh-CN" altLang="en-US" sz="2800" dirty="0"/>
               <a:t>成立于</a:t>
             </a:r>
             <a:r>
-              <a:rPr lang="en-US" altLang="zh-CN"/>
+              <a:rPr lang="en-US" altLang="zh-CN" sz="2800" dirty="0"/>
               <a:t>1991</a:t>
             </a:r>
             <a:r>
-              <a:rPr lang="zh-CN" altLang="en-US"/>
+              <a:rPr lang="zh-CN" altLang="en-US" sz="2800" dirty="0"/>
               <a:t>年</a:t>
             </a:r>
             <a:r>
-              <a:rPr lang="en-US" altLang="zh-CN"/>
+              <a:rPr lang="en-US" altLang="zh-CN" sz="2800" dirty="0"/>
               <a:t>6</a:t>
             </a:r>
             <a:r>
-              <a:rPr lang="zh-CN" altLang="en-US"/>
+              <a:rPr lang="zh-CN" altLang="en-US" sz="2800" dirty="0"/>
               <a:t>月，作为中国项目管理专业组织的代表加入了</a:t>
             </a:r>
             <a:r>
-              <a:rPr lang="en-US" altLang="zh-CN"/>
+              <a:rPr lang="en-US" altLang="zh-CN" sz="2800" dirty="0"/>
               <a:t>IPMA</a:t>
             </a:r>
           </a:p>
@@ -9073,70 +9430,70 @@
               <a:defRPr/>
             </a:pPr>
             <a:r>
-              <a:rPr lang="en-US" altLang="zh-CN"/>
+              <a:rPr lang="en-US" altLang="zh-CN" sz="2800" dirty="0"/>
               <a:t>PMRC</a:t>
             </a:r>
             <a:r>
-              <a:rPr lang="zh-CN" altLang="en-US"/>
+              <a:rPr lang="zh-CN" altLang="en-US" sz="2800" dirty="0"/>
               <a:t>建立了与国际接轨的</a:t>
             </a:r>
             <a:r>
-              <a:rPr lang="en-US" altLang="zh-CN"/>
+              <a:rPr lang="en-US" altLang="zh-CN" sz="2800" dirty="0"/>
               <a:t>《</a:t>
             </a:r>
             <a:r>
-              <a:rPr lang="zh-CN" altLang="en-US"/>
+              <a:rPr lang="zh-CN" altLang="en-US" sz="2800" dirty="0"/>
               <a:t>中国项目管理知识体系（</a:t>
             </a:r>
             <a:r>
-              <a:rPr lang="en-US" altLang="zh-CN"/>
+              <a:rPr lang="en-US" altLang="zh-CN" sz="2800" dirty="0"/>
               <a:t>C-PMBOK</a:t>
             </a:r>
             <a:r>
-              <a:rPr lang="zh-CN" altLang="en-US"/>
+              <a:rPr lang="zh-CN" altLang="en-US" sz="2800" dirty="0"/>
               <a:t>）</a:t>
             </a:r>
             <a:r>
-              <a:rPr lang="en-US" altLang="zh-CN"/>
+              <a:rPr lang="en-US" altLang="zh-CN" sz="2800" dirty="0"/>
               <a:t>》</a:t>
             </a:r>
             <a:r>
-              <a:rPr lang="zh-CN" altLang="en-US"/>
+              <a:rPr lang="zh-CN" altLang="en-US" sz="2800" dirty="0"/>
               <a:t>，引进并推行“国际项目管理专业资质认证（</a:t>
             </a:r>
             <a:r>
-              <a:rPr lang="en-US" altLang="zh-CN"/>
+              <a:rPr lang="en-US" altLang="zh-CN" sz="2800" dirty="0"/>
               <a:t>IPMP</a:t>
             </a:r>
             <a:r>
-              <a:rPr lang="zh-CN" altLang="en-US"/>
+              <a:rPr lang="zh-CN" altLang="en-US" sz="2800" dirty="0"/>
               <a:t>）”，基于国际项目管理协会推出的认证标准</a:t>
             </a:r>
             <a:r>
-              <a:rPr lang="en-US" altLang="zh-CN"/>
+              <a:rPr lang="en-US" altLang="zh-CN" sz="2800" dirty="0"/>
               <a:t>ICB</a:t>
             </a:r>
             <a:r>
-              <a:rPr lang="zh-CN" altLang="en-US"/>
+              <a:rPr lang="zh-CN" altLang="en-US" sz="2800" dirty="0"/>
               <a:t>（</a:t>
             </a:r>
             <a:r>
-              <a:rPr lang="en-US" altLang="zh-CN"/>
+              <a:rPr lang="en-US" altLang="zh-CN" sz="2800" dirty="0"/>
               <a:t>IPMA Competence Baseline</a:t>
             </a:r>
             <a:r>
-              <a:rPr lang="zh-CN" altLang="en-US"/>
+              <a:rPr lang="zh-CN" altLang="en-US" sz="2800" dirty="0"/>
               <a:t>）建立了既能适合我国的国情又能得到国际认可的中国项目管理能力基准（</a:t>
             </a:r>
             <a:r>
-              <a:rPr lang="en-US" altLang="zh-CN"/>
+              <a:rPr lang="en-US" altLang="zh-CN" sz="2800" dirty="0"/>
               <a:t>C-NCB</a:t>
             </a:r>
             <a:r>
-              <a:rPr lang="zh-CN" altLang="en-US"/>
+              <a:rPr lang="zh-CN" altLang="en-US" sz="2800" dirty="0"/>
               <a:t>）</a:t>
             </a:r>
-            <a:endParaRPr lang="en-US" altLang="zh-CN"/>
+            <a:endParaRPr lang="en-US" altLang="zh-CN" sz="2800" dirty="0"/>
           </a:p>
           <a:p>
             <a:pPr marL="971550" lvl="1" indent="-514350">
@@ -9144,54 +9501,7 @@
               <a:buChar char="Ø"/>
               <a:defRPr/>
             </a:pPr>
-            <a:endParaRPr lang="zh-CN" altLang="en-US"/>
-          </a:p>
-        </p:txBody>
-      </p:sp>
-      <p:sp>
-        <p:nvSpPr>
-          <p:cNvPr id="19460" name="Line 7">
-            <a:extLst>
-              <a:ext uri="{FF2B5EF4-FFF2-40B4-BE49-F238E27FC236}">
-                <a16:creationId xmlns:a16="http://schemas.microsoft.com/office/drawing/2014/main" id="{753A6E87-04F4-4EB8-9B53-82A43B2E9650}"/>
-              </a:ext>
-            </a:extLst>
-          </p:cNvPr>
-          <p:cNvSpPr>
-            <a:spLocks noChangeShapeType="1"/>
-          </p:cNvSpPr>
-          <p:nvPr/>
-        </p:nvSpPr>
-        <p:spPr bwMode="auto">
-          <a:xfrm>
-            <a:off x="0" y="476250"/>
-            <a:ext cx="9144000" cy="0"/>
-          </a:xfrm>
-          <a:prstGeom prst="line">
-            <a:avLst/>
-          </a:prstGeom>
-          <a:noFill/>
-          <a:ln w="9525">
-            <a:solidFill>
-              <a:srgbClr val="9900CC"/>
-            </a:solidFill>
-            <a:round/>
-            <a:headEnd/>
-            <a:tailEnd/>
-          </a:ln>
-          <a:extLst>
-            <a:ext uri="{909E8E84-426E-40DD-AFC4-6F175D3DCCD1}">
-              <a14:hiddenFill xmlns:a14="http://schemas.microsoft.com/office/drawing/2010/main">
-                <a:noFill/>
-              </a14:hiddenFill>
-            </a:ext>
-          </a:extLst>
-        </p:spPr>
-        <p:txBody>
-          <a:bodyPr/>
-          <a:lstStyle/>
-          <a:p>
-            <a:endParaRPr lang="zh-CN" altLang="en-US"/>
+            <a:endParaRPr lang="zh-CN" altLang="en-US" dirty="0"/>
           </a:p>
         </p:txBody>
       </p:sp>
@@ -9203,7 +9513,7 @@
 </p:sld>
 </file>
 
-<file path=ppt/slides/slide13.xml><?xml version="1.0" encoding="utf-8"?>
+<file path=ppt/slides/slide14.xml><?xml version="1.0" encoding="utf-8"?>
 <p:sld xmlns:a="http://schemas.openxmlformats.org/drawingml/2006/main" xmlns:r="http://schemas.openxmlformats.org/officeDocument/2006/relationships" xmlns:p="http://schemas.openxmlformats.org/presentationml/2006/main">
   <p:cSld>
     <p:spTree>
@@ -9239,43 +9549,28 @@
         <p:spPr>
           <a:xfrm>
             <a:off x="0" y="714375"/>
-            <a:ext cx="8229600" cy="4525963"/>
+            <a:ext cx="8748464" cy="4525963"/>
           </a:xfrm>
         </p:spPr>
         <p:txBody>
-          <a:bodyPr/>
+          <a:bodyPr>
+            <a:noAutofit/>
+          </a:bodyPr>
           <a:lstStyle/>
-          <a:p>
-            <a:r>
-              <a:rPr lang="en-US" altLang="zh-CN" sz="4000" dirty="0"/>
-              <a:t>1.1.2 </a:t>
-            </a:r>
-            <a:r>
-              <a:rPr lang="zh-CN" altLang="en-US" sz="4000" dirty="0"/>
-              <a:t>推广项目管理的权威机构</a:t>
-            </a:r>
-          </a:p>
           <a:p>
             <a:pPr marL="971550" lvl="1" indent="-514350">
               <a:buFontTx/>
               <a:buNone/>
             </a:pPr>
-            <a:endParaRPr lang="en-US" altLang="zh-CN" dirty="0"/>
-          </a:p>
-          <a:p>
-            <a:pPr marL="971550" lvl="1" indent="-514350">
-              <a:buFontTx/>
-              <a:buNone/>
-            </a:pPr>
-            <a:r>
-              <a:rPr lang="en-US" altLang="zh-CN" dirty="0"/>
+            <a:r>
+              <a:rPr lang="en-US" altLang="zh-CN" sz="2800" dirty="0"/>
               <a:t>5.  </a:t>
             </a:r>
             <a:r>
-              <a:rPr lang="zh-CN" altLang="en-US" dirty="0"/>
+              <a:rPr lang="zh-CN" altLang="en-US" sz="2800" dirty="0"/>
               <a:t>中国人力资源和社会保障部与项目管理师</a:t>
             </a:r>
-            <a:endParaRPr lang="en-US" altLang="zh-CN" dirty="0"/>
+            <a:endParaRPr lang="en-US" altLang="zh-CN" sz="2800" dirty="0"/>
           </a:p>
           <a:p>
             <a:pPr marL="971550" lvl="1" indent="-514350">
@@ -9283,18 +9578,18 @@
               <a:buChar char="Ø"/>
             </a:pPr>
             <a:r>
-              <a:rPr lang="zh-CN" altLang="en-US" dirty="0"/>
+              <a:rPr lang="zh-CN" altLang="en-US" sz="2800" dirty="0"/>
               <a:t>中国的项目管理师（</a:t>
             </a:r>
             <a:r>
-              <a:rPr lang="en-US" altLang="zh-CN" dirty="0"/>
+              <a:rPr lang="en-US" altLang="zh-CN" sz="2800" dirty="0"/>
               <a:t>China Project Management Professional</a:t>
             </a:r>
             <a:r>
-              <a:rPr lang="zh-CN" altLang="en-US" dirty="0"/>
+              <a:rPr lang="zh-CN" altLang="en-US" sz="2800" dirty="0"/>
               <a:t>）国家职业资格认证是中华人民共和国劳动和社会保障部在全国范围内推行的项目管理专业人员资质认证体系的总称。</a:t>
             </a:r>
-            <a:endParaRPr lang="en-US" altLang="zh-CN" dirty="0"/>
+            <a:endParaRPr lang="en-US" altLang="zh-CN" sz="2800" dirty="0"/>
           </a:p>
           <a:p>
             <a:pPr marL="971550" lvl="1" indent="-514350">
@@ -9302,7 +9597,7 @@
               <a:buChar char="Ø"/>
             </a:pPr>
             <a:r>
-              <a:rPr lang="zh-CN" altLang="en-US" dirty="0"/>
+              <a:rPr lang="zh-CN" altLang="en-US" sz="2800" dirty="0"/>
               <a:t>它共分为四个等级：项目管理员、助理项目管理师、项目管理师、高级项目管理师，每个等级分别授予不同级别的证书。</a:t>
             </a:r>
           </a:p>
@@ -9363,7 +9658,7 @@
 </p:sld>
 </file>
 
-<file path=ppt/slides/slide14.xml><?xml version="1.0" encoding="utf-8"?>
+<file path=ppt/slides/slide15.xml><?xml version="1.0" encoding="utf-8"?>
 <p:sld xmlns:a="http://schemas.openxmlformats.org/drawingml/2006/main" xmlns:r="http://schemas.openxmlformats.org/officeDocument/2006/relationships" xmlns:p="http://schemas.openxmlformats.org/presentationml/2006/main">
   <p:cSld>
     <p:spTree>
@@ -9403,39 +9698,24 @@
           </a:xfrm>
         </p:spPr>
         <p:txBody>
-          <a:bodyPr/>
+          <a:bodyPr>
+            <a:noAutofit/>
+          </a:bodyPr>
           <a:lstStyle/>
-          <a:p>
-            <a:r>
-              <a:rPr lang="en-US" altLang="zh-CN" sz="4000"/>
-              <a:t>1.1.2 </a:t>
-            </a:r>
-            <a:r>
-              <a:rPr lang="zh-CN" altLang="en-US" sz="4000"/>
-              <a:t>推广项目管理的权威机构</a:t>
-            </a:r>
-          </a:p>
           <a:p>
             <a:pPr marL="971550" lvl="1" indent="-514350">
               <a:buFontTx/>
               <a:buNone/>
             </a:pPr>
-            <a:endParaRPr lang="en-US" altLang="zh-CN"/>
-          </a:p>
-          <a:p>
-            <a:pPr marL="971550" lvl="1" indent="-514350">
-              <a:buFontTx/>
-              <a:buNone/>
-            </a:pPr>
-            <a:r>
-              <a:rPr lang="en-US" altLang="zh-CN"/>
+            <a:r>
+              <a:rPr lang="en-US" altLang="zh-CN" sz="2800" dirty="0"/>
               <a:t>6. </a:t>
             </a:r>
             <a:r>
-              <a:rPr lang="zh-CN" altLang="en-US"/>
+              <a:rPr lang="zh-CN" altLang="en-US" sz="2800" dirty="0"/>
               <a:t>中国信息产业部与系统集成项目经理</a:t>
             </a:r>
-            <a:endParaRPr lang="en-US" altLang="zh-CN"/>
+            <a:endParaRPr lang="en-US" altLang="zh-CN" sz="2800" dirty="0"/>
           </a:p>
           <a:p>
             <a:pPr marL="971550" lvl="1" indent="-514350">
@@ -9443,34 +9723,34 @@
               <a:buChar char="Ø"/>
             </a:pPr>
             <a:r>
-              <a:rPr lang="zh-CN" altLang="en-US"/>
+              <a:rPr lang="zh-CN" altLang="en-US" sz="2800" dirty="0"/>
               <a:t>信息产业部于</a:t>
             </a:r>
             <a:r>
-              <a:rPr lang="en-US" altLang="zh-CN"/>
+              <a:rPr lang="en-US" altLang="zh-CN" sz="2800" dirty="0"/>
               <a:t>2002</a:t>
             </a:r>
             <a:r>
-              <a:rPr lang="zh-CN" altLang="en-US"/>
+              <a:rPr lang="zh-CN" altLang="en-US" sz="2800" dirty="0"/>
               <a:t>年发布了</a:t>
             </a:r>
             <a:r>
-              <a:rPr lang="en-US" altLang="zh-CN"/>
+              <a:rPr lang="en-US" altLang="zh-CN" sz="2800" dirty="0"/>
               <a:t>《</a:t>
             </a:r>
             <a:r>
-              <a:rPr lang="zh-CN" altLang="en-US"/>
+              <a:rPr lang="zh-CN" altLang="en-US" sz="2800" dirty="0"/>
               <a:t>计算机信息系统集成项目经理资质管理办法（试行）</a:t>
             </a:r>
             <a:r>
-              <a:rPr lang="en-US" altLang="zh-CN"/>
+              <a:rPr lang="en-US" altLang="zh-CN" sz="2800" dirty="0"/>
               <a:t>》</a:t>
             </a:r>
             <a:r>
-              <a:rPr lang="zh-CN" altLang="en-US"/>
+              <a:rPr lang="zh-CN" altLang="en-US" sz="2800" dirty="0"/>
               <a:t>的通知，明文规定信息产业部负责全国系统集成项目经理资质的管理工作，系统集成项目经理资质证书由信息产业部统一印制。</a:t>
             </a:r>
-            <a:endParaRPr lang="en-US" altLang="zh-CN"/>
+            <a:endParaRPr lang="en-US" altLang="zh-CN" sz="2800" dirty="0"/>
           </a:p>
           <a:p>
             <a:pPr marL="971550" lvl="1" indent="-514350">
@@ -9478,10 +9758,10 @@
               <a:buChar char="Ø"/>
             </a:pPr>
             <a:r>
-              <a:rPr lang="zh-CN" altLang="en-US"/>
+              <a:rPr lang="zh-CN" altLang="en-US" sz="2800" dirty="0"/>
               <a:t>系统集成项目经理分为项目经理、高级项目经理和资深项目经理三个级别。</a:t>
             </a:r>
-            <a:endParaRPr lang="en-US" altLang="zh-CN"/>
+            <a:endParaRPr lang="en-US" altLang="zh-CN" sz="2800" dirty="0"/>
           </a:p>
         </p:txBody>
       </p:sp>
@@ -9540,7 +9820,7 @@
 </p:sld>
 </file>
 
-<file path=ppt/slides/slide15.xml><?xml version="1.0" encoding="utf-8"?>
+<file path=ppt/slides/slide16.xml><?xml version="1.0" encoding="utf-8"?>
 <p:sld xmlns:a="http://schemas.openxmlformats.org/drawingml/2006/main" xmlns:r="http://schemas.openxmlformats.org/officeDocument/2006/relationships" xmlns:p="http://schemas.openxmlformats.org/presentationml/2006/main">
   <p:cSld>
     <p:spTree>
@@ -9625,7 +9905,19 @@
             </a:r>
             <a:r>
               <a:rPr lang="zh-CN" altLang="en-US" sz="2400" dirty="0"/>
-              <a:t>对项目管理的知识体系进行了规范，将项目管理知识结构化为十大知识体系。</a:t>
+              <a:t>对项目管理的知识体系进行了规范，将项目管理知识结构化为</a:t>
+            </a:r>
+            <a:r>
+              <a:rPr lang="zh-CN" altLang="en-US" sz="2400" dirty="0">
+                <a:solidFill>
+                  <a:srgbClr val="FF0000"/>
+                </a:solidFill>
+              </a:rPr>
+              <a:t>十大知识领域</a:t>
+            </a:r>
+            <a:r>
+              <a:rPr lang="zh-CN" altLang="en-US" sz="2400" dirty="0"/>
+              <a:t>。</a:t>
             </a:r>
             <a:endParaRPr lang="en-US" altLang="zh-CN" sz="2400" dirty="0"/>
           </a:p>
@@ -9712,7 +10004,7 @@
 </p:sld>
 </file>
 
-<file path=ppt/slides/slide16.xml><?xml version="1.0" encoding="utf-8"?>
+<file path=ppt/slides/slide17.xml><?xml version="1.0" encoding="utf-8"?>
 <p:sld xmlns:a="http://schemas.openxmlformats.org/drawingml/2006/main" xmlns:r="http://schemas.openxmlformats.org/officeDocument/2006/relationships" xmlns:p="http://schemas.openxmlformats.org/presentationml/2006/main">
   <p:cSld>
     <p:spTree>
@@ -9797,7 +10089,7 @@
 </p:sld>
 </file>
 
-<file path=ppt/slides/slide17.xml><?xml version="1.0" encoding="utf-8"?>
+<file path=ppt/slides/slide18.xml><?xml version="1.0" encoding="utf-8"?>
 <p:sld xmlns:a="http://schemas.openxmlformats.org/drawingml/2006/main" xmlns:r="http://schemas.openxmlformats.org/officeDocument/2006/relationships" xmlns:p="http://schemas.openxmlformats.org/presentationml/2006/main">
   <p:cSld>
     <p:spTree>
@@ -9983,7 +10275,7 @@
               <a:rPr lang="zh-CN" altLang="en-US" dirty="0">
                 <a:ea typeface="黑体" panose="02010609060101010101" pitchFamily="49" charset="-122"/>
               </a:rPr>
-              <a:t>通常来讲包括：项目的启动、组织和准备</a:t>
+              <a:t>通常来讲项目一般包括项目的启动、组织和准备</a:t>
             </a:r>
             <a:r>
               <a:rPr lang="en-US" altLang="zh-CN" dirty="0">
@@ -10317,7 +10609,7 @@
 </p:sld>
 </file>
 
-<file path=ppt/slides/slide18.xml><?xml version="1.0" encoding="utf-8"?>
+<file path=ppt/slides/slide19.xml><?xml version="1.0" encoding="utf-8"?>
 <p:sld xmlns:a="http://schemas.openxmlformats.org/drawingml/2006/main" xmlns:r="http://schemas.openxmlformats.org/officeDocument/2006/relationships" xmlns:p="http://schemas.openxmlformats.org/presentationml/2006/main">
   <p:cSld>
     <p:spTree>
@@ -10353,7 +10645,7 @@
         <p:spPr>
           <a:xfrm>
             <a:off x="107504" y="188640"/>
-            <a:ext cx="9001000" cy="4824536"/>
+            <a:ext cx="9001000" cy="5184576"/>
           </a:xfrm>
         </p:spPr>
         <p:txBody>
@@ -10391,14 +10683,17 @@
                 <a:latin typeface="Times New Roman" panose="02020603050405020304" pitchFamily="18" charset="0"/>
                 <a:ea typeface="黑体" panose="02010609060101010101" pitchFamily="49" charset="-122"/>
               </a:rPr>
-              <a:t> 2.</a:t>
-            </a:r>
-            <a:r>
-              <a:rPr lang="zh-CN" altLang="en-US" dirty="0">
+              <a:t> </a:t>
+            </a:r>
+            <a:r>
+              <a:rPr lang="en-US" altLang="zh-CN" dirty="0">
+                <a:solidFill>
+                  <a:srgbClr val="FF0000"/>
+                </a:solidFill>
                 <a:latin typeface="Times New Roman" panose="02020603050405020304" pitchFamily="18" charset="0"/>
                 <a:ea typeface="黑体" panose="02010609060101010101" pitchFamily="49" charset="-122"/>
               </a:rPr>
-              <a:t>生命期阶段中的</a:t>
+              <a:t>2.</a:t>
             </a:r>
             <a:r>
               <a:rPr lang="zh-CN" altLang="en-US" dirty="0">
@@ -10408,7 +10703,7 @@
                 <a:latin typeface="Times New Roman" panose="02020603050405020304" pitchFamily="18" charset="0"/>
                 <a:ea typeface="黑体" panose="02010609060101010101" pitchFamily="49" charset="-122"/>
               </a:rPr>
-              <a:t>五个管理过程组</a:t>
+              <a:t>生命期阶段中的管理过程组</a:t>
             </a:r>
             <a:endParaRPr lang="en-US" altLang="zh-CN" dirty="0">
               <a:solidFill>
@@ -10434,7 +10729,7 @@
                 <a:latin typeface="Times New Roman" panose="02020603050405020304" pitchFamily="18" charset="0"/>
                 <a:ea typeface="黑体" panose="02010609060101010101" pitchFamily="49" charset="-122"/>
               </a:rPr>
-              <a:t>过程组决定了“我们如何用管理手段把这些工作控制好”。它是面向管理的。</a:t>
+              <a:t>项目管理就是在项目的生命周期内对其进行管理，将这些管理过程进行分组，就可以得到管理过程组；</a:t>
             </a:r>
             <a:endParaRPr lang="en-US" altLang="zh-CN" dirty="0">
               <a:latin typeface="Times New Roman" panose="02020603050405020304" pitchFamily="18" charset="0"/>
@@ -10457,6 +10752,46 @@
                 <a:latin typeface="Times New Roman" panose="02020603050405020304" pitchFamily="18" charset="0"/>
                 <a:ea typeface="黑体" panose="02010609060101010101" pitchFamily="49" charset="-122"/>
               </a:rPr>
+              <a:t>管理过程组决定了“我们如何用管理手段把这些工作控制好”。它是面向</a:t>
+            </a:r>
+            <a:r>
+              <a:rPr lang="zh-CN" altLang="en-US" dirty="0">
+                <a:solidFill>
+                  <a:srgbClr val="FF0000"/>
+                </a:solidFill>
+                <a:latin typeface="Times New Roman" panose="02020603050405020304" pitchFamily="18" charset="0"/>
+                <a:ea typeface="黑体" panose="02010609060101010101" pitchFamily="49" charset="-122"/>
+              </a:rPr>
+              <a:t>管理</a:t>
+            </a:r>
+            <a:r>
+              <a:rPr lang="zh-CN" altLang="en-US" dirty="0">
+                <a:latin typeface="Times New Roman" panose="02020603050405020304" pitchFamily="18" charset="0"/>
+                <a:ea typeface="黑体" panose="02010609060101010101" pitchFamily="49" charset="-122"/>
+              </a:rPr>
+              <a:t>的。</a:t>
+            </a:r>
+            <a:endParaRPr lang="en-US" altLang="zh-CN" dirty="0">
+              <a:latin typeface="Times New Roman" panose="02020603050405020304" pitchFamily="18" charset="0"/>
+              <a:ea typeface="黑体" panose="02010609060101010101" pitchFamily="49" charset="-122"/>
+            </a:endParaRPr>
+          </a:p>
+          <a:p>
+            <a:pPr marL="0" indent="0" algn="just">
+              <a:lnSpc>
+                <a:spcPct val="150000"/>
+              </a:lnSpc>
+              <a:spcBef>
+                <a:spcPts val="0"/>
+              </a:spcBef>
+              <a:buNone/>
+              <a:defRPr/>
+            </a:pPr>
+            <a:r>
+              <a:rPr lang="zh-CN" altLang="en-US" dirty="0">
+                <a:latin typeface="Times New Roman" panose="02020603050405020304" pitchFamily="18" charset="0"/>
+                <a:ea typeface="黑体" panose="02010609060101010101" pitchFamily="49" charset="-122"/>
+              </a:rPr>
               <a:t>无论什么行业，管理动作都是通用的。这五大过程组是</a:t>
             </a:r>
             <a:r>
@@ -10468,6 +10803,9 @@
             </a:r>
             <a:r>
               <a:rPr lang="zh-CN" altLang="en-US" dirty="0">
+                <a:solidFill>
+                  <a:srgbClr val="FF0000"/>
+                </a:solidFill>
                 <a:latin typeface="Times New Roman" panose="02020603050405020304" pitchFamily="18" charset="0"/>
                 <a:ea typeface="黑体" panose="02010609060101010101" pitchFamily="49" charset="-122"/>
               </a:rPr>
@@ -10619,317 +10957,6 @@
                       </p:childTnLst>
                     </p:cTn>
                   </p:par>
-                </p:childTnLst>
-              </p:cTn>
-              <p:prevCondLst>
-                <p:cond evt="onPrev" delay="0">
-                  <p:tgtEl>
-                    <p:sldTgt/>
-                  </p:tgtEl>
-                </p:cond>
-              </p:prevCondLst>
-              <p:nextCondLst>
-                <p:cond evt="onNext" delay="0">
-                  <p:tgtEl>
-                    <p:sldTgt/>
-                  </p:tgtEl>
-                </p:cond>
-              </p:nextCondLst>
-            </p:seq>
-          </p:childTnLst>
-        </p:cTn>
-      </p:par>
-    </p:tnLst>
-  </p:timing>
-</p:sld>
-</file>
-
-<file path=ppt/slides/slide19.xml><?xml version="1.0" encoding="utf-8"?>
-<p:sld xmlns:a="http://schemas.openxmlformats.org/drawingml/2006/main" xmlns:r="http://schemas.openxmlformats.org/officeDocument/2006/relationships" xmlns:p="http://schemas.openxmlformats.org/presentationml/2006/main">
-  <p:cSld>
-    <p:spTree>
-      <p:nvGrpSpPr>
-        <p:cNvPr id="1" name=""/>
-        <p:cNvGrpSpPr/>
-        <p:nvPr/>
-      </p:nvGrpSpPr>
-      <p:grpSpPr>
-        <a:xfrm>
-          <a:off x="0" y="0"/>
-          <a:ext cx="0" cy="0"/>
-          <a:chOff x="0" y="0"/>
-          <a:chExt cx="0" cy="0"/>
-        </a:xfrm>
-      </p:grpSpPr>
-      <p:sp>
-        <p:nvSpPr>
-          <p:cNvPr id="18434" name="Rectangle 5">
-            <a:extLst>
-              <a:ext uri="{FF2B5EF4-FFF2-40B4-BE49-F238E27FC236}">
-                <a16:creationId xmlns:a16="http://schemas.microsoft.com/office/drawing/2014/main" id="{FE76C534-66F0-41F6-A3E1-68108936218B}"/>
-              </a:ext>
-            </a:extLst>
-          </p:cNvPr>
-          <p:cNvSpPr>
-            <a:spLocks noGrp="1" noChangeArrowheads="1"/>
-          </p:cNvSpPr>
-          <p:nvPr>
-            <p:ph type="body" idx="4294967295"/>
-          </p:nvPr>
-        </p:nvSpPr>
-        <p:spPr>
-          <a:xfrm>
-            <a:off x="107504" y="188640"/>
-            <a:ext cx="9001000" cy="5400600"/>
-          </a:xfrm>
-        </p:spPr>
-        <p:txBody>
-          <a:bodyPr>
-            <a:noAutofit/>
-          </a:bodyPr>
-          <a:lstStyle/>
-          <a:p>
-            <a:pPr>
-              <a:defRPr/>
-            </a:pPr>
-            <a:r>
-              <a:rPr lang="en-US" altLang="zh-CN" sz="4000" dirty="0"/>
-              <a:t>1.1.4 </a:t>
-            </a:r>
-            <a:r>
-              <a:rPr lang="zh-CN" altLang="en-US" sz="4000" dirty="0"/>
-              <a:t>项目的过程管理</a:t>
-            </a:r>
-            <a:endParaRPr lang="en-US" altLang="zh-CN" sz="4000" dirty="0"/>
-          </a:p>
-          <a:p>
-            <a:pPr marL="0" indent="0">
-              <a:buNone/>
-            </a:pPr>
-            <a:r>
-              <a:rPr lang="en-US" altLang="zh-CN" b="1" dirty="0"/>
-              <a:t>3 </a:t>
-            </a:r>
-            <a:r>
-              <a:rPr lang="zh-CN" altLang="en-US" b="1" dirty="0"/>
-              <a:t>生命周期和管理过程组的关系</a:t>
-            </a:r>
-            <a:endParaRPr lang="en-US" altLang="zh-CN" b="1" dirty="0"/>
-          </a:p>
-          <a:p>
-            <a:pPr marL="0" indent="0" algn="just">
-              <a:lnSpc>
-                <a:spcPct val="150000"/>
-              </a:lnSpc>
-              <a:buNone/>
-            </a:pPr>
-            <a:r>
-              <a:rPr lang="en-US" altLang="zh-CN" sz="2400" b="1" dirty="0">
-                <a:solidFill>
-                  <a:srgbClr val="FF0000"/>
-                </a:solidFill>
-                <a:latin typeface="Times New Roman" panose="02020603050405020304" pitchFamily="18" charset="0"/>
-                <a:ea typeface="黑体" panose="02010609060101010101" pitchFamily="49" charset="-122"/>
-              </a:rPr>
-              <a:t>    </a:t>
-            </a:r>
-            <a:r>
-              <a:rPr lang="zh-CN" altLang="en-US" sz="2400" b="1" dirty="0">
-                <a:solidFill>
-                  <a:srgbClr val="FF0000"/>
-                </a:solidFill>
-                <a:latin typeface="Times New Roman" panose="02020603050405020304" pitchFamily="18" charset="0"/>
-                <a:ea typeface="黑体" panose="02010609060101010101" pitchFamily="49" charset="-122"/>
-              </a:rPr>
-              <a:t>过程组是“嵌套”在生命周期的各个阶段中！</a:t>
-            </a:r>
-          </a:p>
-          <a:p>
-            <a:pPr marL="0" indent="0" algn="just">
-              <a:lnSpc>
-                <a:spcPct val="150000"/>
-              </a:lnSpc>
-              <a:spcBef>
-                <a:spcPts val="0"/>
-              </a:spcBef>
-              <a:buNone/>
-            </a:pPr>
-            <a:r>
-              <a:rPr lang="zh-CN" altLang="en-US" sz="2400" dirty="0">
-                <a:latin typeface="Times New Roman" panose="02020603050405020304" pitchFamily="18" charset="0"/>
-                <a:ea typeface="黑体" panose="02010609060101010101" pitchFamily="49" charset="-122"/>
-              </a:rPr>
-              <a:t>“启动过程组”对应生命周期的“需求分析阶段”，“收尾过程组”对应生命周期的“上线阶段”。这个表述是否正确？</a:t>
-            </a:r>
-            <a:endParaRPr lang="en-US" altLang="zh-CN" sz="2400" dirty="0">
-              <a:latin typeface="Times New Roman" panose="02020603050405020304" pitchFamily="18" charset="0"/>
-              <a:ea typeface="黑体" panose="02010609060101010101" pitchFamily="49" charset="-122"/>
-            </a:endParaRPr>
-          </a:p>
-          <a:p>
-            <a:pPr marL="0" indent="0" algn="just">
-              <a:lnSpc>
-                <a:spcPct val="150000"/>
-              </a:lnSpc>
-              <a:spcBef>
-                <a:spcPts val="0"/>
-              </a:spcBef>
-              <a:buNone/>
-            </a:pPr>
-            <a:r>
-              <a:rPr lang="zh-CN" altLang="en-US" sz="2400" b="1" dirty="0">
-                <a:solidFill>
-                  <a:srgbClr val="FF0000"/>
-                </a:solidFill>
-                <a:latin typeface="Times New Roman" panose="02020603050405020304" pitchFamily="18" charset="0"/>
-                <a:ea typeface="黑体" panose="02010609060101010101" pitchFamily="49" charset="-122"/>
-              </a:rPr>
-              <a:t>这是错误的！</a:t>
-            </a:r>
-            <a:endParaRPr lang="zh-CN" altLang="en-US" sz="2400" dirty="0">
-              <a:solidFill>
-                <a:srgbClr val="FF0000"/>
-              </a:solidFill>
-              <a:latin typeface="Times New Roman" panose="02020603050405020304" pitchFamily="18" charset="0"/>
-              <a:ea typeface="黑体" panose="02010609060101010101" pitchFamily="49" charset="-122"/>
-            </a:endParaRPr>
-          </a:p>
-          <a:p>
-            <a:pPr indent="0" algn="just">
-              <a:lnSpc>
-                <a:spcPct val="150000"/>
-              </a:lnSpc>
-            </a:pPr>
-            <a:r>
-              <a:rPr lang="zh-CN" altLang="en-US" sz="2400" b="1" dirty="0">
-                <a:latin typeface="Times New Roman" panose="02020603050405020304" pitchFamily="18" charset="0"/>
-                <a:ea typeface="黑体" panose="02010609060101010101" pitchFamily="49" charset="-122"/>
-              </a:rPr>
-              <a:t>项目生命周期是一条横向的时间轴，而五大过程组是推动这个时间轴向前的“管理引擎”。在一个大型项目中，生命周期的每一个单一阶段内，都会完整地经历一遍五大过程组。</a:t>
-            </a:r>
-            <a:endParaRPr lang="zh-CN" altLang="en-US" sz="2400" dirty="0">
-              <a:latin typeface="Times New Roman" panose="02020603050405020304" pitchFamily="18" charset="0"/>
-              <a:ea typeface="黑体" panose="02010609060101010101" pitchFamily="49" charset="-122"/>
-            </a:endParaRPr>
-          </a:p>
-        </p:txBody>
-      </p:sp>
-    </p:spTree>
-    <p:extLst>
-      <p:ext uri="{BB962C8B-B14F-4D97-AF65-F5344CB8AC3E}">
-        <p14:creationId xmlns:p14="http://schemas.microsoft.com/office/powerpoint/2010/main" val="2829520349"/>
-      </p:ext>
-    </p:extLst>
-  </p:cSld>
-  <p:clrMapOvr>
-    <a:masterClrMapping/>
-  </p:clrMapOvr>
-  <p:timing>
-    <p:tnLst>
-      <p:par>
-        <p:cTn id="1" dur="indefinite" restart="never" nodeType="tmRoot">
-          <p:childTnLst>
-            <p:seq concurrent="1" nextAc="seek">
-              <p:cTn id="2" dur="indefinite" nodeType="mainSeq">
-                <p:childTnLst>
-                  <p:par>
-                    <p:cTn id="3" fill="hold">
-                      <p:stCondLst>
-                        <p:cond delay="indefinite"/>
-                      </p:stCondLst>
-                      <p:childTnLst>
-                        <p:par>
-                          <p:cTn id="4" fill="hold">
-                            <p:stCondLst>
-                              <p:cond delay="0"/>
-                            </p:stCondLst>
-                            <p:childTnLst>
-                              <p:par>
-                                <p:cTn id="5" presetID="1" presetClass="entr" presetSubtype="0" fill="hold" nodeType="clickEffect">
-                                  <p:stCondLst>
-                                    <p:cond delay="0"/>
-                                  </p:stCondLst>
-                                  <p:childTnLst>
-                                    <p:set>
-                                      <p:cBhvr>
-                                        <p:cTn id="6" dur="1" fill="hold">
-                                          <p:stCondLst>
-                                            <p:cond delay="0"/>
-                                          </p:stCondLst>
-                                        </p:cTn>
-                                        <p:tgtEl>
-                                          <p:spTgt spid="18434">
-                                            <p:txEl>
-                                              <p:pRg st="3" end="3"/>
-                                            </p:txEl>
-                                          </p:spTgt>
-                                        </p:tgtEl>
-                                        <p:attrNameLst>
-                                          <p:attrName>style.visibility</p:attrName>
-                                        </p:attrNameLst>
-                                      </p:cBhvr>
-                                      <p:to>
-                                        <p:strVal val="visible"/>
-                                      </p:to>
-                                    </p:set>
-                                  </p:childTnLst>
-                                </p:cTn>
-                              </p:par>
-                            </p:childTnLst>
-                          </p:cTn>
-                        </p:par>
-                      </p:childTnLst>
-                    </p:cTn>
-                  </p:par>
-                  <p:par>
-                    <p:cTn id="7" fill="hold">
-                      <p:stCondLst>
-                        <p:cond delay="indefinite"/>
-                      </p:stCondLst>
-                      <p:childTnLst>
-                        <p:par>
-                          <p:cTn id="8" fill="hold">
-                            <p:stCondLst>
-                              <p:cond delay="0"/>
-                            </p:stCondLst>
-                            <p:childTnLst>
-                              <p:par>
-                                <p:cTn id="9" presetID="1" presetClass="entr" presetSubtype="0" fill="hold" nodeType="clickEffect">
-                                  <p:stCondLst>
-                                    <p:cond delay="0"/>
-                                  </p:stCondLst>
-                                  <p:childTnLst>
-                                    <p:set>
-                                      <p:cBhvr>
-                                        <p:cTn id="10" dur="1" fill="hold">
-                                          <p:stCondLst>
-                                            <p:cond delay="0"/>
-                                          </p:stCondLst>
-                                        </p:cTn>
-                                        <p:tgtEl>
-                                          <p:spTgt spid="18434">
-                                            <p:txEl>
-                                              <p:pRg st="4" end="4"/>
-                                            </p:txEl>
-                                          </p:spTgt>
-                                        </p:tgtEl>
-                                        <p:attrNameLst>
-                                          <p:attrName>style.visibility</p:attrName>
-                                        </p:attrNameLst>
-                                      </p:cBhvr>
-                                      <p:to>
-                                        <p:strVal val="visible"/>
-                                      </p:to>
-                                    </p:set>
-                                  </p:childTnLst>
-                                </p:cTn>
-                              </p:par>
-                            </p:childTnLst>
-                          </p:cTn>
-                        </p:par>
-                      </p:childTnLst>
-                    </p:cTn>
-                  </p:par>
                   <p:par>
                     <p:cTn id="11" fill="hold">
                       <p:stCondLst>
@@ -10958,7 +10985,7 @@
                                         <p:tgtEl>
                                           <p:spTgt spid="18434">
                                             <p:txEl>
-                                              <p:pRg st="5" end="5"/>
+                                              <p:pRg st="4" end="4"/>
                                             </p:txEl>
                                           </p:spTgt>
                                         </p:tgtEl>
@@ -11904,6 +11931,305 @@
         <p:spPr>
           <a:xfrm>
             <a:off x="107504" y="188640"/>
+            <a:ext cx="9001000" cy="5400600"/>
+          </a:xfrm>
+        </p:spPr>
+        <p:txBody>
+          <a:bodyPr>
+            <a:noAutofit/>
+          </a:bodyPr>
+          <a:lstStyle/>
+          <a:p>
+            <a:pPr>
+              <a:defRPr/>
+            </a:pPr>
+            <a:r>
+              <a:rPr lang="en-US" altLang="zh-CN" sz="4000" dirty="0"/>
+              <a:t>1.1.4 </a:t>
+            </a:r>
+            <a:r>
+              <a:rPr lang="zh-CN" altLang="en-US" sz="4000" dirty="0"/>
+              <a:t>项目的过程管理</a:t>
+            </a:r>
+            <a:endParaRPr lang="en-US" altLang="zh-CN" sz="4000" dirty="0"/>
+          </a:p>
+          <a:p>
+            <a:pPr marL="0" indent="0">
+              <a:buNone/>
+            </a:pPr>
+            <a:r>
+              <a:rPr lang="en-US" altLang="zh-CN" b="1" dirty="0">
+                <a:solidFill>
+                  <a:srgbClr val="FF0000"/>
+                </a:solidFill>
+              </a:rPr>
+              <a:t>3 </a:t>
+            </a:r>
+            <a:r>
+              <a:rPr lang="zh-CN" altLang="en-US" b="1" dirty="0">
+                <a:solidFill>
+                  <a:srgbClr val="FF0000"/>
+                </a:solidFill>
+              </a:rPr>
+              <a:t>生命周期和管理过程组的关系</a:t>
+            </a:r>
+            <a:endParaRPr lang="en-US" altLang="zh-CN" b="1" dirty="0">
+              <a:solidFill>
+                <a:srgbClr val="FF0000"/>
+              </a:solidFill>
+            </a:endParaRPr>
+          </a:p>
+          <a:p>
+            <a:r>
+              <a:rPr lang="zh-CN" altLang="en-US" sz="2400" b="1" dirty="0">
+                <a:latin typeface="Times New Roman" panose="02020603050405020304" pitchFamily="18" charset="0"/>
+                <a:ea typeface="黑体" panose="02010609060101010101" pitchFamily="49" charset="-122"/>
+              </a:rPr>
+              <a:t>过程组是“嵌套”在生命周期的各个阶段中！</a:t>
+            </a:r>
+            <a:endParaRPr lang="en-US" altLang="zh-CN" sz="2400" b="1" dirty="0">
+              <a:latin typeface="Times New Roman" panose="02020603050405020304" pitchFamily="18" charset="0"/>
+              <a:ea typeface="黑体" panose="02010609060101010101" pitchFamily="49" charset="-122"/>
+            </a:endParaRPr>
+          </a:p>
+          <a:p>
+            <a:pPr algn="just">
+              <a:lnSpc>
+                <a:spcPct val="150000"/>
+              </a:lnSpc>
+            </a:pPr>
+            <a:r>
+              <a:rPr lang="zh-CN" altLang="en-US" sz="2400" b="1" dirty="0">
+                <a:latin typeface="Times New Roman" panose="02020603050405020304" pitchFamily="18" charset="0"/>
+                <a:ea typeface="黑体" panose="02010609060101010101" pitchFamily="49" charset="-122"/>
+              </a:rPr>
+              <a:t>项目生命周期是一条横向的时间轴，而五大过程组是推动这个时间轴向前的“管理引擎”。在一个大型项目中，生命周期的每一个单一阶段内，都会完整地经历一遍五大过程组。</a:t>
+            </a:r>
+            <a:endParaRPr lang="zh-CN" altLang="en-US" sz="2400" dirty="0">
+              <a:latin typeface="Times New Roman" panose="02020603050405020304" pitchFamily="18" charset="0"/>
+              <a:ea typeface="黑体" panose="02010609060101010101" pitchFamily="49" charset="-122"/>
+            </a:endParaRPr>
+          </a:p>
+        </p:txBody>
+      </p:sp>
+    </p:spTree>
+    <p:extLst>
+      <p:ext uri="{BB962C8B-B14F-4D97-AF65-F5344CB8AC3E}">
+        <p14:creationId xmlns:p14="http://schemas.microsoft.com/office/powerpoint/2010/main" val="2829520349"/>
+      </p:ext>
+    </p:extLst>
+  </p:cSld>
+  <p:clrMapOvr>
+    <a:masterClrMapping/>
+  </p:clrMapOvr>
+  <p:timing>
+    <p:tnLst>
+      <p:par>
+        <p:cTn id="1" dur="indefinite" restart="never" nodeType="tmRoot">
+          <p:childTnLst>
+            <p:seq concurrent="1" nextAc="seek">
+              <p:cTn id="2" dur="indefinite" nodeType="mainSeq">
+                <p:childTnLst>
+                  <p:par>
+                    <p:cTn id="3" fill="hold">
+                      <p:stCondLst>
+                        <p:cond delay="indefinite"/>
+                      </p:stCondLst>
+                      <p:childTnLst>
+                        <p:par>
+                          <p:cTn id="4" fill="hold">
+                            <p:stCondLst>
+                              <p:cond delay="0"/>
+                            </p:stCondLst>
+                            <p:childTnLst>
+                              <p:par>
+                                <p:cTn id="5" presetID="1" presetClass="entr" presetSubtype="0" fill="hold" nodeType="clickEffect">
+                                  <p:stCondLst>
+                                    <p:cond delay="0"/>
+                                  </p:stCondLst>
+                                  <p:childTnLst>
+                                    <p:set>
+                                      <p:cBhvr>
+                                        <p:cTn id="6" dur="1" fill="hold">
+                                          <p:stCondLst>
+                                            <p:cond delay="0"/>
+                                          </p:stCondLst>
+                                        </p:cTn>
+                                        <p:tgtEl>
+                                          <p:spTgt spid="18434">
+                                            <p:txEl>
+                                              <p:pRg st="3" end="3"/>
+                                            </p:txEl>
+                                          </p:spTgt>
+                                        </p:tgtEl>
+                                        <p:attrNameLst>
+                                          <p:attrName>style.visibility</p:attrName>
+                                        </p:attrNameLst>
+                                      </p:cBhvr>
+                                      <p:to>
+                                        <p:strVal val="visible"/>
+                                      </p:to>
+                                    </p:set>
+                                  </p:childTnLst>
+                                </p:cTn>
+                              </p:par>
+                            </p:childTnLst>
+                          </p:cTn>
+                        </p:par>
+                      </p:childTnLst>
+                    </p:cTn>
+                  </p:par>
+                </p:childTnLst>
+              </p:cTn>
+              <p:prevCondLst>
+                <p:cond evt="onPrev" delay="0">
+                  <p:tgtEl>
+                    <p:sldTgt/>
+                  </p:tgtEl>
+                </p:cond>
+              </p:prevCondLst>
+              <p:nextCondLst>
+                <p:cond evt="onNext" delay="0">
+                  <p:tgtEl>
+                    <p:sldTgt/>
+                  </p:tgtEl>
+                </p:cond>
+              </p:nextCondLst>
+            </p:seq>
+          </p:childTnLst>
+        </p:cTn>
+      </p:par>
+    </p:tnLst>
+  </p:timing>
+</p:sld>
+</file>
+
+<file path=ppt/slides/slide21.xml><?xml version="1.0" encoding="utf-8"?>
+<p:sld xmlns:a="http://schemas.openxmlformats.org/drawingml/2006/main" xmlns:r="http://schemas.openxmlformats.org/officeDocument/2006/relationships" xmlns:p="http://schemas.openxmlformats.org/presentationml/2006/main">
+  <p:cSld>
+    <p:spTree>
+      <p:nvGrpSpPr>
+        <p:cNvPr id="1" name=""/>
+        <p:cNvGrpSpPr/>
+        <p:nvPr/>
+      </p:nvGrpSpPr>
+      <p:grpSpPr>
+        <a:xfrm>
+          <a:off x="0" y="0"/>
+          <a:ext cx="0" cy="0"/>
+          <a:chOff x="0" y="0"/>
+          <a:chExt cx="0" cy="0"/>
+        </a:xfrm>
+      </p:grpSpPr>
+      <p:pic>
+        <p:nvPicPr>
+          <p:cNvPr id="26626" name="Picture 37">
+            <a:extLst>
+              <a:ext uri="{FF2B5EF4-FFF2-40B4-BE49-F238E27FC236}">
+                <a16:creationId xmlns:a16="http://schemas.microsoft.com/office/drawing/2014/main" id="{B2BB932A-8522-442A-9FFE-3F7391F12CA8}"/>
+              </a:ext>
+            </a:extLst>
+          </p:cNvPr>
+          <p:cNvPicPr>
+            <a:picLocks noChangeAspect="1" noChangeArrowheads="1"/>
+          </p:cNvPicPr>
+          <p:nvPr/>
+        </p:nvPicPr>
+        <p:blipFill>
+          <a:blip r:embed="rId2">
+            <a:extLst>
+              <a:ext uri="{28A0092B-C50C-407E-A947-70E740481C1C}">
+                <a14:useLocalDpi xmlns:a14="http://schemas.microsoft.com/office/drawing/2010/main" val="0"/>
+              </a:ext>
+            </a:extLst>
+          </a:blip>
+          <a:srcRect/>
+          <a:stretch>
+            <a:fillRect/>
+          </a:stretch>
+        </p:blipFill>
+        <p:spPr bwMode="auto">
+          <a:xfrm>
+            <a:off x="323850" y="763588"/>
+            <a:ext cx="8372475" cy="5041900"/>
+          </a:xfrm>
+          <a:prstGeom prst="rect">
+            <a:avLst/>
+          </a:prstGeom>
+          <a:noFill/>
+          <a:ln>
+            <a:noFill/>
+          </a:ln>
+          <a:extLst>
+            <a:ext uri="{909E8E84-426E-40DD-AFC4-6F175D3DCCD1}">
+              <a14:hiddenFill xmlns:a14="http://schemas.microsoft.com/office/drawing/2010/main">
+                <a:solidFill>
+                  <a:srgbClr val="FFFFFF"/>
+                </a:solidFill>
+              </a14:hiddenFill>
+            </a:ext>
+            <a:ext uri="{91240B29-F687-4F45-9708-019B960494DF}">
+              <a14:hiddenLine xmlns:a14="http://schemas.microsoft.com/office/drawing/2010/main" w="9525">
+                <a:solidFill>
+                  <a:srgbClr val="000000"/>
+                </a:solidFill>
+                <a:miter lim="800000"/>
+                <a:headEnd/>
+                <a:tailEnd/>
+              </a14:hiddenLine>
+            </a:ext>
+          </a:extLst>
+        </p:spPr>
+      </p:pic>
+    </p:spTree>
+    <p:extLst>
+      <p:ext uri="{BB962C8B-B14F-4D97-AF65-F5344CB8AC3E}">
+        <p14:creationId xmlns:p14="http://schemas.microsoft.com/office/powerpoint/2010/main" val="3243044058"/>
+      </p:ext>
+    </p:extLst>
+  </p:cSld>
+  <p:clrMapOvr>
+    <a:masterClrMapping/>
+  </p:clrMapOvr>
+</p:sld>
+</file>
+
+<file path=ppt/slides/slide22.xml><?xml version="1.0" encoding="utf-8"?>
+<p:sld xmlns:a="http://schemas.openxmlformats.org/drawingml/2006/main" xmlns:r="http://schemas.openxmlformats.org/officeDocument/2006/relationships" xmlns:p="http://schemas.openxmlformats.org/presentationml/2006/main">
+  <p:cSld>
+    <p:spTree>
+      <p:nvGrpSpPr>
+        <p:cNvPr id="1" name=""/>
+        <p:cNvGrpSpPr/>
+        <p:nvPr/>
+      </p:nvGrpSpPr>
+      <p:grpSpPr>
+        <a:xfrm>
+          <a:off x="0" y="0"/>
+          <a:ext cx="0" cy="0"/>
+          <a:chOff x="0" y="0"/>
+          <a:chExt cx="0" cy="0"/>
+        </a:xfrm>
+      </p:grpSpPr>
+      <p:sp>
+        <p:nvSpPr>
+          <p:cNvPr id="18434" name="Rectangle 5">
+            <a:extLst>
+              <a:ext uri="{FF2B5EF4-FFF2-40B4-BE49-F238E27FC236}">
+                <a16:creationId xmlns:a16="http://schemas.microsoft.com/office/drawing/2014/main" id="{FE76C534-66F0-41F6-A3E1-68108936218B}"/>
+              </a:ext>
+            </a:extLst>
+          </p:cNvPr>
+          <p:cNvSpPr>
+            <a:spLocks noGrp="1" noChangeArrowheads="1"/>
+          </p:cNvSpPr>
+          <p:nvPr>
+            <p:ph type="body" idx="4294967295"/>
+          </p:nvPr>
+        </p:nvSpPr>
+        <p:spPr>
+          <a:xfrm>
+            <a:off x="107504" y="188640"/>
             <a:ext cx="9001000" cy="5544616"/>
           </a:xfrm>
         </p:spPr>
@@ -12062,15 +12388,7 @@
             </a:r>
             <a:r>
               <a:rPr lang="en-US" altLang="zh-CN" dirty="0"/>
-              <a:t>)</a:t>
-            </a:r>
-            <a:r>
-              <a:rPr lang="zh-CN" altLang="en-US" dirty="0"/>
-              <a:t> </a:t>
-            </a:r>
-            <a:r>
-              <a:rPr lang="en-US" altLang="zh-CN" dirty="0"/>
-              <a:t>-&gt; </a:t>
+              <a:t>)-&gt; </a:t>
             </a:r>
             <a:r>
               <a:rPr lang="zh-CN" altLang="en-US" dirty="0"/>
@@ -12110,7 +12428,7 @@
             </a:r>
             <a:r>
               <a:rPr lang="en-US" altLang="zh-CN" dirty="0"/>
-              <a:t>)-&gt; </a:t>
+              <a:t>)-&gt;</a:t>
             </a:r>
             <a:r>
               <a:rPr lang="zh-CN" altLang="en-US" dirty="0"/>
@@ -12558,7 +12876,7 @@
 </p:sld>
 </file>
 
-<file path=ppt/slides/slide21.xml><?xml version="1.0" encoding="utf-8"?>
+<file path=ppt/slides/slide23.xml><?xml version="1.0" encoding="utf-8"?>
 <p:sld xmlns:a="http://schemas.openxmlformats.org/drawingml/2006/main" xmlns:r="http://schemas.openxmlformats.org/officeDocument/2006/relationships" xmlns:p="http://schemas.openxmlformats.org/presentationml/2006/main">
   <p:cSld>
     <p:spTree>
@@ -12575,80 +12893,338 @@
           <a:chExt cx="0" cy="0"/>
         </a:xfrm>
       </p:grpSpPr>
-      <p:pic>
-        <p:nvPicPr>
-          <p:cNvPr id="26626" name="Picture 37">
+      <p:sp>
+        <p:nvSpPr>
+          <p:cNvPr id="18434" name="Rectangle 5">
             <a:extLst>
               <a:ext uri="{FF2B5EF4-FFF2-40B4-BE49-F238E27FC236}">
-                <a16:creationId xmlns:a16="http://schemas.microsoft.com/office/drawing/2014/main" id="{B2BB932A-8522-442A-9FFE-3F7391F12CA8}"/>
+                <a16:creationId xmlns:a16="http://schemas.microsoft.com/office/drawing/2014/main" id="{FE76C534-66F0-41F6-A3E1-68108936218B}"/>
               </a:ext>
             </a:extLst>
           </p:cNvPr>
-          <p:cNvPicPr>
-            <a:picLocks noChangeAspect="1" noChangeArrowheads="1"/>
-          </p:cNvPicPr>
-          <p:nvPr/>
-        </p:nvPicPr>
-        <p:blipFill>
-          <a:blip r:embed="rId2">
-            <a:extLst>
-              <a:ext uri="{28A0092B-C50C-407E-A947-70E740481C1C}">
-                <a14:useLocalDpi xmlns:a14="http://schemas.microsoft.com/office/drawing/2010/main" val="0"/>
-              </a:ext>
-            </a:extLst>
-          </a:blip>
-          <a:srcRect/>
-          <a:stretch>
-            <a:fillRect/>
-          </a:stretch>
-        </p:blipFill>
-        <p:spPr bwMode="auto">
+          <p:cNvSpPr>
+            <a:spLocks noGrp="1" noChangeArrowheads="1"/>
+          </p:cNvSpPr>
+          <p:nvPr>
+            <p:ph type="body" idx="4294967295"/>
+          </p:nvPr>
+        </p:nvSpPr>
+        <p:spPr>
           <a:xfrm>
-            <a:off x="323850" y="763588"/>
-            <a:ext cx="8372475" cy="5041900"/>
+            <a:off x="107504" y="188640"/>
+            <a:ext cx="9001000" cy="3384376"/>
           </a:xfrm>
-          <a:prstGeom prst="rect">
-            <a:avLst/>
-          </a:prstGeom>
-          <a:noFill/>
-          <a:ln>
-            <a:noFill/>
-          </a:ln>
-          <a:extLst>
-            <a:ext uri="{909E8E84-426E-40DD-AFC4-6F175D3DCCD1}">
-              <a14:hiddenFill xmlns:a14="http://schemas.microsoft.com/office/drawing/2010/main">
-                <a:solidFill>
-                  <a:srgbClr val="FFFFFF"/>
-                </a:solidFill>
-              </a14:hiddenFill>
-            </a:ext>
-            <a:ext uri="{91240B29-F687-4F45-9708-019B960494DF}">
-              <a14:hiddenLine xmlns:a14="http://schemas.microsoft.com/office/drawing/2010/main" w="9525">
-                <a:solidFill>
-                  <a:srgbClr val="000000"/>
-                </a:solidFill>
-                <a:miter lim="800000"/>
-                <a:headEnd/>
-                <a:tailEnd/>
-              </a14:hiddenLine>
-            </a:ext>
-          </a:extLst>
         </p:spPr>
-      </p:pic>
+        <p:txBody>
+          <a:bodyPr>
+            <a:noAutofit/>
+          </a:bodyPr>
+          <a:lstStyle/>
+          <a:p>
+            <a:pPr>
+              <a:defRPr/>
+            </a:pPr>
+            <a:r>
+              <a:rPr lang="en-US" altLang="zh-CN" sz="4000" dirty="0"/>
+              <a:t>1.1.4 </a:t>
+            </a:r>
+            <a:r>
+              <a:rPr lang="zh-CN" altLang="en-US" sz="4000" dirty="0"/>
+              <a:t>项目的过程管理</a:t>
+            </a:r>
+            <a:endParaRPr lang="en-US" altLang="zh-CN" sz="4000" dirty="0"/>
+          </a:p>
+          <a:p>
+            <a:pPr marL="0" indent="0" algn="just">
+              <a:lnSpc>
+                <a:spcPct val="150000"/>
+              </a:lnSpc>
+              <a:spcBef>
+                <a:spcPts val="0"/>
+              </a:spcBef>
+              <a:buNone/>
+            </a:pPr>
+            <a:r>
+              <a:rPr lang="zh-CN" altLang="en-US" sz="2400" dirty="0">
+                <a:solidFill>
+                  <a:srgbClr val="FF0000"/>
+                </a:solidFill>
+                <a:latin typeface="Times New Roman" panose="02020603050405020304" pitchFamily="18" charset="0"/>
+                <a:ea typeface="黑体" panose="02010609060101010101" pitchFamily="49" charset="-122"/>
+              </a:rPr>
+              <a:t>例</a:t>
+            </a:r>
+            <a:r>
+              <a:rPr lang="en-US" altLang="zh-CN" sz="2400" dirty="0">
+                <a:solidFill>
+                  <a:srgbClr val="FF0000"/>
+                </a:solidFill>
+                <a:latin typeface="Times New Roman" panose="02020603050405020304" pitchFamily="18" charset="0"/>
+                <a:ea typeface="黑体" panose="02010609060101010101" pitchFamily="49" charset="-122"/>
+              </a:rPr>
+              <a:t>1</a:t>
+            </a:r>
+            <a:r>
+              <a:rPr lang="zh-CN" altLang="en-US" sz="2400" dirty="0">
+                <a:solidFill>
+                  <a:srgbClr val="FF0000"/>
+                </a:solidFill>
+                <a:latin typeface="Times New Roman" panose="02020603050405020304" pitchFamily="18" charset="0"/>
+                <a:ea typeface="黑体" panose="02010609060101010101" pitchFamily="49" charset="-122"/>
+              </a:rPr>
+              <a:t>：</a:t>
+            </a:r>
+            <a:endParaRPr lang="en-US" altLang="zh-CN" sz="2400" dirty="0">
+              <a:solidFill>
+                <a:srgbClr val="FF0000"/>
+              </a:solidFill>
+              <a:latin typeface="Times New Roman" panose="02020603050405020304" pitchFamily="18" charset="0"/>
+              <a:ea typeface="黑体" panose="02010609060101010101" pitchFamily="49" charset="-122"/>
+            </a:endParaRPr>
+          </a:p>
+          <a:p>
+            <a:pPr marL="0" indent="0" algn="just">
+              <a:lnSpc>
+                <a:spcPct val="150000"/>
+              </a:lnSpc>
+              <a:spcBef>
+                <a:spcPts val="0"/>
+              </a:spcBef>
+              <a:buNone/>
+            </a:pPr>
+            <a:r>
+              <a:rPr lang="zh-CN" altLang="en-US" sz="2400" dirty="0">
+                <a:latin typeface="Times New Roman" panose="02020603050405020304" pitchFamily="18" charset="0"/>
+                <a:ea typeface="黑体" panose="02010609060101010101" pitchFamily="49" charset="-122"/>
+              </a:rPr>
+              <a:t>“启动过程组”对应生命周期的“需求分析阶段”，“收尾过程组”对应生命周期的“上线阶段”。这个表述是否正确？</a:t>
+            </a:r>
+            <a:endParaRPr lang="en-US" altLang="zh-CN" sz="2400" dirty="0">
+              <a:latin typeface="Times New Roman" panose="02020603050405020304" pitchFamily="18" charset="0"/>
+              <a:ea typeface="黑体" panose="02010609060101010101" pitchFamily="49" charset="-122"/>
+            </a:endParaRPr>
+          </a:p>
+          <a:p>
+            <a:pPr marL="0" indent="0" algn="just">
+              <a:lnSpc>
+                <a:spcPct val="150000"/>
+              </a:lnSpc>
+              <a:spcBef>
+                <a:spcPts val="0"/>
+              </a:spcBef>
+              <a:buNone/>
+            </a:pPr>
+            <a:r>
+              <a:rPr lang="zh-CN" altLang="en-US" sz="2400" b="1" dirty="0">
+                <a:solidFill>
+                  <a:srgbClr val="FF0000"/>
+                </a:solidFill>
+                <a:latin typeface="Times New Roman" panose="02020603050405020304" pitchFamily="18" charset="0"/>
+                <a:ea typeface="黑体" panose="02010609060101010101" pitchFamily="49" charset="-122"/>
+              </a:rPr>
+              <a:t>这是错误的！</a:t>
+            </a:r>
+            <a:endParaRPr lang="zh-CN" altLang="en-US" sz="2400" dirty="0">
+              <a:solidFill>
+                <a:srgbClr val="FF0000"/>
+              </a:solidFill>
+              <a:latin typeface="Times New Roman" panose="02020603050405020304" pitchFamily="18" charset="0"/>
+              <a:ea typeface="黑体" panose="02010609060101010101" pitchFamily="49" charset="-122"/>
+            </a:endParaRPr>
+          </a:p>
+        </p:txBody>
+      </p:sp>
     </p:spTree>
     <p:extLst>
       <p:ext uri="{BB962C8B-B14F-4D97-AF65-F5344CB8AC3E}">
-        <p14:creationId xmlns:p14="http://schemas.microsoft.com/office/powerpoint/2010/main" val="286822728"/>
+        <p14:creationId xmlns:p14="http://schemas.microsoft.com/office/powerpoint/2010/main" val="3303857969"/>
       </p:ext>
     </p:extLst>
   </p:cSld>
   <p:clrMapOvr>
     <a:masterClrMapping/>
   </p:clrMapOvr>
+  <p:timing>
+    <p:tnLst>
+      <p:par>
+        <p:cTn id="1" dur="indefinite" restart="never" nodeType="tmRoot">
+          <p:childTnLst>
+            <p:seq concurrent="1" nextAc="seek">
+              <p:cTn id="2" dur="indefinite" nodeType="mainSeq">
+                <p:childTnLst>
+                  <p:par>
+                    <p:cTn id="3" fill="hold">
+                      <p:stCondLst>
+                        <p:cond delay="indefinite"/>
+                      </p:stCondLst>
+                      <p:childTnLst>
+                        <p:par>
+                          <p:cTn id="4" fill="hold">
+                            <p:stCondLst>
+                              <p:cond delay="0"/>
+                            </p:stCondLst>
+                            <p:childTnLst>
+                              <p:par>
+                                <p:cTn id="5" presetID="1" presetClass="entr" presetSubtype="0" fill="hold" nodeType="clickEffect">
+                                  <p:stCondLst>
+                                    <p:cond delay="0"/>
+                                  </p:stCondLst>
+                                  <p:childTnLst>
+                                    <p:set>
+                                      <p:cBhvr>
+                                        <p:cTn id="6" dur="1" fill="hold">
+                                          <p:stCondLst>
+                                            <p:cond delay="0"/>
+                                          </p:stCondLst>
+                                        </p:cTn>
+                                        <p:tgtEl>
+                                          <p:spTgt spid="18434">
+                                            <p:txEl>
+                                              <p:pRg st="1" end="1"/>
+                                            </p:txEl>
+                                          </p:spTgt>
+                                        </p:tgtEl>
+                                        <p:attrNameLst>
+                                          <p:attrName>style.visibility</p:attrName>
+                                        </p:attrNameLst>
+                                      </p:cBhvr>
+                                      <p:to>
+                                        <p:strVal val="visible"/>
+                                      </p:to>
+                                    </p:set>
+                                  </p:childTnLst>
+                                </p:cTn>
+                              </p:par>
+                            </p:childTnLst>
+                          </p:cTn>
+                        </p:par>
+                      </p:childTnLst>
+                    </p:cTn>
+                  </p:par>
+                  <p:par>
+                    <p:cTn id="7" fill="hold">
+                      <p:stCondLst>
+                        <p:cond delay="indefinite"/>
+                      </p:stCondLst>
+                      <p:childTnLst>
+                        <p:par>
+                          <p:cTn id="8" fill="hold">
+                            <p:stCondLst>
+                              <p:cond delay="0"/>
+                            </p:stCondLst>
+                            <p:childTnLst>
+                              <p:par>
+                                <p:cTn id="9" presetID="1" presetClass="entr" presetSubtype="0" fill="hold" nodeType="clickEffect">
+                                  <p:stCondLst>
+                                    <p:cond delay="0"/>
+                                  </p:stCondLst>
+                                  <p:childTnLst>
+                                    <p:set>
+                                      <p:cBhvr>
+                                        <p:cTn id="10" dur="1" fill="hold">
+                                          <p:stCondLst>
+                                            <p:cond delay="0"/>
+                                          </p:stCondLst>
+                                        </p:cTn>
+                                        <p:tgtEl>
+                                          <p:spTgt spid="18434">
+                                            <p:txEl>
+                                              <p:pRg st="2" end="2"/>
+                                            </p:txEl>
+                                          </p:spTgt>
+                                        </p:tgtEl>
+                                        <p:attrNameLst>
+                                          <p:attrName>style.visibility</p:attrName>
+                                        </p:attrNameLst>
+                                      </p:cBhvr>
+                                      <p:to>
+                                        <p:strVal val="visible"/>
+                                      </p:to>
+                                    </p:set>
+                                  </p:childTnLst>
+                                </p:cTn>
+                              </p:par>
+                            </p:childTnLst>
+                          </p:cTn>
+                        </p:par>
+                      </p:childTnLst>
+                    </p:cTn>
+                  </p:par>
+                  <p:par>
+                    <p:cTn id="11" fill="hold">
+                      <p:stCondLst>
+                        <p:cond delay="indefinite"/>
+                      </p:stCondLst>
+                      <p:childTnLst>
+                        <p:par>
+                          <p:cTn id="12" fill="hold">
+                            <p:stCondLst>
+                              <p:cond delay="0"/>
+                            </p:stCondLst>
+                            <p:childTnLst>
+                              <p:par>
+                                <p:cTn id="13" presetID="1" presetClass="entr" presetSubtype="0" fill="hold" nodeType="clickEffect">
+                                  <p:stCondLst>
+                                    <p:cond delay="0"/>
+                                  </p:stCondLst>
+                                  <p:childTnLst>
+                                    <p:set>
+                                      <p:cBhvr>
+                                        <p:cTn id="14" dur="1" fill="hold">
+                                          <p:stCondLst>
+                                            <p:cond delay="0"/>
+                                          </p:stCondLst>
+                                        </p:cTn>
+                                        <p:tgtEl>
+                                          <p:spTgt spid="18434">
+                                            <p:txEl>
+                                              <p:pRg st="3" end="3"/>
+                                            </p:txEl>
+                                          </p:spTgt>
+                                        </p:tgtEl>
+                                        <p:attrNameLst>
+                                          <p:attrName>style.visibility</p:attrName>
+                                        </p:attrNameLst>
+                                      </p:cBhvr>
+                                      <p:to>
+                                        <p:strVal val="visible"/>
+                                      </p:to>
+                                    </p:set>
+                                  </p:childTnLst>
+                                </p:cTn>
+                              </p:par>
+                            </p:childTnLst>
+                          </p:cTn>
+                        </p:par>
+                      </p:childTnLst>
+                    </p:cTn>
+                  </p:par>
+                </p:childTnLst>
+              </p:cTn>
+              <p:prevCondLst>
+                <p:cond evt="onPrev" delay="0">
+                  <p:tgtEl>
+                    <p:sldTgt/>
+                  </p:tgtEl>
+                </p:cond>
+              </p:prevCondLst>
+              <p:nextCondLst>
+                <p:cond evt="onNext" delay="0">
+                  <p:tgtEl>
+                    <p:sldTgt/>
+                  </p:tgtEl>
+                </p:cond>
+              </p:nextCondLst>
+            </p:seq>
+          </p:childTnLst>
+        </p:cTn>
+      </p:par>
+    </p:tnLst>
+  </p:timing>
 </p:sld>
 </file>
 
-<file path=ppt/slides/slide22.xml><?xml version="1.0" encoding="utf-8"?>
+<file path=ppt/slides/slide24.xml><?xml version="1.0" encoding="utf-8"?>
 <p:sld xmlns:a="http://schemas.openxmlformats.org/drawingml/2006/main" xmlns:r="http://schemas.openxmlformats.org/officeDocument/2006/relationships" xmlns:p="http://schemas.openxmlformats.org/presentationml/2006/main">
   <p:cSld>
     <p:spTree>
@@ -12717,7 +13293,39 @@
                   <a:srgbClr val="FF0000"/>
                 </a:solidFill>
               </a:rPr>
-              <a:t>例：当软件开发项目处于生命周期的 ‘系统设计阶段’ 。请问，系统设计阶段有没有启动和收尾？</a:t>
+              <a:t>例：当软件开发项目处于 </a:t>
+            </a:r>
+            <a:r>
+              <a:rPr lang="en-US" altLang="zh-CN" sz="2400" b="1" dirty="0">
+                <a:solidFill>
+                  <a:srgbClr val="FF0000"/>
+                </a:solidFill>
+              </a:rPr>
+              <a:t>“</a:t>
+            </a:r>
+            <a:r>
+              <a:rPr lang="zh-CN" altLang="en-US" sz="2400" b="1" dirty="0">
+                <a:solidFill>
+                  <a:srgbClr val="FF0000"/>
+                </a:solidFill>
+              </a:rPr>
+              <a:t>系统设计阶段</a:t>
+            </a:r>
+            <a:r>
+              <a:rPr lang="en-US" altLang="zh-CN" sz="2400" b="1" dirty="0">
+                <a:solidFill>
+                  <a:srgbClr val="FF0000"/>
+                </a:solidFill>
+              </a:rPr>
+              <a:t>”</a:t>
+            </a:r>
+            <a:r>
+              <a:rPr lang="zh-CN" altLang="en-US" sz="2400" b="1" dirty="0">
+                <a:solidFill>
+                  <a:srgbClr val="FF0000"/>
+                </a:solidFill>
+              </a:rPr>
+              <a:t>。请问，系统设计阶段有没有启动和收尾？</a:t>
             </a:r>
             <a:endParaRPr lang="en-US" altLang="zh-CN" sz="2400" b="1" dirty="0">
               <a:solidFill>
@@ -13182,7 +13790,7 @@
 </p:sld>
 </file>
 
-<file path=ppt/slides/slide23.xml><?xml version="1.0" encoding="utf-8"?>
+<file path=ppt/slides/slide25.xml><?xml version="1.0" encoding="utf-8"?>
 <p:sld xmlns:a="http://schemas.openxmlformats.org/drawingml/2006/main" xmlns:r="http://schemas.openxmlformats.org/officeDocument/2006/relationships" xmlns:p="http://schemas.openxmlformats.org/presentationml/2006/main">
   <p:cSld>
     <p:spTree>
@@ -13365,7 +13973,7 @@
 </p:sld>
 </file>
 
-<file path=ppt/slides/slide24.xml><?xml version="1.0" encoding="utf-8"?>
+<file path=ppt/slides/slide26.xml><?xml version="1.0" encoding="utf-8"?>
 <p:sld xmlns:a="http://schemas.openxmlformats.org/drawingml/2006/main" xmlns:r="http://schemas.openxmlformats.org/officeDocument/2006/relationships" xmlns:p="http://schemas.openxmlformats.org/presentationml/2006/main">
   <p:cSld>
     <p:spTree>
@@ -13457,127 +14065,6 @@
               <a:t>为了更好地定义或审查信息系统项目的任务范围和质量要求，客户方可以聘请第三方的信息系统监理或咨询方</a:t>
             </a:r>
             <a:endParaRPr lang="en-US" altLang="zh-CN" dirty="0"/>
-          </a:p>
-        </p:txBody>
-      </p:sp>
-      <p:sp>
-        <p:nvSpPr>
-          <p:cNvPr id="21507" name="Rectangle 6">
-            <a:extLst>
-              <a:ext uri="{FF2B5EF4-FFF2-40B4-BE49-F238E27FC236}">
-                <a16:creationId xmlns:a16="http://schemas.microsoft.com/office/drawing/2014/main" id="{A00B539C-AF5A-49BA-AE17-412A1E311DF3}"/>
-              </a:ext>
-            </a:extLst>
-          </p:cNvPr>
-          <p:cNvSpPr>
-            <a:spLocks noGrp="1" noChangeArrowheads="1"/>
-          </p:cNvSpPr>
-          <p:nvPr>
-            <p:ph type="title" idx="4294967295"/>
-          </p:nvPr>
-        </p:nvSpPr>
-        <p:spPr>
-          <a:xfrm>
-            <a:off x="914400" y="130175"/>
-            <a:ext cx="8229600" cy="346075"/>
-          </a:xfrm>
-        </p:spPr>
-        <p:txBody>
-          <a:bodyPr>
-            <a:normAutofit fontScale="90000"/>
-          </a:bodyPr>
-          <a:lstStyle/>
-          <a:p>
-            <a:pPr>
-              <a:defRPr/>
-            </a:pPr>
-            <a:r>
-              <a:rPr lang="zh-CN" altLang="en-US" sz="2000">
-                <a:solidFill>
-                  <a:srgbClr val="0000FF"/>
-                </a:solidFill>
-              </a:rPr>
-              <a:t>十一五规划教材                                          </a:t>
-            </a:r>
-            <a:r>
-              <a:rPr lang="en-US" altLang="zh-CN" sz="2000">
-                <a:solidFill>
-                  <a:srgbClr val="0000FF"/>
-                </a:solidFill>
-              </a:rPr>
-              <a:t>《</a:t>
-            </a:r>
-            <a:r>
-              <a:rPr lang="zh-CN" altLang="en-US" sz="2000">
-                <a:solidFill>
-                  <a:srgbClr val="0000FF"/>
-                </a:solidFill>
-              </a:rPr>
-              <a:t>信息系统项目管理</a:t>
-            </a:r>
-            <a:r>
-              <a:rPr lang="en-US" altLang="zh-CN" sz="2000">
-                <a:solidFill>
-                  <a:srgbClr val="0000FF"/>
-                </a:solidFill>
-              </a:rPr>
-              <a:t>》</a:t>
-            </a:r>
-            <a:r>
-              <a:rPr lang="zh-CN" altLang="en-US" sz="2000">
-                <a:solidFill>
-                  <a:srgbClr val="0000FF"/>
-                </a:solidFill>
-              </a:rPr>
-              <a:t>讲义</a:t>
-            </a:r>
-          </a:p>
-        </p:txBody>
-      </p:sp>
-      <p:sp>
-        <p:nvSpPr>
-          <p:cNvPr id="28676" name="Line 7">
-            <a:extLst>
-              <a:ext uri="{FF2B5EF4-FFF2-40B4-BE49-F238E27FC236}">
-                <a16:creationId xmlns:a16="http://schemas.microsoft.com/office/drawing/2014/main" id="{66D48B59-0985-442E-8F06-5343330BCF14}"/>
-              </a:ext>
-            </a:extLst>
-          </p:cNvPr>
-          <p:cNvSpPr>
-            <a:spLocks noChangeShapeType="1"/>
-          </p:cNvSpPr>
-          <p:nvPr/>
-        </p:nvSpPr>
-        <p:spPr bwMode="auto">
-          <a:xfrm>
-            <a:off x="0" y="476250"/>
-            <a:ext cx="9144000" cy="0"/>
-          </a:xfrm>
-          <a:prstGeom prst="line">
-            <a:avLst/>
-          </a:prstGeom>
-          <a:noFill/>
-          <a:ln w="9525">
-            <a:solidFill>
-              <a:srgbClr val="9900CC"/>
-            </a:solidFill>
-            <a:round/>
-            <a:headEnd/>
-            <a:tailEnd/>
-          </a:ln>
-          <a:extLst>
-            <a:ext uri="{909E8E84-426E-40DD-AFC4-6F175D3DCCD1}">
-              <a14:hiddenFill xmlns:a14="http://schemas.microsoft.com/office/drawing/2010/main">
-                <a:noFill/>
-              </a14:hiddenFill>
-            </a:ext>
-          </a:extLst>
-        </p:spPr>
-        <p:txBody>
-          <a:bodyPr/>
-          <a:lstStyle/>
-          <a:p>
-            <a:endParaRPr lang="zh-CN" altLang="en-US"/>
           </a:p>
         </p:txBody>
       </p:sp>
@@ -13717,7 +14204,7 @@
 </p:sld>
 </file>
 
-<file path=ppt/slides/slide25.xml><?xml version="1.0" encoding="utf-8"?>
+<file path=ppt/slides/slide27.xml><?xml version="1.0" encoding="utf-8"?>
 <p:sld xmlns:a="http://schemas.openxmlformats.org/drawingml/2006/main" xmlns:r="http://schemas.openxmlformats.org/officeDocument/2006/relationships" xmlns:p="http://schemas.openxmlformats.org/presentationml/2006/main">
   <p:cSld>
     <p:spTree>
@@ -13950,7 +14437,7 @@
 </p:sld>
 </file>
 
-<file path=ppt/slides/slide26.xml><?xml version="1.0" encoding="utf-8"?>
+<file path=ppt/slides/slide28.xml><?xml version="1.0" encoding="utf-8"?>
 <p:sld xmlns:a="http://schemas.openxmlformats.org/drawingml/2006/main" xmlns:r="http://schemas.openxmlformats.org/officeDocument/2006/relationships" xmlns:p="http://schemas.openxmlformats.org/presentationml/2006/main">
   <p:cSld>
     <p:spTree>
@@ -14211,7 +14698,7 @@
 </p:sld>
 </file>
 
-<file path=ppt/slides/slide27.xml><?xml version="1.0" encoding="utf-8"?>
+<file path=ppt/slides/slide29.xml><?xml version="1.0" encoding="utf-8"?>
 <p:sld xmlns:a="http://schemas.openxmlformats.org/drawingml/2006/main" xmlns:r="http://schemas.openxmlformats.org/officeDocument/2006/relationships" xmlns:p="http://schemas.openxmlformats.org/presentationml/2006/main">
   <p:cSld>
     <p:spTree>
@@ -14435,487 +14922,6 @@
 </p:sld>
 </file>
 
-<file path=ppt/slides/slide28.xml><?xml version="1.0" encoding="utf-8"?>
-<p:sld xmlns:a="http://schemas.openxmlformats.org/drawingml/2006/main" xmlns:r="http://schemas.openxmlformats.org/officeDocument/2006/relationships" xmlns:p="http://schemas.openxmlformats.org/presentationml/2006/main">
-  <p:cSld>
-    <p:spTree>
-      <p:nvGrpSpPr>
-        <p:cNvPr id="1" name=""/>
-        <p:cNvGrpSpPr/>
-        <p:nvPr/>
-      </p:nvGrpSpPr>
-      <p:grpSpPr>
-        <a:xfrm>
-          <a:off x="0" y="0"/>
-          <a:ext cx="0" cy="0"/>
-          <a:chOff x="0" y="0"/>
-          <a:chExt cx="0" cy="0"/>
-        </a:xfrm>
-      </p:grpSpPr>
-      <p:sp>
-        <p:nvSpPr>
-          <p:cNvPr id="25602" name="Rectangle 5">
-            <a:extLst>
-              <a:ext uri="{FF2B5EF4-FFF2-40B4-BE49-F238E27FC236}">
-                <a16:creationId xmlns:a16="http://schemas.microsoft.com/office/drawing/2014/main" id="{DB4D4562-5F4C-47B3-932B-6D1A3CCE3C28}"/>
-              </a:ext>
-            </a:extLst>
-          </p:cNvPr>
-          <p:cNvSpPr>
-            <a:spLocks noGrp="1" noChangeArrowheads="1"/>
-          </p:cNvSpPr>
-          <p:nvPr>
-            <p:ph type="body" idx="4294967295"/>
-          </p:nvPr>
-        </p:nvSpPr>
-        <p:spPr>
-          <a:xfrm>
-            <a:off x="0" y="642938"/>
-            <a:ext cx="8229600" cy="4525962"/>
-          </a:xfrm>
-        </p:spPr>
-        <p:txBody>
-          <a:bodyPr>
-            <a:normAutofit lnSpcReduction="10000"/>
-          </a:bodyPr>
-          <a:lstStyle/>
-          <a:p>
-            <a:pPr>
-              <a:defRPr/>
-            </a:pPr>
-            <a:r>
-              <a:rPr lang="en-US" altLang="zh-CN" sz="4000"/>
-              <a:t>1.2.2 </a:t>
-            </a:r>
-            <a:r>
-              <a:rPr lang="zh-CN" altLang="en-US" sz="4000"/>
-              <a:t>信息系统项目的生命期</a:t>
-            </a:r>
-            <a:endParaRPr lang="en-US" altLang="zh-CN" sz="4000"/>
-          </a:p>
-          <a:p>
-            <a:pPr marL="971550" lvl="1" indent="-514350">
-              <a:buFontTx/>
-              <a:buAutoNum type="arabicPeriod"/>
-              <a:defRPr/>
-            </a:pPr>
-            <a:endParaRPr lang="en-US" altLang="zh-CN"/>
-          </a:p>
-          <a:p>
-            <a:pPr marL="971550" lvl="1" indent="-514350">
-              <a:buFontTx/>
-              <a:buAutoNum type="arabicPeriod"/>
-              <a:defRPr/>
-            </a:pPr>
-            <a:r>
-              <a:rPr lang="zh-CN" altLang="en-US"/>
-              <a:t>信息系统项目的一般生命期：</a:t>
-            </a:r>
-            <a:endParaRPr lang="en-US" altLang="zh-CN"/>
-          </a:p>
-          <a:p>
-            <a:pPr marL="971550" lvl="1" indent="-514350">
-              <a:buFontTx/>
-              <a:buNone/>
-              <a:defRPr/>
-            </a:pPr>
-            <a:r>
-              <a:rPr lang="zh-CN" altLang="en-US"/>
-              <a:t>      以下五阶段构成的生命期称为信息系统项目的一般生命期。</a:t>
-            </a:r>
-            <a:endParaRPr lang="en-US" altLang="zh-CN"/>
-          </a:p>
-          <a:p>
-            <a:pPr marL="971550" lvl="1" indent="-514350">
-              <a:buFontTx/>
-              <a:buNone/>
-              <a:defRPr/>
-            </a:pPr>
-            <a:r>
-              <a:rPr lang="zh-CN" altLang="en-US"/>
-              <a:t>（</a:t>
-            </a:r>
-            <a:r>
-              <a:rPr lang="en-US" altLang="zh-CN"/>
-              <a:t>1</a:t>
-            </a:r>
-            <a:r>
-              <a:rPr lang="zh-CN" altLang="en-US"/>
-              <a:t>）系统规划阶段</a:t>
-            </a:r>
-            <a:endParaRPr lang="en-US" altLang="zh-CN"/>
-          </a:p>
-          <a:p>
-            <a:pPr marL="971550" lvl="1" indent="-514350">
-              <a:buFont typeface="Wingdings" panose="05000000000000000000" pitchFamily="2" charset="2"/>
-              <a:buChar char="Ø"/>
-              <a:defRPr/>
-            </a:pPr>
-            <a:r>
-              <a:rPr lang="zh-CN" altLang="en-US"/>
-              <a:t>对组织的环境、目标、现行系统的状况进行初步调查，根据组织目标和发展战略，确定信息系统的发展战略，对建设新系统的需求做出分析和预测，同时考虑建设新系统所受的各种约束，研究建设新系统的必要性和可能性，对备选方案进行可行性分析，通过后将新系统建设方案及实施计划编写成系统规划报告。</a:t>
-            </a:r>
-            <a:endParaRPr lang="en-US" altLang="zh-CN"/>
-          </a:p>
-        </p:txBody>
-      </p:sp>
-      <p:sp>
-        <p:nvSpPr>
-          <p:cNvPr id="25603" name="Rectangle 6">
-            <a:extLst>
-              <a:ext uri="{FF2B5EF4-FFF2-40B4-BE49-F238E27FC236}">
-                <a16:creationId xmlns:a16="http://schemas.microsoft.com/office/drawing/2014/main" id="{85C4BCD4-F77D-47BB-B19A-4C0F72D4B76F}"/>
-              </a:ext>
-            </a:extLst>
-          </p:cNvPr>
-          <p:cNvSpPr>
-            <a:spLocks noGrp="1" noChangeArrowheads="1"/>
-          </p:cNvSpPr>
-          <p:nvPr>
-            <p:ph type="title" idx="4294967295"/>
-          </p:nvPr>
-        </p:nvSpPr>
-        <p:spPr>
-          <a:xfrm>
-            <a:off x="914400" y="130175"/>
-            <a:ext cx="8229600" cy="346075"/>
-          </a:xfrm>
-        </p:spPr>
-        <p:txBody>
-          <a:bodyPr>
-            <a:normAutofit fontScale="90000"/>
-          </a:bodyPr>
-          <a:lstStyle/>
-          <a:p>
-            <a:pPr>
-              <a:defRPr/>
-            </a:pPr>
-            <a:r>
-              <a:rPr lang="zh-CN" altLang="en-US" sz="2000">
-                <a:solidFill>
-                  <a:srgbClr val="0000FF"/>
-                </a:solidFill>
-              </a:rPr>
-              <a:t>十一五规划教材                                          </a:t>
-            </a:r>
-            <a:r>
-              <a:rPr lang="en-US" altLang="zh-CN" sz="2000">
-                <a:solidFill>
-                  <a:srgbClr val="0000FF"/>
-                </a:solidFill>
-              </a:rPr>
-              <a:t>《</a:t>
-            </a:r>
-            <a:r>
-              <a:rPr lang="zh-CN" altLang="en-US" sz="2000">
-                <a:solidFill>
-                  <a:srgbClr val="0000FF"/>
-                </a:solidFill>
-              </a:rPr>
-              <a:t>信息系统项目管理</a:t>
-            </a:r>
-            <a:r>
-              <a:rPr lang="en-US" altLang="zh-CN" sz="2000">
-                <a:solidFill>
-                  <a:srgbClr val="0000FF"/>
-                </a:solidFill>
-              </a:rPr>
-              <a:t>》</a:t>
-            </a:r>
-            <a:r>
-              <a:rPr lang="zh-CN" altLang="en-US" sz="2000">
-                <a:solidFill>
-                  <a:srgbClr val="0000FF"/>
-                </a:solidFill>
-              </a:rPr>
-              <a:t>讲义</a:t>
-            </a:r>
-          </a:p>
-        </p:txBody>
-      </p:sp>
-      <p:sp>
-        <p:nvSpPr>
-          <p:cNvPr id="32772" name="Line 7">
-            <a:extLst>
-              <a:ext uri="{FF2B5EF4-FFF2-40B4-BE49-F238E27FC236}">
-                <a16:creationId xmlns:a16="http://schemas.microsoft.com/office/drawing/2014/main" id="{11C3CA65-10C2-438B-B47B-636180CF233F}"/>
-              </a:ext>
-            </a:extLst>
-          </p:cNvPr>
-          <p:cNvSpPr>
-            <a:spLocks noChangeShapeType="1"/>
-          </p:cNvSpPr>
-          <p:nvPr/>
-        </p:nvSpPr>
-        <p:spPr bwMode="auto">
-          <a:xfrm>
-            <a:off x="0" y="476250"/>
-            <a:ext cx="9144000" cy="0"/>
-          </a:xfrm>
-          <a:prstGeom prst="line">
-            <a:avLst/>
-          </a:prstGeom>
-          <a:noFill/>
-          <a:ln w="9525">
-            <a:solidFill>
-              <a:srgbClr val="9900CC"/>
-            </a:solidFill>
-            <a:round/>
-            <a:headEnd/>
-            <a:tailEnd/>
-          </a:ln>
-          <a:extLst>
-            <a:ext uri="{909E8E84-426E-40DD-AFC4-6F175D3DCCD1}">
-              <a14:hiddenFill xmlns:a14="http://schemas.microsoft.com/office/drawing/2010/main">
-                <a:noFill/>
-              </a14:hiddenFill>
-            </a:ext>
-          </a:extLst>
-        </p:spPr>
-        <p:txBody>
-          <a:bodyPr/>
-          <a:lstStyle/>
-          <a:p>
-            <a:endParaRPr lang="zh-CN" altLang="en-US"/>
-          </a:p>
-        </p:txBody>
-      </p:sp>
-    </p:spTree>
-  </p:cSld>
-  <p:clrMapOvr>
-    <a:masterClrMapping/>
-  </p:clrMapOvr>
-</p:sld>
-</file>
-
-<file path=ppt/slides/slide29.xml><?xml version="1.0" encoding="utf-8"?>
-<p:sld xmlns:a="http://schemas.openxmlformats.org/drawingml/2006/main" xmlns:r="http://schemas.openxmlformats.org/officeDocument/2006/relationships" xmlns:p="http://schemas.openxmlformats.org/presentationml/2006/main">
-  <p:cSld>
-    <p:spTree>
-      <p:nvGrpSpPr>
-        <p:cNvPr id="1" name=""/>
-        <p:cNvGrpSpPr/>
-        <p:nvPr/>
-      </p:nvGrpSpPr>
-      <p:grpSpPr>
-        <a:xfrm>
-          <a:off x="0" y="0"/>
-          <a:ext cx="0" cy="0"/>
-          <a:chOff x="0" y="0"/>
-          <a:chExt cx="0" cy="0"/>
-        </a:xfrm>
-      </p:grpSpPr>
-      <p:sp>
-        <p:nvSpPr>
-          <p:cNvPr id="33794" name="Rectangle 5">
-            <a:extLst>
-              <a:ext uri="{FF2B5EF4-FFF2-40B4-BE49-F238E27FC236}">
-                <a16:creationId xmlns:a16="http://schemas.microsoft.com/office/drawing/2014/main" id="{A8191636-F9FD-4035-A2D2-7D8269FBA178}"/>
-              </a:ext>
-            </a:extLst>
-          </p:cNvPr>
-          <p:cNvSpPr>
-            <a:spLocks noGrp="1" noChangeArrowheads="1"/>
-          </p:cNvSpPr>
-          <p:nvPr>
-            <p:ph type="body" idx="4294967295"/>
-          </p:nvPr>
-        </p:nvSpPr>
-        <p:spPr>
-          <a:xfrm>
-            <a:off x="0" y="785813"/>
-            <a:ext cx="8229600" cy="4525962"/>
-          </a:xfrm>
-        </p:spPr>
-        <p:txBody>
-          <a:bodyPr/>
-          <a:lstStyle/>
-          <a:p>
-            <a:r>
-              <a:rPr lang="en-US" altLang="zh-CN" sz="4000"/>
-              <a:t>1.2.2 </a:t>
-            </a:r>
-            <a:r>
-              <a:rPr lang="zh-CN" altLang="en-US" sz="4000"/>
-              <a:t>信息系统项目的生命期</a:t>
-            </a:r>
-            <a:endParaRPr lang="en-US" altLang="zh-CN" sz="4000"/>
-          </a:p>
-          <a:p>
-            <a:pPr marL="971550" lvl="1" indent="-514350">
-              <a:buFontTx/>
-              <a:buNone/>
-            </a:pPr>
-            <a:endParaRPr lang="en-US" altLang="zh-CN"/>
-          </a:p>
-          <a:p>
-            <a:pPr marL="971550" lvl="1" indent="-514350">
-              <a:buFontTx/>
-              <a:buNone/>
-            </a:pPr>
-            <a:r>
-              <a:rPr lang="zh-CN" altLang="en-US"/>
-              <a:t>（</a:t>
-            </a:r>
-            <a:r>
-              <a:rPr lang="en-US" altLang="zh-CN"/>
-              <a:t>2</a:t>
-            </a:r>
-            <a:r>
-              <a:rPr lang="zh-CN" altLang="en-US"/>
-              <a:t>）系统分析阶段</a:t>
-            </a:r>
-            <a:endParaRPr lang="en-US" altLang="zh-CN"/>
-          </a:p>
-          <a:p>
-            <a:pPr marL="971550" lvl="1" indent="-514350">
-              <a:buFont typeface="Wingdings" panose="05000000000000000000" pitchFamily="2" charset="2"/>
-              <a:buChar char="Ø"/>
-            </a:pPr>
-            <a:r>
-              <a:rPr lang="zh-CN" altLang="en-US"/>
-              <a:t>根据系统规划报告所确定范围，对现行系统进行详细调查，描述现行系统的业务流程，指出现行系统局限性和不足之处，确定新系统的基本目标和逻辑功能要求，即提出新系统的逻辑模型。系统分析阶段的工作成果体现在系统分析说明书中</a:t>
-            </a:r>
-            <a:endParaRPr lang="en-US" altLang="zh-CN"/>
-          </a:p>
-          <a:p>
-            <a:pPr marL="971550" lvl="1" indent="-514350">
-              <a:buFont typeface="Wingdings" panose="05000000000000000000" pitchFamily="2" charset="2"/>
-              <a:buChar char="Ø"/>
-            </a:pPr>
-            <a:endParaRPr lang="en-US" altLang="zh-CN"/>
-          </a:p>
-        </p:txBody>
-      </p:sp>
-      <p:sp>
-        <p:nvSpPr>
-          <p:cNvPr id="26627" name="Rectangle 6">
-            <a:extLst>
-              <a:ext uri="{FF2B5EF4-FFF2-40B4-BE49-F238E27FC236}">
-                <a16:creationId xmlns:a16="http://schemas.microsoft.com/office/drawing/2014/main" id="{D44DEB22-3154-47AE-826C-1CA4FBB0D775}"/>
-              </a:ext>
-            </a:extLst>
-          </p:cNvPr>
-          <p:cNvSpPr>
-            <a:spLocks noGrp="1" noChangeArrowheads="1"/>
-          </p:cNvSpPr>
-          <p:nvPr>
-            <p:ph type="title" idx="4294967295"/>
-          </p:nvPr>
-        </p:nvSpPr>
-        <p:spPr>
-          <a:xfrm>
-            <a:off x="914400" y="130175"/>
-            <a:ext cx="8229600" cy="346075"/>
-          </a:xfrm>
-        </p:spPr>
-        <p:txBody>
-          <a:bodyPr>
-            <a:normAutofit fontScale="90000"/>
-          </a:bodyPr>
-          <a:lstStyle/>
-          <a:p>
-            <a:pPr>
-              <a:defRPr/>
-            </a:pPr>
-            <a:r>
-              <a:rPr lang="zh-CN" altLang="en-US" sz="2000">
-                <a:solidFill>
-                  <a:srgbClr val="0000FF"/>
-                </a:solidFill>
-              </a:rPr>
-              <a:t>十一五规划教材                                          </a:t>
-            </a:r>
-            <a:r>
-              <a:rPr lang="en-US" altLang="zh-CN" sz="2000">
-                <a:solidFill>
-                  <a:srgbClr val="0000FF"/>
-                </a:solidFill>
-              </a:rPr>
-              <a:t>《</a:t>
-            </a:r>
-            <a:r>
-              <a:rPr lang="zh-CN" altLang="en-US" sz="2000">
-                <a:solidFill>
-                  <a:srgbClr val="0000FF"/>
-                </a:solidFill>
-              </a:rPr>
-              <a:t>信息系统项目管理</a:t>
-            </a:r>
-            <a:r>
-              <a:rPr lang="en-US" altLang="zh-CN" sz="2000">
-                <a:solidFill>
-                  <a:srgbClr val="0000FF"/>
-                </a:solidFill>
-              </a:rPr>
-              <a:t>》</a:t>
-            </a:r>
-            <a:r>
-              <a:rPr lang="zh-CN" altLang="en-US" sz="2000">
-                <a:solidFill>
-                  <a:srgbClr val="0000FF"/>
-                </a:solidFill>
-              </a:rPr>
-              <a:t>讲义</a:t>
-            </a:r>
-          </a:p>
-        </p:txBody>
-      </p:sp>
-      <p:sp>
-        <p:nvSpPr>
-          <p:cNvPr id="33796" name="Line 7">
-            <a:extLst>
-              <a:ext uri="{FF2B5EF4-FFF2-40B4-BE49-F238E27FC236}">
-                <a16:creationId xmlns:a16="http://schemas.microsoft.com/office/drawing/2014/main" id="{5B004CE4-A5B0-4E1B-94F0-4C92152E0C54}"/>
-              </a:ext>
-            </a:extLst>
-          </p:cNvPr>
-          <p:cNvSpPr>
-            <a:spLocks noChangeShapeType="1"/>
-          </p:cNvSpPr>
-          <p:nvPr/>
-        </p:nvSpPr>
-        <p:spPr bwMode="auto">
-          <a:xfrm>
-            <a:off x="0" y="476250"/>
-            <a:ext cx="9144000" cy="0"/>
-          </a:xfrm>
-          <a:prstGeom prst="line">
-            <a:avLst/>
-          </a:prstGeom>
-          <a:noFill/>
-          <a:ln w="9525">
-            <a:solidFill>
-              <a:srgbClr val="9900CC"/>
-            </a:solidFill>
-            <a:round/>
-            <a:headEnd/>
-            <a:tailEnd/>
-          </a:ln>
-          <a:extLst>
-            <a:ext uri="{909E8E84-426E-40DD-AFC4-6F175D3DCCD1}">
-              <a14:hiddenFill xmlns:a14="http://schemas.microsoft.com/office/drawing/2010/main">
-                <a:noFill/>
-              </a14:hiddenFill>
-            </a:ext>
-          </a:extLst>
-        </p:spPr>
-        <p:txBody>
-          <a:bodyPr/>
-          <a:lstStyle/>
-          <a:p>
-            <a:endParaRPr lang="zh-CN" altLang="en-US"/>
-          </a:p>
-        </p:txBody>
-      </p:sp>
-    </p:spTree>
-  </p:cSld>
-  <p:clrMapOvr>
-    <a:masterClrMapping/>
-  </p:clrMapOvr>
-</p:sld>
-</file>
-
 <file path=ppt/slides/slide3.xml><?xml version="1.0" encoding="utf-8"?>
 <p:sld xmlns:a="http://schemas.openxmlformats.org/drawingml/2006/main" xmlns:r="http://schemas.openxmlformats.org/officeDocument/2006/relationships" xmlns:p="http://schemas.openxmlformats.org/presentationml/2006/main" showMasterPhAnim="0">
   <p:cSld>
@@ -14950,7 +14956,7 @@
         <p:spPr>
           <a:xfrm>
             <a:off x="323528" y="0"/>
-            <a:ext cx="8135937" cy="6093296"/>
+            <a:ext cx="8135937" cy="5373216"/>
           </a:xfrm>
           <a:prstGeom prst="rect">
             <a:avLst/>
@@ -15140,6 +15146,27 @@
               <a:defRPr/>
             </a:pPr>
             <a:r>
+              <a:rPr lang="zh-CN" altLang="en-US" sz="2400" b="1" dirty="0">
+                <a:latin typeface="Times New Roman" panose="02020603050405020304" pitchFamily="18" charset="0"/>
+                <a:ea typeface="黑体" panose="02010609060101010101" pitchFamily="49" charset="-122"/>
+              </a:rPr>
+              <a:t>本课程旨在培养学生运用现代项目管理的理论体系与专业工具，在既定的时间、成本和质量约束下，科学地规划、监控并成功交付信息系统（</a:t>
+            </a:r>
+            <a:r>
+              <a:rPr lang="en-US" altLang="zh-CN" sz="2400" b="1" dirty="0">
+                <a:latin typeface="Times New Roman" panose="02020603050405020304" pitchFamily="18" charset="0"/>
+                <a:ea typeface="黑体" panose="02010609060101010101" pitchFamily="49" charset="-122"/>
+              </a:rPr>
+              <a:t>IT</a:t>
+            </a:r>
+            <a:r>
+              <a:rPr lang="zh-CN" altLang="en-US" sz="2400" b="1" dirty="0">
+                <a:latin typeface="Times New Roman" panose="02020603050405020304" pitchFamily="18" charset="0"/>
+                <a:ea typeface="黑体" panose="02010609060101010101" pitchFamily="49" charset="-122"/>
+              </a:rPr>
+              <a:t>）项目的综合实战能力。</a:t>
+            </a:r>
+            <a:r>
               <a:rPr lang="en-US" altLang="zh-CN" sz="2400" b="1" dirty="0">
                 <a:solidFill>
                   <a:sysClr val="windowText" lastClr="000000"/>
@@ -15149,23 +15176,6 @@
               </a:rPr>
               <a:t> </a:t>
             </a:r>
-            <a:r>
-              <a:rPr lang="zh-CN" altLang="en-US" sz="2400" b="1" dirty="0">
-                <a:solidFill>
-                  <a:sysClr val="windowText" lastClr="000000"/>
-                </a:solidFill>
-                <a:latin typeface="Times New Roman" panose="02020603050405020304" pitchFamily="18" charset="0"/>
-                <a:ea typeface="黑体" panose="02010609060101010101" pitchFamily="49" charset="-122"/>
-              </a:rPr>
-              <a:t>项目管理是目前企业运作中最常用的运作方式，不懂项目管理将在未来的企业中无法生存！</a:t>
-            </a:r>
-            <a:endParaRPr lang="en-US" altLang="zh-CN" sz="2400" b="1" dirty="0">
-              <a:solidFill>
-                <a:sysClr val="windowText" lastClr="000000"/>
-              </a:solidFill>
-              <a:latin typeface="Times New Roman" panose="02020603050405020304" pitchFamily="18" charset="0"/>
-              <a:ea typeface="黑体" panose="02010609060101010101" pitchFamily="49" charset="-122"/>
-            </a:endParaRPr>
           </a:p>
           <a:p>
             <a:pPr marL="342900" lvl="1" indent="-342900" algn="just" fontAlgn="auto">
@@ -15183,35 +15193,14 @@
               <a:defRPr/>
             </a:pPr>
             <a:r>
-              <a:rPr lang="en-US" altLang="zh-CN" sz="2400" b="1" dirty="0">
+              <a:rPr lang="zh-CN" altLang="en-US" sz="2400" b="1" dirty="0">
                 <a:solidFill>
                   <a:sysClr val="windowText" lastClr="000000"/>
                 </a:solidFill>
                 <a:latin typeface="Times New Roman" panose="02020603050405020304" pitchFamily="18" charset="0"/>
                 <a:ea typeface="黑体" panose="02010609060101010101" pitchFamily="49" charset="-122"/>
               </a:rPr>
-              <a:t>  </a:t>
-            </a:r>
-            <a:r>
-              <a:rPr lang="zh-CN" altLang="en-US" sz="2400" b="1" dirty="0">
-                <a:latin typeface="Times New Roman" panose="02020603050405020304" pitchFamily="18" charset="0"/>
-                <a:ea typeface="黑体" panose="02010609060101010101" pitchFamily="49" charset="-122"/>
-              </a:rPr>
-              <a:t>本课程旨在培养学生运用现代项目管理的理论体系与专业工具，在既定的时间、成本和质量约束下，科学地规划、监控并成功交付信息系统（</a:t>
-            </a:r>
-            <a:r>
-              <a:rPr lang="en-US" altLang="zh-CN" sz="2400" b="1" dirty="0">
-                <a:latin typeface="Times New Roman" panose="02020603050405020304" pitchFamily="18" charset="0"/>
-                <a:ea typeface="黑体" panose="02010609060101010101" pitchFamily="49" charset="-122"/>
-              </a:rPr>
-              <a:t>IT</a:t>
-            </a:r>
-            <a:r>
-              <a:rPr lang="zh-CN" altLang="en-US" sz="2400" b="1" dirty="0">
-                <a:latin typeface="Times New Roman" panose="02020603050405020304" pitchFamily="18" charset="0"/>
-                <a:ea typeface="黑体" panose="02010609060101010101" pitchFamily="49" charset="-122"/>
-              </a:rPr>
-              <a:t>）项目的综合实战能力。</a:t>
+              <a:t>项目管理是目前企业运作中最常用的运作方式，不懂项目管理将在未来的企业中无法生存！</a:t>
             </a:r>
             <a:endParaRPr lang="en-US" altLang="zh-CN" sz="2400" b="1" dirty="0">
               <a:solidFill>
@@ -15255,7 +15244,7 @@
             </a:endParaRPr>
           </a:p>
           <a:p>
-            <a:pPr marL="0" indent="0" fontAlgn="auto">
+            <a:pPr fontAlgn="auto">
               <a:lnSpc>
                 <a:spcPct val="90000"/>
               </a:lnSpc>
@@ -15265,29 +15254,57 @@
               <a:buClr>
                 <a:srgbClr val="1F497D"/>
               </a:buClr>
-              <a:buFont typeface="Wingdings" pitchFamily="2" charset="2"/>
-              <a:buNone/>
               <a:defRPr/>
             </a:pPr>
             <a:r>
-              <a:rPr lang="en-US" altLang="zh-CN" sz="2800" b="1" dirty="0">
+              <a:rPr lang="zh-CN" altLang="en-US" sz="2800" b="1" dirty="0">
                 <a:solidFill>
                   <a:sysClr val="windowText" lastClr="000000"/>
                 </a:solidFill>
                 <a:ea typeface="黑体" panose="02010609060101010101" pitchFamily="49" charset="-122"/>
                 <a:sym typeface="Wingdings" pitchFamily="2" charset="2"/>
               </a:rPr>
-              <a:t>         </a:t>
+              <a:t>以信息系统项目为对象，全面系统地学习项目管理的</a:t>
             </a:r>
             <a:r>
               <a:rPr lang="zh-CN" altLang="en-US" sz="2800" b="1" dirty="0">
                 <a:solidFill>
-                  <a:sysClr val="windowText" lastClr="000000"/>
+                  <a:srgbClr val="FF0000"/>
                 </a:solidFill>
                 <a:ea typeface="黑体" panose="02010609060101010101" pitchFamily="49" charset="-122"/>
                 <a:sym typeface="Wingdings" pitchFamily="2" charset="2"/>
               </a:rPr>
-              <a:t>以信息系统项目为对象，全面系统地学习项目管理的十大知识领域，重理论知识、实践操作和工具掌握</a:t>
+              <a:t>十大知识领域</a:t>
+            </a:r>
+            <a:r>
+              <a:rPr lang="en-US" altLang="zh-CN" sz="2800" b="1" dirty="0">
+                <a:solidFill>
+                  <a:sysClr val="windowText" lastClr="000000"/>
+                </a:solidFill>
+                <a:ea typeface="黑体" panose="02010609060101010101" pitchFamily="49" charset="-122"/>
+                <a:sym typeface="Wingdings" pitchFamily="2" charset="2"/>
+              </a:rPr>
+              <a:t>;</a:t>
+            </a:r>
+            <a:r>
+              <a:rPr lang="zh-CN" altLang="en-US" sz="2800" b="1" dirty="0">
+                <a:solidFill>
+                  <a:sysClr val="windowText" lastClr="000000"/>
+                </a:solidFill>
+                <a:ea typeface="黑体" panose="02010609060101010101" pitchFamily="49" charset="-122"/>
+                <a:sym typeface="Wingdings" pitchFamily="2" charset="2"/>
+              </a:rPr>
+              <a:t>重理论知识、实践操作和工具掌握</a:t>
+            </a:r>
+            <a:r>
+              <a:rPr lang="en-US" altLang="zh-CN" sz="2800" b="1" dirty="0">
+                <a:solidFill>
+                  <a:sysClr val="windowText" lastClr="000000"/>
+                </a:solidFill>
+                <a:ea typeface="黑体" panose="02010609060101010101" pitchFamily="49" charset="-122"/>
+                <a:sym typeface="Wingdings" pitchFamily="2" charset="2"/>
+              </a:rPr>
+              <a:t>.</a:t>
             </a:r>
             <a:endParaRPr lang="en-US" altLang="zh-CN" sz="2800" dirty="0">
               <a:solidFill>
@@ -15366,15 +15383,33 @@
                                   </p:childTnLst>
                                 </p:cTn>
                               </p:par>
+                            </p:childTnLst>
+                          </p:cTn>
+                        </p:par>
+                      </p:childTnLst>
+                    </p:cTn>
+                  </p:par>
+                  <p:par>
+                    <p:cTn id="8" fill="hold">
+                      <p:stCondLst>
+                        <p:cond delay="indefinite"/>
+                      </p:stCondLst>
+                      <p:childTnLst>
+                        <p:par>
+                          <p:cTn id="9" fill="hold">
+                            <p:stCondLst>
+                              <p:cond delay="0"/>
+                            </p:stCondLst>
+                            <p:childTnLst>
                               <p:par>
-                                <p:cTn id="8" presetID="1" presetClass="entr" presetSubtype="0" fill="hold" nodeType="withEffect">
+                                <p:cTn id="10" presetID="14" presetClass="entr" presetSubtype="10" fill="hold" nodeType="clickEffect">
                                   <p:stCondLst>
                                     <p:cond delay="0"/>
                                   </p:stCondLst>
                                   <p:childTnLst>
                                     <p:set>
                                       <p:cBhvr>
-                                        <p:cTn id="9" dur="1" fill="hold">
+                                        <p:cTn id="11" dur="1" fill="hold">
                                           <p:stCondLst>
                                             <p:cond delay="0"/>
                                           </p:stCondLst>
@@ -15394,6 +15429,18 @@
                                         <p:strVal val="visible"/>
                                       </p:to>
                                     </p:set>
+                                    <p:animEffect transition="in" filter="randombar(horizontal)">
+                                      <p:cBhvr>
+                                        <p:cTn id="12" dur="500"/>
+                                        <p:tgtEl>
+                                          <p:spTgt spid="6">
+                                            <p:txEl>
+                                              <p:pRg st="2" end="2"/>
+                                            </p:txEl>
+                                          </p:spTgt>
+                                        </p:tgtEl>
+                                      </p:cBhvr>
+                                    </p:animEffect>
                                   </p:childTnLst>
                                 </p:cTn>
                               </p:par>
@@ -15404,26 +15451,26 @@
                     </p:cTn>
                   </p:par>
                   <p:par>
-                    <p:cTn id="10" fill="hold">
+                    <p:cTn id="13" fill="hold">
                       <p:stCondLst>
                         <p:cond delay="indefinite"/>
                       </p:stCondLst>
                       <p:childTnLst>
                         <p:par>
-                          <p:cTn id="11" fill="hold">
+                          <p:cTn id="14" fill="hold">
                             <p:stCondLst>
                               <p:cond delay="0"/>
                             </p:stCondLst>
                             <p:childTnLst>
                               <p:par>
-                                <p:cTn id="12" presetID="1" presetClass="entr" presetSubtype="0" fill="hold" nodeType="clickEffect">
+                                <p:cTn id="15" presetID="1" presetClass="entr" presetSubtype="0" fill="hold" nodeType="clickEffect">
                                   <p:stCondLst>
                                     <p:cond delay="0"/>
                                   </p:stCondLst>
                                   <p:childTnLst>
                                     <p:set>
                                       <p:cBhvr>
-                                        <p:cTn id="13" dur="1" fill="hold">
+                                        <p:cTn id="16" dur="1" fill="hold">
                                           <p:stCondLst>
                                             <p:cond delay="0"/>
                                           </p:stCondLst>
@@ -15446,15 +15493,33 @@
                                   </p:childTnLst>
                                 </p:cTn>
                               </p:par>
+                            </p:childTnLst>
+                          </p:cTn>
+                        </p:par>
+                      </p:childTnLst>
+                    </p:cTn>
+                  </p:par>
+                  <p:par>
+                    <p:cTn id="17" fill="hold">
+                      <p:stCondLst>
+                        <p:cond delay="indefinite"/>
+                      </p:stCondLst>
+                      <p:childTnLst>
+                        <p:par>
+                          <p:cTn id="18" fill="hold">
+                            <p:stCondLst>
+                              <p:cond delay="0"/>
+                            </p:stCondLst>
+                            <p:childTnLst>
                               <p:par>
-                                <p:cTn id="14" presetID="14" presetClass="entr" presetSubtype="10" fill="hold" nodeType="withEffect">
+                                <p:cTn id="19" presetID="1" presetClass="entr" presetSubtype="0" fill="hold" nodeType="clickEffect">
                                   <p:stCondLst>
                                     <p:cond delay="0"/>
                                   </p:stCondLst>
                                   <p:childTnLst>
                                     <p:set>
                                       <p:cBhvr>
-                                        <p:cTn id="15" dur="1" fill="hold">
+                                        <p:cTn id="20" dur="1" fill="hold">
                                           <p:stCondLst>
                                             <p:cond delay="0"/>
                                           </p:stCondLst>
@@ -15474,18 +15539,6 @@
                                         <p:strVal val="visible"/>
                                       </p:to>
                                     </p:set>
-                                    <p:animEffect transition="in" filter="randombar(horizontal)">
-                                      <p:cBhvr>
-                                        <p:cTn id="16" dur="500"/>
-                                        <p:tgtEl>
-                                          <p:spTgt spid="6">
-                                            <p:txEl>
-                                              <p:pRg st="4" end="4"/>
-                                            </p:txEl>
-                                          </p:spTgt>
-                                        </p:tgtEl>
-                                      </p:cBhvr>
-                                    </p:animEffect>
                                   </p:childTnLst>
                                 </p:cTn>
                               </p:par>
@@ -15539,6 +15592,487 @@
       </p:grpSpPr>
       <p:sp>
         <p:nvSpPr>
+          <p:cNvPr id="25602" name="Rectangle 5">
+            <a:extLst>
+              <a:ext uri="{FF2B5EF4-FFF2-40B4-BE49-F238E27FC236}">
+                <a16:creationId xmlns:a16="http://schemas.microsoft.com/office/drawing/2014/main" id="{DB4D4562-5F4C-47B3-932B-6D1A3CCE3C28}"/>
+              </a:ext>
+            </a:extLst>
+          </p:cNvPr>
+          <p:cNvSpPr>
+            <a:spLocks noGrp="1" noChangeArrowheads="1"/>
+          </p:cNvSpPr>
+          <p:nvPr>
+            <p:ph type="body" idx="4294967295"/>
+          </p:nvPr>
+        </p:nvSpPr>
+        <p:spPr>
+          <a:xfrm>
+            <a:off x="0" y="642938"/>
+            <a:ext cx="8229600" cy="4525962"/>
+          </a:xfrm>
+        </p:spPr>
+        <p:txBody>
+          <a:bodyPr>
+            <a:normAutofit lnSpcReduction="10000"/>
+          </a:bodyPr>
+          <a:lstStyle/>
+          <a:p>
+            <a:pPr>
+              <a:defRPr/>
+            </a:pPr>
+            <a:r>
+              <a:rPr lang="en-US" altLang="zh-CN" sz="4000"/>
+              <a:t>1.2.2 </a:t>
+            </a:r>
+            <a:r>
+              <a:rPr lang="zh-CN" altLang="en-US" sz="4000"/>
+              <a:t>信息系统项目的生命期</a:t>
+            </a:r>
+            <a:endParaRPr lang="en-US" altLang="zh-CN" sz="4000"/>
+          </a:p>
+          <a:p>
+            <a:pPr marL="971550" lvl="1" indent="-514350">
+              <a:buFontTx/>
+              <a:buAutoNum type="arabicPeriod"/>
+              <a:defRPr/>
+            </a:pPr>
+            <a:endParaRPr lang="en-US" altLang="zh-CN"/>
+          </a:p>
+          <a:p>
+            <a:pPr marL="971550" lvl="1" indent="-514350">
+              <a:buFontTx/>
+              <a:buAutoNum type="arabicPeriod"/>
+              <a:defRPr/>
+            </a:pPr>
+            <a:r>
+              <a:rPr lang="zh-CN" altLang="en-US"/>
+              <a:t>信息系统项目的一般生命期：</a:t>
+            </a:r>
+            <a:endParaRPr lang="en-US" altLang="zh-CN"/>
+          </a:p>
+          <a:p>
+            <a:pPr marL="971550" lvl="1" indent="-514350">
+              <a:buFontTx/>
+              <a:buNone/>
+              <a:defRPr/>
+            </a:pPr>
+            <a:r>
+              <a:rPr lang="zh-CN" altLang="en-US"/>
+              <a:t>      以下五阶段构成的生命期称为信息系统项目的一般生命期。</a:t>
+            </a:r>
+            <a:endParaRPr lang="en-US" altLang="zh-CN"/>
+          </a:p>
+          <a:p>
+            <a:pPr marL="971550" lvl="1" indent="-514350">
+              <a:buFontTx/>
+              <a:buNone/>
+              <a:defRPr/>
+            </a:pPr>
+            <a:r>
+              <a:rPr lang="zh-CN" altLang="en-US"/>
+              <a:t>（</a:t>
+            </a:r>
+            <a:r>
+              <a:rPr lang="en-US" altLang="zh-CN"/>
+              <a:t>1</a:t>
+            </a:r>
+            <a:r>
+              <a:rPr lang="zh-CN" altLang="en-US"/>
+              <a:t>）系统规划阶段</a:t>
+            </a:r>
+            <a:endParaRPr lang="en-US" altLang="zh-CN"/>
+          </a:p>
+          <a:p>
+            <a:pPr marL="971550" lvl="1" indent="-514350">
+              <a:buFont typeface="Wingdings" panose="05000000000000000000" pitchFamily="2" charset="2"/>
+              <a:buChar char="Ø"/>
+              <a:defRPr/>
+            </a:pPr>
+            <a:r>
+              <a:rPr lang="zh-CN" altLang="en-US"/>
+              <a:t>对组织的环境、目标、现行系统的状况进行初步调查，根据组织目标和发展战略，确定信息系统的发展战略，对建设新系统的需求做出分析和预测，同时考虑建设新系统所受的各种约束，研究建设新系统的必要性和可能性，对备选方案进行可行性分析，通过后将新系统建设方案及实施计划编写成系统规划报告。</a:t>
+            </a:r>
+            <a:endParaRPr lang="en-US" altLang="zh-CN"/>
+          </a:p>
+        </p:txBody>
+      </p:sp>
+      <p:sp>
+        <p:nvSpPr>
+          <p:cNvPr id="25603" name="Rectangle 6">
+            <a:extLst>
+              <a:ext uri="{FF2B5EF4-FFF2-40B4-BE49-F238E27FC236}">
+                <a16:creationId xmlns:a16="http://schemas.microsoft.com/office/drawing/2014/main" id="{85C4BCD4-F77D-47BB-B19A-4C0F72D4B76F}"/>
+              </a:ext>
+            </a:extLst>
+          </p:cNvPr>
+          <p:cNvSpPr>
+            <a:spLocks noGrp="1" noChangeArrowheads="1"/>
+          </p:cNvSpPr>
+          <p:nvPr>
+            <p:ph type="title" idx="4294967295"/>
+          </p:nvPr>
+        </p:nvSpPr>
+        <p:spPr>
+          <a:xfrm>
+            <a:off x="914400" y="130175"/>
+            <a:ext cx="8229600" cy="346075"/>
+          </a:xfrm>
+        </p:spPr>
+        <p:txBody>
+          <a:bodyPr>
+            <a:normAutofit fontScale="90000"/>
+          </a:bodyPr>
+          <a:lstStyle/>
+          <a:p>
+            <a:pPr>
+              <a:defRPr/>
+            </a:pPr>
+            <a:r>
+              <a:rPr lang="zh-CN" altLang="en-US" sz="2000">
+                <a:solidFill>
+                  <a:srgbClr val="0000FF"/>
+                </a:solidFill>
+              </a:rPr>
+              <a:t>十一五规划教材                                          </a:t>
+            </a:r>
+            <a:r>
+              <a:rPr lang="en-US" altLang="zh-CN" sz="2000">
+                <a:solidFill>
+                  <a:srgbClr val="0000FF"/>
+                </a:solidFill>
+              </a:rPr>
+              <a:t>《</a:t>
+            </a:r>
+            <a:r>
+              <a:rPr lang="zh-CN" altLang="en-US" sz="2000">
+                <a:solidFill>
+                  <a:srgbClr val="0000FF"/>
+                </a:solidFill>
+              </a:rPr>
+              <a:t>信息系统项目管理</a:t>
+            </a:r>
+            <a:r>
+              <a:rPr lang="en-US" altLang="zh-CN" sz="2000">
+                <a:solidFill>
+                  <a:srgbClr val="0000FF"/>
+                </a:solidFill>
+              </a:rPr>
+              <a:t>》</a:t>
+            </a:r>
+            <a:r>
+              <a:rPr lang="zh-CN" altLang="en-US" sz="2000">
+                <a:solidFill>
+                  <a:srgbClr val="0000FF"/>
+                </a:solidFill>
+              </a:rPr>
+              <a:t>讲义</a:t>
+            </a:r>
+          </a:p>
+        </p:txBody>
+      </p:sp>
+      <p:sp>
+        <p:nvSpPr>
+          <p:cNvPr id="32772" name="Line 7">
+            <a:extLst>
+              <a:ext uri="{FF2B5EF4-FFF2-40B4-BE49-F238E27FC236}">
+                <a16:creationId xmlns:a16="http://schemas.microsoft.com/office/drawing/2014/main" id="{11C3CA65-10C2-438B-B47B-636180CF233F}"/>
+              </a:ext>
+            </a:extLst>
+          </p:cNvPr>
+          <p:cNvSpPr>
+            <a:spLocks noChangeShapeType="1"/>
+          </p:cNvSpPr>
+          <p:nvPr/>
+        </p:nvSpPr>
+        <p:spPr bwMode="auto">
+          <a:xfrm>
+            <a:off x="0" y="476250"/>
+            <a:ext cx="9144000" cy="0"/>
+          </a:xfrm>
+          <a:prstGeom prst="line">
+            <a:avLst/>
+          </a:prstGeom>
+          <a:noFill/>
+          <a:ln w="9525">
+            <a:solidFill>
+              <a:srgbClr val="9900CC"/>
+            </a:solidFill>
+            <a:round/>
+            <a:headEnd/>
+            <a:tailEnd/>
+          </a:ln>
+          <a:extLst>
+            <a:ext uri="{909E8E84-426E-40DD-AFC4-6F175D3DCCD1}">
+              <a14:hiddenFill xmlns:a14="http://schemas.microsoft.com/office/drawing/2010/main">
+                <a:noFill/>
+              </a14:hiddenFill>
+            </a:ext>
+          </a:extLst>
+        </p:spPr>
+        <p:txBody>
+          <a:bodyPr/>
+          <a:lstStyle/>
+          <a:p>
+            <a:endParaRPr lang="zh-CN" altLang="en-US"/>
+          </a:p>
+        </p:txBody>
+      </p:sp>
+    </p:spTree>
+  </p:cSld>
+  <p:clrMapOvr>
+    <a:masterClrMapping/>
+  </p:clrMapOvr>
+</p:sld>
+</file>
+
+<file path=ppt/slides/slide31.xml><?xml version="1.0" encoding="utf-8"?>
+<p:sld xmlns:a="http://schemas.openxmlformats.org/drawingml/2006/main" xmlns:r="http://schemas.openxmlformats.org/officeDocument/2006/relationships" xmlns:p="http://schemas.openxmlformats.org/presentationml/2006/main">
+  <p:cSld>
+    <p:spTree>
+      <p:nvGrpSpPr>
+        <p:cNvPr id="1" name=""/>
+        <p:cNvGrpSpPr/>
+        <p:nvPr/>
+      </p:nvGrpSpPr>
+      <p:grpSpPr>
+        <a:xfrm>
+          <a:off x="0" y="0"/>
+          <a:ext cx="0" cy="0"/>
+          <a:chOff x="0" y="0"/>
+          <a:chExt cx="0" cy="0"/>
+        </a:xfrm>
+      </p:grpSpPr>
+      <p:sp>
+        <p:nvSpPr>
+          <p:cNvPr id="33794" name="Rectangle 5">
+            <a:extLst>
+              <a:ext uri="{FF2B5EF4-FFF2-40B4-BE49-F238E27FC236}">
+                <a16:creationId xmlns:a16="http://schemas.microsoft.com/office/drawing/2014/main" id="{A8191636-F9FD-4035-A2D2-7D8269FBA178}"/>
+              </a:ext>
+            </a:extLst>
+          </p:cNvPr>
+          <p:cNvSpPr>
+            <a:spLocks noGrp="1" noChangeArrowheads="1"/>
+          </p:cNvSpPr>
+          <p:nvPr>
+            <p:ph type="body" idx="4294967295"/>
+          </p:nvPr>
+        </p:nvSpPr>
+        <p:spPr>
+          <a:xfrm>
+            <a:off x="0" y="785813"/>
+            <a:ext cx="8229600" cy="4525962"/>
+          </a:xfrm>
+        </p:spPr>
+        <p:txBody>
+          <a:bodyPr/>
+          <a:lstStyle/>
+          <a:p>
+            <a:r>
+              <a:rPr lang="en-US" altLang="zh-CN" sz="4000"/>
+              <a:t>1.2.2 </a:t>
+            </a:r>
+            <a:r>
+              <a:rPr lang="zh-CN" altLang="en-US" sz="4000"/>
+              <a:t>信息系统项目的生命期</a:t>
+            </a:r>
+            <a:endParaRPr lang="en-US" altLang="zh-CN" sz="4000"/>
+          </a:p>
+          <a:p>
+            <a:pPr marL="971550" lvl="1" indent="-514350">
+              <a:buFontTx/>
+              <a:buNone/>
+            </a:pPr>
+            <a:endParaRPr lang="en-US" altLang="zh-CN"/>
+          </a:p>
+          <a:p>
+            <a:pPr marL="971550" lvl="1" indent="-514350">
+              <a:buFontTx/>
+              <a:buNone/>
+            </a:pPr>
+            <a:r>
+              <a:rPr lang="zh-CN" altLang="en-US"/>
+              <a:t>（</a:t>
+            </a:r>
+            <a:r>
+              <a:rPr lang="en-US" altLang="zh-CN"/>
+              <a:t>2</a:t>
+            </a:r>
+            <a:r>
+              <a:rPr lang="zh-CN" altLang="en-US"/>
+              <a:t>）系统分析阶段</a:t>
+            </a:r>
+            <a:endParaRPr lang="en-US" altLang="zh-CN"/>
+          </a:p>
+          <a:p>
+            <a:pPr marL="971550" lvl="1" indent="-514350">
+              <a:buFont typeface="Wingdings" panose="05000000000000000000" pitchFamily="2" charset="2"/>
+              <a:buChar char="Ø"/>
+            </a:pPr>
+            <a:r>
+              <a:rPr lang="zh-CN" altLang="en-US"/>
+              <a:t>根据系统规划报告所确定范围，对现行系统进行详细调查，描述现行系统的业务流程，指出现行系统局限性和不足之处，确定新系统的基本目标和逻辑功能要求，即提出新系统的逻辑模型。系统分析阶段的工作成果体现在系统分析说明书中</a:t>
+            </a:r>
+            <a:endParaRPr lang="en-US" altLang="zh-CN"/>
+          </a:p>
+          <a:p>
+            <a:pPr marL="971550" lvl="1" indent="-514350">
+              <a:buFont typeface="Wingdings" panose="05000000000000000000" pitchFamily="2" charset="2"/>
+              <a:buChar char="Ø"/>
+            </a:pPr>
+            <a:endParaRPr lang="en-US" altLang="zh-CN"/>
+          </a:p>
+        </p:txBody>
+      </p:sp>
+      <p:sp>
+        <p:nvSpPr>
+          <p:cNvPr id="26627" name="Rectangle 6">
+            <a:extLst>
+              <a:ext uri="{FF2B5EF4-FFF2-40B4-BE49-F238E27FC236}">
+                <a16:creationId xmlns:a16="http://schemas.microsoft.com/office/drawing/2014/main" id="{D44DEB22-3154-47AE-826C-1CA4FBB0D775}"/>
+              </a:ext>
+            </a:extLst>
+          </p:cNvPr>
+          <p:cNvSpPr>
+            <a:spLocks noGrp="1" noChangeArrowheads="1"/>
+          </p:cNvSpPr>
+          <p:nvPr>
+            <p:ph type="title" idx="4294967295"/>
+          </p:nvPr>
+        </p:nvSpPr>
+        <p:spPr>
+          <a:xfrm>
+            <a:off x="914400" y="130175"/>
+            <a:ext cx="8229600" cy="346075"/>
+          </a:xfrm>
+        </p:spPr>
+        <p:txBody>
+          <a:bodyPr>
+            <a:normAutofit fontScale="90000"/>
+          </a:bodyPr>
+          <a:lstStyle/>
+          <a:p>
+            <a:pPr>
+              <a:defRPr/>
+            </a:pPr>
+            <a:r>
+              <a:rPr lang="zh-CN" altLang="en-US" sz="2000">
+                <a:solidFill>
+                  <a:srgbClr val="0000FF"/>
+                </a:solidFill>
+              </a:rPr>
+              <a:t>十一五规划教材                                          </a:t>
+            </a:r>
+            <a:r>
+              <a:rPr lang="en-US" altLang="zh-CN" sz="2000">
+                <a:solidFill>
+                  <a:srgbClr val="0000FF"/>
+                </a:solidFill>
+              </a:rPr>
+              <a:t>《</a:t>
+            </a:r>
+            <a:r>
+              <a:rPr lang="zh-CN" altLang="en-US" sz="2000">
+                <a:solidFill>
+                  <a:srgbClr val="0000FF"/>
+                </a:solidFill>
+              </a:rPr>
+              <a:t>信息系统项目管理</a:t>
+            </a:r>
+            <a:r>
+              <a:rPr lang="en-US" altLang="zh-CN" sz="2000">
+                <a:solidFill>
+                  <a:srgbClr val="0000FF"/>
+                </a:solidFill>
+              </a:rPr>
+              <a:t>》</a:t>
+            </a:r>
+            <a:r>
+              <a:rPr lang="zh-CN" altLang="en-US" sz="2000">
+                <a:solidFill>
+                  <a:srgbClr val="0000FF"/>
+                </a:solidFill>
+              </a:rPr>
+              <a:t>讲义</a:t>
+            </a:r>
+          </a:p>
+        </p:txBody>
+      </p:sp>
+      <p:sp>
+        <p:nvSpPr>
+          <p:cNvPr id="33796" name="Line 7">
+            <a:extLst>
+              <a:ext uri="{FF2B5EF4-FFF2-40B4-BE49-F238E27FC236}">
+                <a16:creationId xmlns:a16="http://schemas.microsoft.com/office/drawing/2014/main" id="{5B004CE4-A5B0-4E1B-94F0-4C92152E0C54}"/>
+              </a:ext>
+            </a:extLst>
+          </p:cNvPr>
+          <p:cNvSpPr>
+            <a:spLocks noChangeShapeType="1"/>
+          </p:cNvSpPr>
+          <p:nvPr/>
+        </p:nvSpPr>
+        <p:spPr bwMode="auto">
+          <a:xfrm>
+            <a:off x="0" y="476250"/>
+            <a:ext cx="9144000" cy="0"/>
+          </a:xfrm>
+          <a:prstGeom prst="line">
+            <a:avLst/>
+          </a:prstGeom>
+          <a:noFill/>
+          <a:ln w="9525">
+            <a:solidFill>
+              <a:srgbClr val="9900CC"/>
+            </a:solidFill>
+            <a:round/>
+            <a:headEnd/>
+            <a:tailEnd/>
+          </a:ln>
+          <a:extLst>
+            <a:ext uri="{909E8E84-426E-40DD-AFC4-6F175D3DCCD1}">
+              <a14:hiddenFill xmlns:a14="http://schemas.microsoft.com/office/drawing/2010/main">
+                <a:noFill/>
+              </a14:hiddenFill>
+            </a:ext>
+          </a:extLst>
+        </p:spPr>
+        <p:txBody>
+          <a:bodyPr/>
+          <a:lstStyle/>
+          <a:p>
+            <a:endParaRPr lang="zh-CN" altLang="en-US"/>
+          </a:p>
+        </p:txBody>
+      </p:sp>
+    </p:spTree>
+  </p:cSld>
+  <p:clrMapOvr>
+    <a:masterClrMapping/>
+  </p:clrMapOvr>
+</p:sld>
+</file>
+
+<file path=ppt/slides/slide32.xml><?xml version="1.0" encoding="utf-8"?>
+<p:sld xmlns:a="http://schemas.openxmlformats.org/drawingml/2006/main" xmlns:r="http://schemas.openxmlformats.org/officeDocument/2006/relationships" xmlns:p="http://schemas.openxmlformats.org/presentationml/2006/main">
+  <p:cSld>
+    <p:spTree>
+      <p:nvGrpSpPr>
+        <p:cNvPr id="1" name=""/>
+        <p:cNvGrpSpPr/>
+        <p:nvPr/>
+      </p:nvGrpSpPr>
+      <p:grpSpPr>
+        <a:xfrm>
+          <a:off x="0" y="0"/>
+          <a:ext cx="0" cy="0"/>
+          <a:chOff x="0" y="0"/>
+          <a:chExt cx="0" cy="0"/>
+        </a:xfrm>
+      </p:grpSpPr>
+      <p:sp>
+        <p:nvSpPr>
           <p:cNvPr id="34818" name="Rectangle 5">
             <a:extLst>
               <a:ext uri="{FF2B5EF4-FFF2-40B4-BE49-F238E27FC236}">
@@ -15747,7 +16281,7 @@
 </p:sld>
 </file>
 
-<file path=ppt/slides/slide31.xml><?xml version="1.0" encoding="utf-8"?>
+<file path=ppt/slides/slide33.xml><?xml version="1.0" encoding="utf-8"?>
 <p:sld xmlns:a="http://schemas.openxmlformats.org/drawingml/2006/main" xmlns:r="http://schemas.openxmlformats.org/officeDocument/2006/relationships" xmlns:p="http://schemas.openxmlformats.org/presentationml/2006/main">
   <p:cSld>
     <p:spTree>
@@ -15990,7 +16524,7 @@
 </p:sld>
 </file>
 
-<file path=ppt/slides/slide32.xml><?xml version="1.0" encoding="utf-8"?>
+<file path=ppt/slides/slide34.xml><?xml version="1.0" encoding="utf-8"?>
 <p:sld xmlns:a="http://schemas.openxmlformats.org/drawingml/2006/main" xmlns:r="http://schemas.openxmlformats.org/officeDocument/2006/relationships" xmlns:p="http://schemas.openxmlformats.org/presentationml/2006/main">
   <p:cSld>
     <p:spTree>
@@ -16211,7 +16745,7 @@
 </p:sld>
 </file>
 
-<file path=ppt/slides/slide33.xml><?xml version="1.0" encoding="utf-8"?>
+<file path=ppt/slides/slide35.xml><?xml version="1.0" encoding="utf-8"?>
 <p:sld xmlns:a="http://schemas.openxmlformats.org/drawingml/2006/main" xmlns:r="http://schemas.openxmlformats.org/officeDocument/2006/relationships" xmlns:p="http://schemas.openxmlformats.org/presentationml/2006/main">
   <p:cSld>
     <p:spTree>
@@ -16256,20 +16790,6 @@
           </a:bodyPr>
           <a:lstStyle/>
           <a:p>
-            <a:pPr>
-              <a:defRPr/>
-            </a:pPr>
-            <a:r>
-              <a:rPr lang="en-US" altLang="zh-CN" sz="4400" dirty="0"/>
-              <a:t>1.2.2 </a:t>
-            </a:r>
-            <a:r>
-              <a:rPr lang="zh-CN" altLang="en-US" sz="4400" dirty="0"/>
-              <a:t>信息系统项目的生命期</a:t>
-            </a:r>
-            <a:endParaRPr lang="en-US" altLang="zh-CN" sz="4400" dirty="0"/>
-          </a:p>
-          <a:p>
             <a:pPr marL="971550" lvl="1" indent="-514350">
               <a:buFontTx/>
               <a:buAutoNum type="arabicPeriod" startAt="2"/>
@@ -16359,80 +16879,6 @@
               <a:t>正式运行期</a:t>
             </a:r>
             <a:endParaRPr lang="en-US" altLang="zh-CN" dirty="0"/>
-          </a:p>
-        </p:txBody>
-      </p:sp>
-      <p:sp>
-        <p:nvSpPr>
-          <p:cNvPr id="30723" name="Rectangle 6">
-            <a:extLst>
-              <a:ext uri="{FF2B5EF4-FFF2-40B4-BE49-F238E27FC236}">
-                <a16:creationId xmlns:a16="http://schemas.microsoft.com/office/drawing/2014/main" id="{821C6746-9EEF-4CE2-BA17-09B0712D7A97}"/>
-              </a:ext>
-            </a:extLst>
-          </p:cNvPr>
-          <p:cNvSpPr>
-            <a:spLocks noGrp="1" noChangeArrowheads="1"/>
-          </p:cNvSpPr>
-          <p:nvPr>
-            <p:ph type="title" idx="4294967295"/>
-          </p:nvPr>
-        </p:nvSpPr>
-        <p:spPr>
-          <a:xfrm>
-            <a:off x="914400" y="130175"/>
-            <a:ext cx="8229600" cy="346075"/>
-          </a:xfrm>
-        </p:spPr>
-        <p:txBody>
-          <a:bodyPr>
-            <a:normAutofit fontScale="90000"/>
-          </a:bodyPr>
-          <a:lstStyle/>
-          <a:p>
-            <a:pPr>
-              <a:defRPr/>
-            </a:pPr>
-            <a:r>
-              <a:rPr lang="zh-CN" altLang="en-US" sz="2000">
-                <a:solidFill>
-                  <a:srgbClr val="0000FF"/>
-                </a:solidFill>
-              </a:rPr>
-              <a:t>十一五规划教材                                          </a:t>
-            </a:r>
-            <a:r>
-              <a:rPr lang="en-US" altLang="zh-CN" sz="2000">
-                <a:solidFill>
-                  <a:srgbClr val="0000FF"/>
-                </a:solidFill>
-              </a:rPr>
-              <a:t>《</a:t>
-            </a:r>
-            <a:r>
-              <a:rPr lang="zh-CN" altLang="en-US" sz="2000">
-                <a:solidFill>
-                  <a:srgbClr val="0000FF"/>
-                </a:solidFill>
-              </a:rPr>
-              <a:t>信息系统项目管理</a:t>
-            </a:r>
-            <a:r>
-              <a:rPr lang="en-US" altLang="zh-CN" sz="2000">
-                <a:solidFill>
-                  <a:srgbClr val="0000FF"/>
-                </a:solidFill>
-              </a:rPr>
-              <a:t>》</a:t>
-            </a:r>
-            <a:r>
-              <a:rPr lang="zh-CN" altLang="en-US" sz="2000">
-                <a:solidFill>
-                  <a:srgbClr val="0000FF"/>
-                </a:solidFill>
-              </a:rPr>
-              <a:t>讲义</a:t>
-            </a:r>
           </a:p>
         </p:txBody>
       </p:sp>
@@ -16638,53 +17084,6 @@
               <a:buNone/>
             </a:pPr>
             <a:endParaRPr lang="en-US" altLang="zh-CN" sz="1800" b="0"/>
-          </a:p>
-        </p:txBody>
-      </p:sp>
-      <p:sp>
-        <p:nvSpPr>
-          <p:cNvPr id="37893" name="Line 7">
-            <a:extLst>
-              <a:ext uri="{FF2B5EF4-FFF2-40B4-BE49-F238E27FC236}">
-                <a16:creationId xmlns:a16="http://schemas.microsoft.com/office/drawing/2014/main" id="{0C4F9589-9B9F-4D4C-82F9-B1039B6D009A}"/>
-              </a:ext>
-            </a:extLst>
-          </p:cNvPr>
-          <p:cNvSpPr>
-            <a:spLocks noChangeShapeType="1"/>
-          </p:cNvSpPr>
-          <p:nvPr/>
-        </p:nvSpPr>
-        <p:spPr bwMode="auto">
-          <a:xfrm>
-            <a:off x="0" y="476250"/>
-            <a:ext cx="9144000" cy="0"/>
-          </a:xfrm>
-          <a:prstGeom prst="line">
-            <a:avLst/>
-          </a:prstGeom>
-          <a:noFill/>
-          <a:ln w="9525">
-            <a:solidFill>
-              <a:srgbClr val="9900CC"/>
-            </a:solidFill>
-            <a:round/>
-            <a:headEnd/>
-            <a:tailEnd/>
-          </a:ln>
-          <a:extLst>
-            <a:ext uri="{909E8E84-426E-40DD-AFC4-6F175D3DCCD1}">
-              <a14:hiddenFill xmlns:a14="http://schemas.microsoft.com/office/drawing/2010/main">
-                <a:noFill/>
-              </a14:hiddenFill>
-            </a:ext>
-          </a:extLst>
-        </p:spPr>
-        <p:txBody>
-          <a:bodyPr/>
-          <a:lstStyle/>
-          <a:p>
-            <a:endParaRPr lang="zh-CN" altLang="en-US"/>
           </a:p>
         </p:txBody>
       </p:sp>
@@ -16729,7 +17128,7 @@
                                         <p:tgtEl>
                                           <p:spTgt spid="30722">
                                             <p:txEl>
-                                              <p:pRg st="3" end="3"/>
+                                              <p:pRg st="2" end="2"/>
                                             </p:txEl>
                                           </p:spTgt>
                                         </p:tgtEl>
@@ -16775,7 +17174,7 @@
 </p:sld>
 </file>
 
-<file path=ppt/slides/slide34.xml><?xml version="1.0" encoding="utf-8"?>
+<file path=ppt/slides/slide36.xml><?xml version="1.0" encoding="utf-8"?>
 <p:sld xmlns:a="http://schemas.openxmlformats.org/drawingml/2006/main" xmlns:r="http://schemas.openxmlformats.org/officeDocument/2006/relationships" xmlns:p="http://schemas.openxmlformats.org/presentationml/2006/main">
   <p:cSld>
     <p:spTree>
@@ -17186,7 +17585,7 @@
 </p:sld>
 </file>
 
-<file path=ppt/slides/slide35.xml><?xml version="1.0" encoding="utf-8"?>
+<file path=ppt/slides/slide37.xml><?xml version="1.0" encoding="utf-8"?>
 <p:sld xmlns:a="http://schemas.openxmlformats.org/drawingml/2006/main" xmlns:r="http://schemas.openxmlformats.org/officeDocument/2006/relationships" xmlns:p="http://schemas.openxmlformats.org/presentationml/2006/main">
   <p:cSld>
     <p:spTree>
@@ -17369,7 +17768,7 @@
 </p:sld>
 </file>
 
-<file path=ppt/slides/slide36.xml><?xml version="1.0" encoding="utf-8"?>
+<file path=ppt/slides/slide38.xml><?xml version="1.0" encoding="utf-8"?>
 <p:sld xmlns:a="http://schemas.openxmlformats.org/drawingml/2006/main" xmlns:r="http://schemas.openxmlformats.org/officeDocument/2006/relationships" xmlns:p="http://schemas.openxmlformats.org/presentationml/2006/main">
   <p:cSld>
     <p:spTree>
@@ -17797,7 +18196,7 @@
 </p:sld>
 </file>
 
-<file path=ppt/slides/slide37.xml><?xml version="1.0" encoding="utf-8"?>
+<file path=ppt/slides/slide39.xml><?xml version="1.0" encoding="utf-8"?>
 <p:sld xmlns:a="http://schemas.openxmlformats.org/drawingml/2006/main" xmlns:r="http://schemas.openxmlformats.org/officeDocument/2006/relationships" xmlns:p="http://schemas.openxmlformats.org/presentationml/2006/main">
   <p:cSld>
     <p:spTree>
@@ -18085,708 +18484,6 @@
         <p14:creationId xmlns:p14="http://schemas.microsoft.com/office/powerpoint/2010/main" val="1157534533"/>
       </p:ext>
     </p:extLst>
-  </p:cSld>
-  <p:clrMapOvr>
-    <a:masterClrMapping/>
-  </p:clrMapOvr>
-</p:sld>
-</file>
-
-<file path=ppt/slides/slide38.xml><?xml version="1.0" encoding="utf-8"?>
-<p:sld xmlns:a="http://schemas.openxmlformats.org/drawingml/2006/main" xmlns:r="http://schemas.openxmlformats.org/officeDocument/2006/relationships" xmlns:p="http://schemas.openxmlformats.org/presentationml/2006/main">
-  <p:cSld>
-    <p:spTree>
-      <p:nvGrpSpPr>
-        <p:cNvPr id="1" name=""/>
-        <p:cNvGrpSpPr/>
-        <p:nvPr/>
-      </p:nvGrpSpPr>
-      <p:grpSpPr>
-        <a:xfrm>
-          <a:off x="0" y="0"/>
-          <a:ext cx="0" cy="0"/>
-          <a:chOff x="0" y="0"/>
-          <a:chExt cx="0" cy="0"/>
-        </a:xfrm>
-      </p:grpSpPr>
-      <p:sp>
-        <p:nvSpPr>
-          <p:cNvPr id="41986" name="Rectangle 5">
-            <a:extLst>
-              <a:ext uri="{FF2B5EF4-FFF2-40B4-BE49-F238E27FC236}">
-                <a16:creationId xmlns:a16="http://schemas.microsoft.com/office/drawing/2014/main" id="{085D95A7-8E74-4EE8-BB67-B83968BD90A1}"/>
-              </a:ext>
-            </a:extLst>
-          </p:cNvPr>
-          <p:cNvSpPr>
-            <a:spLocks noGrp="1" noChangeArrowheads="1"/>
-          </p:cNvSpPr>
-          <p:nvPr>
-            <p:ph type="body" idx="4294967295"/>
-          </p:nvPr>
-        </p:nvSpPr>
-        <p:spPr>
-          <a:xfrm>
-            <a:off x="0" y="642938"/>
-            <a:ext cx="9036496" cy="6026420"/>
-          </a:xfrm>
-        </p:spPr>
-        <p:txBody>
-          <a:bodyPr>
-            <a:noAutofit/>
-          </a:bodyPr>
-          <a:lstStyle/>
-          <a:p>
-            <a:pPr>
-              <a:lnSpc>
-                <a:spcPct val="90000"/>
-              </a:lnSpc>
-            </a:pPr>
-            <a:r>
-              <a:rPr lang="en-US" altLang="zh-CN" sz="4000" dirty="0"/>
-              <a:t>1.3.1 IT</a:t>
-            </a:r>
-            <a:r>
-              <a:rPr lang="zh-CN" altLang="en-US" sz="4000" dirty="0"/>
-              <a:t>治理的含义和框架</a:t>
-            </a:r>
-            <a:endParaRPr lang="en-US" altLang="zh-CN" sz="4000" dirty="0"/>
-          </a:p>
-          <a:p>
-            <a:pPr indent="0" algn="just">
-              <a:lnSpc>
-                <a:spcPct val="90000"/>
-              </a:lnSpc>
-              <a:buFontTx/>
-              <a:buNone/>
-            </a:pPr>
-            <a:r>
-              <a:rPr lang="zh-CN" altLang="en-US" sz="2600" dirty="0">
-                <a:solidFill>
-                  <a:srgbClr val="FF0000"/>
-                </a:solidFill>
-                <a:latin typeface="Times New Roman" panose="02020603050405020304" pitchFamily="18" charset="0"/>
-                <a:ea typeface="黑体" panose="02010609060101010101" pitchFamily="49" charset="-122"/>
-              </a:rPr>
-              <a:t>2.</a:t>
-            </a:r>
-            <a:r>
-              <a:rPr lang="en-US" altLang="zh-CN" sz="2600" dirty="0">
-                <a:solidFill>
-                  <a:srgbClr val="FF0000"/>
-                </a:solidFill>
-                <a:latin typeface="Times New Roman" panose="02020603050405020304" pitchFamily="18" charset="0"/>
-                <a:ea typeface="黑体" panose="02010609060101010101" pitchFamily="49" charset="-122"/>
-              </a:rPr>
-              <a:t>IT</a:t>
-            </a:r>
-            <a:r>
-              <a:rPr lang="zh-CN" altLang="en-US" sz="2600" dirty="0">
-                <a:solidFill>
-                  <a:srgbClr val="FF0000"/>
-                </a:solidFill>
-                <a:latin typeface="Times New Roman" panose="02020603050405020304" pitchFamily="18" charset="0"/>
-                <a:ea typeface="黑体" panose="02010609060101010101" pitchFamily="49" charset="-122"/>
-              </a:rPr>
-              <a:t>治理的框架：COBIT</a:t>
-            </a:r>
-            <a:endParaRPr lang="en-US" altLang="zh-CN" sz="2600" dirty="0">
-              <a:solidFill>
-                <a:srgbClr val="FF0000"/>
-              </a:solidFill>
-              <a:latin typeface="Times New Roman" panose="02020603050405020304" pitchFamily="18" charset="0"/>
-              <a:ea typeface="黑体" panose="02010609060101010101" pitchFamily="49" charset="-122"/>
-            </a:endParaRPr>
-          </a:p>
-          <a:p>
-            <a:pPr marL="0" lvl="1" indent="0" algn="just">
-              <a:lnSpc>
-                <a:spcPct val="150000"/>
-              </a:lnSpc>
-              <a:buFont typeface="Wingdings" panose="05000000000000000000" pitchFamily="2" charset="2"/>
-              <a:buChar char="Ø"/>
-            </a:pPr>
-            <a:r>
-              <a:rPr lang="en-US" altLang="zh-CN" sz="2600" dirty="0">
-                <a:latin typeface="Times New Roman" panose="02020603050405020304" pitchFamily="18" charset="0"/>
-                <a:ea typeface="黑体" panose="02010609060101010101" pitchFamily="49" charset="-122"/>
-              </a:rPr>
-              <a:t>ISACA</a:t>
-            </a:r>
-            <a:r>
-              <a:rPr lang="zh-CN" altLang="en-US" sz="2600" dirty="0">
-                <a:latin typeface="Times New Roman" panose="02020603050405020304" pitchFamily="18" charset="0"/>
-                <a:ea typeface="黑体" panose="02010609060101010101" pitchFamily="49" charset="-122"/>
-              </a:rPr>
-              <a:t>开发的</a:t>
-            </a:r>
-            <a:r>
-              <a:rPr lang="en-US" altLang="zh-CN" sz="2600" dirty="0">
-                <a:latin typeface="Times New Roman" panose="02020603050405020304" pitchFamily="18" charset="0"/>
-                <a:ea typeface="黑体" panose="02010609060101010101" pitchFamily="49" charset="-122"/>
-              </a:rPr>
-              <a:t>COBIT</a:t>
-            </a:r>
-            <a:r>
-              <a:rPr lang="zh-CN" altLang="en-US" sz="2600" dirty="0">
-                <a:latin typeface="Times New Roman" panose="02020603050405020304" pitchFamily="18" charset="0"/>
-                <a:ea typeface="黑体" panose="02010609060101010101" pitchFamily="49" charset="-122"/>
-              </a:rPr>
-              <a:t>（</a:t>
-            </a:r>
-            <a:r>
-              <a:rPr lang="en-US" altLang="zh-CN" sz="2600" dirty="0">
-                <a:latin typeface="Times New Roman" panose="02020603050405020304" pitchFamily="18" charset="0"/>
-                <a:ea typeface="黑体" panose="02010609060101010101" pitchFamily="49" charset="-122"/>
-              </a:rPr>
-              <a:t>Control Objectives for Information and related Technology</a:t>
-            </a:r>
-            <a:r>
-              <a:rPr lang="zh-CN" altLang="en-US" sz="2600" dirty="0">
-                <a:latin typeface="Times New Roman" panose="02020603050405020304" pitchFamily="18" charset="0"/>
-                <a:ea typeface="黑体" panose="02010609060101010101" pitchFamily="49" charset="-122"/>
-              </a:rPr>
-              <a:t>），即信息及相关技术的控制目标，是</a:t>
-            </a:r>
-            <a:r>
-              <a:rPr lang="en-US" altLang="zh-CN" sz="2600" dirty="0">
-                <a:latin typeface="Times New Roman" panose="02020603050405020304" pitchFamily="18" charset="0"/>
-                <a:ea typeface="黑体" panose="02010609060101010101" pitchFamily="49" charset="-122"/>
-              </a:rPr>
-              <a:t>IT</a:t>
-            </a:r>
-            <a:r>
-              <a:rPr lang="zh-CN" altLang="en-US" sz="2600" dirty="0">
-                <a:latin typeface="Times New Roman" panose="02020603050405020304" pitchFamily="18" charset="0"/>
-                <a:ea typeface="黑体" panose="02010609060101010101" pitchFamily="49" charset="-122"/>
-              </a:rPr>
-              <a:t>治理的一个开放性标准</a:t>
-            </a:r>
-            <a:endParaRPr lang="en-US" altLang="zh-CN" sz="2600" dirty="0">
-              <a:latin typeface="Times New Roman" panose="02020603050405020304" pitchFamily="18" charset="0"/>
-              <a:ea typeface="黑体" panose="02010609060101010101" pitchFamily="49" charset="-122"/>
-            </a:endParaRPr>
-          </a:p>
-          <a:p>
-            <a:pPr marL="0" lvl="1" indent="0" algn="just">
-              <a:lnSpc>
-                <a:spcPct val="150000"/>
-              </a:lnSpc>
-              <a:buFont typeface="Wingdings" panose="05000000000000000000" pitchFamily="2" charset="2"/>
-              <a:buChar char="Ø"/>
-            </a:pPr>
-            <a:r>
-              <a:rPr lang="en-US" altLang="zh-CN" sz="2600" dirty="0">
-                <a:latin typeface="Times New Roman" panose="02020603050405020304" pitchFamily="18" charset="0"/>
-                <a:ea typeface="黑体" panose="02010609060101010101" pitchFamily="49" charset="-122"/>
-              </a:rPr>
-              <a:t>COBIT</a:t>
-            </a:r>
-            <a:r>
-              <a:rPr lang="zh-CN" altLang="en-US" sz="2600" dirty="0">
-                <a:latin typeface="Times New Roman" panose="02020603050405020304" pitchFamily="18" charset="0"/>
-                <a:ea typeface="黑体" panose="02010609060101010101" pitchFamily="49" charset="-122"/>
-              </a:rPr>
-              <a:t>的目标是为组织的管理层和业务流程负责人提供一个</a:t>
-            </a:r>
-            <a:r>
-              <a:rPr lang="en-US" altLang="zh-CN" sz="2600" dirty="0">
-                <a:latin typeface="Times New Roman" panose="02020603050405020304" pitchFamily="18" charset="0"/>
-                <a:ea typeface="黑体" panose="02010609060101010101" pitchFamily="49" charset="-122"/>
-              </a:rPr>
-              <a:t>IT</a:t>
-            </a:r>
-            <a:r>
-              <a:rPr lang="zh-CN" altLang="en-US" sz="2600" dirty="0">
-                <a:latin typeface="Times New Roman" panose="02020603050405020304" pitchFamily="18" charset="0"/>
-                <a:ea typeface="黑体" panose="02010609060101010101" pitchFamily="49" charset="-122"/>
-              </a:rPr>
-              <a:t>治理模型，以帮助他们深入理解和管理</a:t>
-            </a:r>
-            <a:r>
-              <a:rPr lang="en-US" altLang="zh-CN" sz="2600" dirty="0">
-                <a:latin typeface="Times New Roman" panose="02020603050405020304" pitchFamily="18" charset="0"/>
-                <a:ea typeface="黑体" panose="02010609060101010101" pitchFamily="49" charset="-122"/>
-              </a:rPr>
-              <a:t>IT</a:t>
-            </a:r>
-            <a:r>
-              <a:rPr lang="zh-CN" altLang="en-US" sz="2600" dirty="0">
-                <a:latin typeface="Times New Roman" panose="02020603050405020304" pitchFamily="18" charset="0"/>
-                <a:ea typeface="黑体" panose="02010609060101010101" pitchFamily="49" charset="-122"/>
-              </a:rPr>
-              <a:t>相关风险。</a:t>
-            </a:r>
-            <a:endParaRPr lang="en-US" altLang="zh-CN" sz="2600" dirty="0">
-              <a:latin typeface="Times New Roman" panose="02020603050405020304" pitchFamily="18" charset="0"/>
-              <a:ea typeface="黑体" panose="02010609060101010101" pitchFamily="49" charset="-122"/>
-            </a:endParaRPr>
-          </a:p>
-          <a:p>
-            <a:pPr marL="0" lvl="1" indent="0" algn="just">
-              <a:lnSpc>
-                <a:spcPct val="150000"/>
-              </a:lnSpc>
-              <a:buFont typeface="Wingdings" panose="05000000000000000000" pitchFamily="2" charset="2"/>
-              <a:buChar char="Ø"/>
-            </a:pPr>
-            <a:r>
-              <a:rPr lang="en-US" altLang="zh-CN" sz="2600" dirty="0">
-                <a:latin typeface="Times New Roman" panose="02020603050405020304" pitchFamily="18" charset="0"/>
-                <a:ea typeface="黑体" panose="02010609060101010101" pitchFamily="49" charset="-122"/>
-              </a:rPr>
-              <a:t>COBIT</a:t>
-            </a:r>
-            <a:r>
-              <a:rPr lang="zh-CN" altLang="en-US" sz="2600" dirty="0">
-                <a:latin typeface="Times New Roman" panose="02020603050405020304" pitchFamily="18" charset="0"/>
-                <a:ea typeface="黑体" panose="02010609060101010101" pitchFamily="49" charset="-122"/>
-              </a:rPr>
-              <a:t>的思想基础是</a:t>
-            </a:r>
-            <a:r>
-              <a:rPr lang="en-US" altLang="zh-CN" sz="2600" dirty="0">
-                <a:latin typeface="Times New Roman" panose="02020603050405020304" pitchFamily="18" charset="0"/>
-                <a:ea typeface="黑体" panose="02010609060101010101" pitchFamily="49" charset="-122"/>
-              </a:rPr>
-              <a:t>IT</a:t>
-            </a:r>
-            <a:r>
-              <a:rPr lang="zh-CN" altLang="en-US" sz="2600" dirty="0">
-                <a:latin typeface="Times New Roman" panose="02020603050405020304" pitchFamily="18" charset="0"/>
-                <a:ea typeface="黑体" panose="02010609060101010101" pitchFamily="49" charset="-122"/>
-              </a:rPr>
-              <a:t>资源管理需要一系列的流程，以确保组织能够得到为达到其目标所需的可靠信息，并通过平衡</a:t>
-            </a:r>
-            <a:r>
-              <a:rPr lang="en-US" altLang="zh-CN" sz="2600" dirty="0">
-                <a:latin typeface="Times New Roman" panose="02020603050405020304" pitchFamily="18" charset="0"/>
-                <a:ea typeface="黑体" panose="02010609060101010101" pitchFamily="49" charset="-122"/>
-              </a:rPr>
-              <a:t>IT</a:t>
-            </a:r>
-            <a:r>
-              <a:rPr lang="zh-CN" altLang="en-US" sz="2600" dirty="0">
-                <a:latin typeface="Times New Roman" panose="02020603050405020304" pitchFamily="18" charset="0"/>
-                <a:ea typeface="黑体" panose="02010609060101010101" pitchFamily="49" charset="-122"/>
-              </a:rPr>
-              <a:t>及其过程的风险与回报提高价值，实现组织的战略目标</a:t>
-            </a:r>
-            <a:r>
-              <a:rPr lang="en-US" altLang="zh-CN" sz="2600" dirty="0">
-                <a:latin typeface="Times New Roman" panose="02020603050405020304" pitchFamily="18" charset="0"/>
-                <a:ea typeface="黑体" panose="02010609060101010101" pitchFamily="49" charset="-122"/>
-              </a:rPr>
-              <a:t>.</a:t>
-            </a:r>
-          </a:p>
-        </p:txBody>
-      </p:sp>
-      <p:sp>
-        <p:nvSpPr>
-          <p:cNvPr id="34819" name="Rectangle 6">
-            <a:extLst>
-              <a:ext uri="{FF2B5EF4-FFF2-40B4-BE49-F238E27FC236}">
-                <a16:creationId xmlns:a16="http://schemas.microsoft.com/office/drawing/2014/main" id="{559C840E-881B-4F7F-A419-F04A639E2CB9}"/>
-              </a:ext>
-            </a:extLst>
-          </p:cNvPr>
-          <p:cNvSpPr>
-            <a:spLocks noGrp="1" noChangeArrowheads="1"/>
-          </p:cNvSpPr>
-          <p:nvPr>
-            <p:ph type="title" idx="4294967295"/>
-          </p:nvPr>
-        </p:nvSpPr>
-        <p:spPr>
-          <a:xfrm>
-            <a:off x="914400" y="130175"/>
-            <a:ext cx="8229600" cy="346075"/>
-          </a:xfrm>
-        </p:spPr>
-        <p:txBody>
-          <a:bodyPr>
-            <a:normAutofit fontScale="90000"/>
-          </a:bodyPr>
-          <a:lstStyle/>
-          <a:p>
-            <a:pPr>
-              <a:defRPr/>
-            </a:pPr>
-            <a:r>
-              <a:rPr lang="zh-CN" altLang="en-US" sz="2000">
-                <a:solidFill>
-                  <a:srgbClr val="0000FF"/>
-                </a:solidFill>
-              </a:rPr>
-              <a:t>十一五规划教材                                          </a:t>
-            </a:r>
-            <a:r>
-              <a:rPr lang="en-US" altLang="zh-CN" sz="2000">
-                <a:solidFill>
-                  <a:srgbClr val="0000FF"/>
-                </a:solidFill>
-              </a:rPr>
-              <a:t>《</a:t>
-            </a:r>
-            <a:r>
-              <a:rPr lang="zh-CN" altLang="en-US" sz="2000">
-                <a:solidFill>
-                  <a:srgbClr val="0000FF"/>
-                </a:solidFill>
-              </a:rPr>
-              <a:t>信息系统项目管理</a:t>
-            </a:r>
-            <a:r>
-              <a:rPr lang="en-US" altLang="zh-CN" sz="2000">
-                <a:solidFill>
-                  <a:srgbClr val="0000FF"/>
-                </a:solidFill>
-              </a:rPr>
-              <a:t>》</a:t>
-            </a:r>
-            <a:r>
-              <a:rPr lang="zh-CN" altLang="en-US" sz="2000">
-                <a:solidFill>
-                  <a:srgbClr val="0000FF"/>
-                </a:solidFill>
-              </a:rPr>
-              <a:t>讲义</a:t>
-            </a:r>
-          </a:p>
-        </p:txBody>
-      </p:sp>
-      <p:sp>
-        <p:nvSpPr>
-          <p:cNvPr id="41988" name="Line 7">
-            <a:extLst>
-              <a:ext uri="{FF2B5EF4-FFF2-40B4-BE49-F238E27FC236}">
-                <a16:creationId xmlns:a16="http://schemas.microsoft.com/office/drawing/2014/main" id="{C776352F-2163-4947-8C41-A4F235A4C755}"/>
-              </a:ext>
-            </a:extLst>
-          </p:cNvPr>
-          <p:cNvSpPr>
-            <a:spLocks noChangeShapeType="1"/>
-          </p:cNvSpPr>
-          <p:nvPr/>
-        </p:nvSpPr>
-        <p:spPr bwMode="auto">
-          <a:xfrm>
-            <a:off x="0" y="476250"/>
-            <a:ext cx="9144000" cy="0"/>
-          </a:xfrm>
-          <a:prstGeom prst="line">
-            <a:avLst/>
-          </a:prstGeom>
-          <a:noFill/>
-          <a:ln w="9525">
-            <a:solidFill>
-              <a:srgbClr val="9900CC"/>
-            </a:solidFill>
-            <a:round/>
-            <a:headEnd/>
-            <a:tailEnd/>
-          </a:ln>
-          <a:extLst>
-            <a:ext uri="{909E8E84-426E-40DD-AFC4-6F175D3DCCD1}">
-              <a14:hiddenFill xmlns:a14="http://schemas.microsoft.com/office/drawing/2010/main">
-                <a:noFill/>
-              </a14:hiddenFill>
-            </a:ext>
-          </a:extLst>
-        </p:spPr>
-        <p:txBody>
-          <a:bodyPr/>
-          <a:lstStyle/>
-          <a:p>
-            <a:endParaRPr lang="zh-CN" altLang="en-US"/>
-          </a:p>
-        </p:txBody>
-      </p:sp>
-    </p:spTree>
-  </p:cSld>
-  <p:clrMapOvr>
-    <a:masterClrMapping/>
-  </p:clrMapOvr>
-</p:sld>
-</file>
-
-<file path=ppt/slides/slide39.xml><?xml version="1.0" encoding="utf-8"?>
-<p:sld xmlns:a="http://schemas.openxmlformats.org/drawingml/2006/main" xmlns:r="http://schemas.openxmlformats.org/officeDocument/2006/relationships" xmlns:p="http://schemas.openxmlformats.org/presentationml/2006/main">
-  <p:cSld>
-    <p:spTree>
-      <p:nvGrpSpPr>
-        <p:cNvPr id="1" name=""/>
-        <p:cNvGrpSpPr/>
-        <p:nvPr/>
-      </p:nvGrpSpPr>
-      <p:grpSpPr>
-        <a:xfrm>
-          <a:off x="0" y="0"/>
-          <a:ext cx="0" cy="0"/>
-          <a:chOff x="0" y="0"/>
-          <a:chExt cx="0" cy="0"/>
-        </a:xfrm>
-      </p:grpSpPr>
-      <p:sp>
-        <p:nvSpPr>
-          <p:cNvPr id="35842" name="Rectangle 5">
-            <a:extLst>
-              <a:ext uri="{FF2B5EF4-FFF2-40B4-BE49-F238E27FC236}">
-                <a16:creationId xmlns:a16="http://schemas.microsoft.com/office/drawing/2014/main" id="{B39E898A-80D9-4810-BD4B-AC76BBA51F13}"/>
-              </a:ext>
-            </a:extLst>
-          </p:cNvPr>
-          <p:cNvSpPr>
-            <a:spLocks noGrp="1" noChangeArrowheads="1"/>
-          </p:cNvSpPr>
-          <p:nvPr>
-            <p:ph type="body" idx="4294967295"/>
-          </p:nvPr>
-        </p:nvSpPr>
-        <p:spPr>
-          <a:xfrm>
-            <a:off x="179512" y="742949"/>
-            <a:ext cx="8712968" cy="3478137"/>
-          </a:xfrm>
-        </p:spPr>
-        <p:txBody>
-          <a:bodyPr>
-            <a:noAutofit/>
-          </a:bodyPr>
-          <a:lstStyle/>
-          <a:p>
-            <a:pPr>
-              <a:defRPr/>
-            </a:pPr>
-            <a:r>
-              <a:rPr lang="en-US" altLang="zh-CN" sz="4000" dirty="0"/>
-              <a:t>1.3.1 IT</a:t>
-            </a:r>
-            <a:r>
-              <a:rPr lang="zh-CN" altLang="en-US" sz="4000" dirty="0"/>
-              <a:t>治理的含义和框架</a:t>
-            </a:r>
-            <a:endParaRPr lang="en-US" altLang="zh-CN" sz="4000" dirty="0"/>
-          </a:p>
-          <a:p>
-            <a:pPr marL="0" lvl="1" indent="0" algn="just">
-              <a:lnSpc>
-                <a:spcPct val="150000"/>
-              </a:lnSpc>
-              <a:spcBef>
-                <a:spcPts val="0"/>
-              </a:spcBef>
-              <a:buFont typeface="Wingdings" panose="05000000000000000000" pitchFamily="2" charset="2"/>
-              <a:buChar char="Ø"/>
-              <a:defRPr/>
-            </a:pPr>
-            <a:r>
-              <a:rPr lang="en-US" altLang="zh-CN" dirty="0"/>
-              <a:t>COBIT</a:t>
-            </a:r>
-            <a:r>
-              <a:rPr lang="zh-CN" altLang="en-US" dirty="0"/>
-              <a:t>控制目标体系从一个简单而实际的假设开始：为了提供组织达到其目标而需要的信息，</a:t>
-            </a:r>
-            <a:r>
-              <a:rPr lang="en-US" altLang="zh-CN" dirty="0"/>
-              <a:t> IT</a:t>
-            </a:r>
-            <a:r>
-              <a:rPr lang="zh-CN" altLang="en-US" dirty="0"/>
-              <a:t>资源（</a:t>
-            </a:r>
-            <a:r>
-              <a:rPr lang="en-US" altLang="zh-CN" dirty="0"/>
-              <a:t>IT Resources</a:t>
-            </a:r>
-            <a:r>
-              <a:rPr lang="zh-CN" altLang="en-US" dirty="0"/>
-              <a:t>）需要由一组自然分类的</a:t>
-            </a:r>
-            <a:r>
-              <a:rPr lang="en-US" altLang="zh-CN" dirty="0"/>
-              <a:t>IT</a:t>
-            </a:r>
-            <a:r>
-              <a:rPr lang="zh-CN" altLang="en-US" dirty="0"/>
-              <a:t>过程（</a:t>
-            </a:r>
-            <a:r>
-              <a:rPr lang="en-US" altLang="zh-CN" dirty="0"/>
-              <a:t>IT Processes</a:t>
-            </a:r>
-            <a:r>
-              <a:rPr lang="zh-CN" altLang="en-US" dirty="0"/>
-              <a:t>）管理。</a:t>
-            </a:r>
-            <a:r>
-              <a:rPr lang="en-US" altLang="zh-CN" dirty="0"/>
-              <a:t>COBIT</a:t>
-            </a:r>
-            <a:r>
-              <a:rPr lang="zh-CN" altLang="en-US" dirty="0"/>
-              <a:t>三维体系模型中的三维分别是：</a:t>
-            </a:r>
-            <a:r>
-              <a:rPr lang="en-US" altLang="zh-CN" dirty="0"/>
-              <a:t>IT</a:t>
-            </a:r>
-            <a:r>
-              <a:rPr lang="zh-CN" altLang="en-US" dirty="0"/>
-              <a:t>资源维，</a:t>
-            </a:r>
-            <a:r>
-              <a:rPr lang="en-US" altLang="zh-CN" dirty="0"/>
-              <a:t>IT</a:t>
-            </a:r>
-            <a:r>
-              <a:rPr lang="zh-CN" altLang="en-US" dirty="0"/>
-              <a:t>准则维和</a:t>
-            </a:r>
-            <a:r>
-              <a:rPr lang="en-US" altLang="zh-CN" dirty="0"/>
-              <a:t>IT</a:t>
-            </a:r>
-            <a:r>
-              <a:rPr lang="zh-CN" altLang="en-US" dirty="0"/>
-              <a:t>过程维，</a:t>
-            </a:r>
-            <a:r>
-              <a:rPr lang="en-US" altLang="zh-CN" dirty="0"/>
-              <a:t>COBIT</a:t>
-            </a:r>
-            <a:r>
-              <a:rPr lang="zh-CN" altLang="en-US" dirty="0"/>
-              <a:t>三维体系模型如下图所示</a:t>
-            </a:r>
-            <a:endParaRPr lang="en-US" altLang="zh-CN" dirty="0"/>
-          </a:p>
-        </p:txBody>
-      </p:sp>
-      <p:sp>
-        <p:nvSpPr>
-          <p:cNvPr id="35843" name="Rectangle 6">
-            <a:extLst>
-              <a:ext uri="{FF2B5EF4-FFF2-40B4-BE49-F238E27FC236}">
-                <a16:creationId xmlns:a16="http://schemas.microsoft.com/office/drawing/2014/main" id="{A6EAE0AD-FF69-4E89-B94C-A8B660F887C8}"/>
-              </a:ext>
-            </a:extLst>
-          </p:cNvPr>
-          <p:cNvSpPr>
-            <a:spLocks noGrp="1" noChangeArrowheads="1"/>
-          </p:cNvSpPr>
-          <p:nvPr>
-            <p:ph type="title" idx="4294967295"/>
-          </p:nvPr>
-        </p:nvSpPr>
-        <p:spPr>
-          <a:xfrm>
-            <a:off x="914400" y="130175"/>
-            <a:ext cx="8229600" cy="346075"/>
-          </a:xfrm>
-        </p:spPr>
-        <p:txBody>
-          <a:bodyPr>
-            <a:normAutofit fontScale="90000"/>
-          </a:bodyPr>
-          <a:lstStyle/>
-          <a:p>
-            <a:pPr>
-              <a:defRPr/>
-            </a:pPr>
-            <a:r>
-              <a:rPr lang="zh-CN" altLang="en-US" sz="2000">
-                <a:solidFill>
-                  <a:srgbClr val="0000FF"/>
-                </a:solidFill>
-              </a:rPr>
-              <a:t>十一五规划教材                                          </a:t>
-            </a:r>
-            <a:r>
-              <a:rPr lang="en-US" altLang="zh-CN" sz="2000">
-                <a:solidFill>
-                  <a:srgbClr val="0000FF"/>
-                </a:solidFill>
-              </a:rPr>
-              <a:t>《</a:t>
-            </a:r>
-            <a:r>
-              <a:rPr lang="zh-CN" altLang="en-US" sz="2000">
-                <a:solidFill>
-                  <a:srgbClr val="0000FF"/>
-                </a:solidFill>
-              </a:rPr>
-              <a:t>信息系统项目管理</a:t>
-            </a:r>
-            <a:r>
-              <a:rPr lang="en-US" altLang="zh-CN" sz="2000">
-                <a:solidFill>
-                  <a:srgbClr val="0000FF"/>
-                </a:solidFill>
-              </a:rPr>
-              <a:t>》</a:t>
-            </a:r>
-            <a:r>
-              <a:rPr lang="zh-CN" altLang="en-US" sz="2000">
-                <a:solidFill>
-                  <a:srgbClr val="0000FF"/>
-                </a:solidFill>
-              </a:rPr>
-              <a:t>讲义</a:t>
-            </a:r>
-          </a:p>
-        </p:txBody>
-      </p:sp>
-      <p:sp>
-        <p:nvSpPr>
-          <p:cNvPr id="43012" name="Line 7">
-            <a:extLst>
-              <a:ext uri="{FF2B5EF4-FFF2-40B4-BE49-F238E27FC236}">
-                <a16:creationId xmlns:a16="http://schemas.microsoft.com/office/drawing/2014/main" id="{C12ED661-8DFF-4A26-8B75-FEC5A48133C6}"/>
-              </a:ext>
-            </a:extLst>
-          </p:cNvPr>
-          <p:cNvSpPr>
-            <a:spLocks noChangeShapeType="1"/>
-          </p:cNvSpPr>
-          <p:nvPr/>
-        </p:nvSpPr>
-        <p:spPr bwMode="auto">
-          <a:xfrm>
-            <a:off x="0" y="476250"/>
-            <a:ext cx="9144000" cy="0"/>
-          </a:xfrm>
-          <a:prstGeom prst="line">
-            <a:avLst/>
-          </a:prstGeom>
-          <a:noFill/>
-          <a:ln w="9525">
-            <a:solidFill>
-              <a:srgbClr val="9900CC"/>
-            </a:solidFill>
-            <a:round/>
-            <a:headEnd/>
-            <a:tailEnd/>
-          </a:ln>
-          <a:extLst>
-            <a:ext uri="{909E8E84-426E-40DD-AFC4-6F175D3DCCD1}">
-              <a14:hiddenFill xmlns:a14="http://schemas.microsoft.com/office/drawing/2010/main">
-                <a:noFill/>
-              </a14:hiddenFill>
-            </a:ext>
-          </a:extLst>
-        </p:spPr>
-        <p:txBody>
-          <a:bodyPr/>
-          <a:lstStyle/>
-          <a:p>
-            <a:endParaRPr lang="zh-CN" altLang="en-US"/>
-          </a:p>
-        </p:txBody>
-      </p:sp>
-    </p:spTree>
   </p:cSld>
   <p:clrMapOvr>
     <a:masterClrMapping/>
@@ -19468,6 +19165,708 @@
       </p:grpSpPr>
       <p:sp>
         <p:nvSpPr>
+          <p:cNvPr id="41986" name="Rectangle 5">
+            <a:extLst>
+              <a:ext uri="{FF2B5EF4-FFF2-40B4-BE49-F238E27FC236}">
+                <a16:creationId xmlns:a16="http://schemas.microsoft.com/office/drawing/2014/main" id="{085D95A7-8E74-4EE8-BB67-B83968BD90A1}"/>
+              </a:ext>
+            </a:extLst>
+          </p:cNvPr>
+          <p:cNvSpPr>
+            <a:spLocks noGrp="1" noChangeArrowheads="1"/>
+          </p:cNvSpPr>
+          <p:nvPr>
+            <p:ph type="body" idx="4294967295"/>
+          </p:nvPr>
+        </p:nvSpPr>
+        <p:spPr>
+          <a:xfrm>
+            <a:off x="0" y="642938"/>
+            <a:ext cx="9036496" cy="6026420"/>
+          </a:xfrm>
+        </p:spPr>
+        <p:txBody>
+          <a:bodyPr>
+            <a:noAutofit/>
+          </a:bodyPr>
+          <a:lstStyle/>
+          <a:p>
+            <a:pPr>
+              <a:lnSpc>
+                <a:spcPct val="90000"/>
+              </a:lnSpc>
+            </a:pPr>
+            <a:r>
+              <a:rPr lang="en-US" altLang="zh-CN" sz="4000" dirty="0"/>
+              <a:t>1.3.1 IT</a:t>
+            </a:r>
+            <a:r>
+              <a:rPr lang="zh-CN" altLang="en-US" sz="4000" dirty="0"/>
+              <a:t>治理的含义和框架</a:t>
+            </a:r>
+            <a:endParaRPr lang="en-US" altLang="zh-CN" sz="4000" dirty="0"/>
+          </a:p>
+          <a:p>
+            <a:pPr indent="0" algn="just">
+              <a:lnSpc>
+                <a:spcPct val="90000"/>
+              </a:lnSpc>
+              <a:buFontTx/>
+              <a:buNone/>
+            </a:pPr>
+            <a:r>
+              <a:rPr lang="zh-CN" altLang="en-US" sz="2600" dirty="0">
+                <a:solidFill>
+                  <a:srgbClr val="FF0000"/>
+                </a:solidFill>
+                <a:latin typeface="Times New Roman" panose="02020603050405020304" pitchFamily="18" charset="0"/>
+                <a:ea typeface="黑体" panose="02010609060101010101" pitchFamily="49" charset="-122"/>
+              </a:rPr>
+              <a:t>2.</a:t>
+            </a:r>
+            <a:r>
+              <a:rPr lang="en-US" altLang="zh-CN" sz="2600" dirty="0">
+                <a:solidFill>
+                  <a:srgbClr val="FF0000"/>
+                </a:solidFill>
+                <a:latin typeface="Times New Roman" panose="02020603050405020304" pitchFamily="18" charset="0"/>
+                <a:ea typeface="黑体" panose="02010609060101010101" pitchFamily="49" charset="-122"/>
+              </a:rPr>
+              <a:t>IT</a:t>
+            </a:r>
+            <a:r>
+              <a:rPr lang="zh-CN" altLang="en-US" sz="2600" dirty="0">
+                <a:solidFill>
+                  <a:srgbClr val="FF0000"/>
+                </a:solidFill>
+                <a:latin typeface="Times New Roman" panose="02020603050405020304" pitchFamily="18" charset="0"/>
+                <a:ea typeface="黑体" panose="02010609060101010101" pitchFamily="49" charset="-122"/>
+              </a:rPr>
+              <a:t>治理的框架：COBIT</a:t>
+            </a:r>
+            <a:endParaRPr lang="en-US" altLang="zh-CN" sz="2600" dirty="0">
+              <a:solidFill>
+                <a:srgbClr val="FF0000"/>
+              </a:solidFill>
+              <a:latin typeface="Times New Roman" panose="02020603050405020304" pitchFamily="18" charset="0"/>
+              <a:ea typeface="黑体" panose="02010609060101010101" pitchFamily="49" charset="-122"/>
+            </a:endParaRPr>
+          </a:p>
+          <a:p>
+            <a:pPr marL="0" lvl="1" indent="0" algn="just">
+              <a:lnSpc>
+                <a:spcPct val="150000"/>
+              </a:lnSpc>
+              <a:buFont typeface="Wingdings" panose="05000000000000000000" pitchFamily="2" charset="2"/>
+              <a:buChar char="Ø"/>
+            </a:pPr>
+            <a:r>
+              <a:rPr lang="en-US" altLang="zh-CN" sz="2600" dirty="0">
+                <a:latin typeface="Times New Roman" panose="02020603050405020304" pitchFamily="18" charset="0"/>
+                <a:ea typeface="黑体" panose="02010609060101010101" pitchFamily="49" charset="-122"/>
+              </a:rPr>
+              <a:t>ISACA</a:t>
+            </a:r>
+            <a:r>
+              <a:rPr lang="zh-CN" altLang="en-US" sz="2600" dirty="0">
+                <a:latin typeface="Times New Roman" panose="02020603050405020304" pitchFamily="18" charset="0"/>
+                <a:ea typeface="黑体" panose="02010609060101010101" pitchFamily="49" charset="-122"/>
+              </a:rPr>
+              <a:t>开发的</a:t>
+            </a:r>
+            <a:r>
+              <a:rPr lang="en-US" altLang="zh-CN" sz="2600" dirty="0">
+                <a:latin typeface="Times New Roman" panose="02020603050405020304" pitchFamily="18" charset="0"/>
+                <a:ea typeface="黑体" panose="02010609060101010101" pitchFamily="49" charset="-122"/>
+              </a:rPr>
+              <a:t>COBIT</a:t>
+            </a:r>
+            <a:r>
+              <a:rPr lang="zh-CN" altLang="en-US" sz="2600" dirty="0">
+                <a:latin typeface="Times New Roman" panose="02020603050405020304" pitchFamily="18" charset="0"/>
+                <a:ea typeface="黑体" panose="02010609060101010101" pitchFamily="49" charset="-122"/>
+              </a:rPr>
+              <a:t>（</a:t>
+            </a:r>
+            <a:r>
+              <a:rPr lang="en-US" altLang="zh-CN" sz="2600" dirty="0">
+                <a:latin typeface="Times New Roman" panose="02020603050405020304" pitchFamily="18" charset="0"/>
+                <a:ea typeface="黑体" panose="02010609060101010101" pitchFamily="49" charset="-122"/>
+              </a:rPr>
+              <a:t>Control Objectives for Information and related Technology</a:t>
+            </a:r>
+            <a:r>
+              <a:rPr lang="zh-CN" altLang="en-US" sz="2600" dirty="0">
+                <a:latin typeface="Times New Roman" panose="02020603050405020304" pitchFamily="18" charset="0"/>
+                <a:ea typeface="黑体" panose="02010609060101010101" pitchFamily="49" charset="-122"/>
+              </a:rPr>
+              <a:t>），即信息及相关技术的控制目标，是</a:t>
+            </a:r>
+            <a:r>
+              <a:rPr lang="en-US" altLang="zh-CN" sz="2600" dirty="0">
+                <a:latin typeface="Times New Roman" panose="02020603050405020304" pitchFamily="18" charset="0"/>
+                <a:ea typeface="黑体" panose="02010609060101010101" pitchFamily="49" charset="-122"/>
+              </a:rPr>
+              <a:t>IT</a:t>
+            </a:r>
+            <a:r>
+              <a:rPr lang="zh-CN" altLang="en-US" sz="2600" dirty="0">
+                <a:latin typeface="Times New Roman" panose="02020603050405020304" pitchFamily="18" charset="0"/>
+                <a:ea typeface="黑体" panose="02010609060101010101" pitchFamily="49" charset="-122"/>
+              </a:rPr>
+              <a:t>治理的一个开放性标准</a:t>
+            </a:r>
+            <a:endParaRPr lang="en-US" altLang="zh-CN" sz="2600" dirty="0">
+              <a:latin typeface="Times New Roman" panose="02020603050405020304" pitchFamily="18" charset="0"/>
+              <a:ea typeface="黑体" panose="02010609060101010101" pitchFamily="49" charset="-122"/>
+            </a:endParaRPr>
+          </a:p>
+          <a:p>
+            <a:pPr marL="0" lvl="1" indent="0" algn="just">
+              <a:lnSpc>
+                <a:spcPct val="150000"/>
+              </a:lnSpc>
+              <a:buFont typeface="Wingdings" panose="05000000000000000000" pitchFamily="2" charset="2"/>
+              <a:buChar char="Ø"/>
+            </a:pPr>
+            <a:r>
+              <a:rPr lang="en-US" altLang="zh-CN" sz="2600" dirty="0">
+                <a:latin typeface="Times New Roman" panose="02020603050405020304" pitchFamily="18" charset="0"/>
+                <a:ea typeface="黑体" panose="02010609060101010101" pitchFamily="49" charset="-122"/>
+              </a:rPr>
+              <a:t>COBIT</a:t>
+            </a:r>
+            <a:r>
+              <a:rPr lang="zh-CN" altLang="en-US" sz="2600" dirty="0">
+                <a:latin typeface="Times New Roman" panose="02020603050405020304" pitchFamily="18" charset="0"/>
+                <a:ea typeface="黑体" panose="02010609060101010101" pitchFamily="49" charset="-122"/>
+              </a:rPr>
+              <a:t>的目标是为组织的管理层和业务流程负责人提供一个</a:t>
+            </a:r>
+            <a:r>
+              <a:rPr lang="en-US" altLang="zh-CN" sz="2600" dirty="0">
+                <a:latin typeface="Times New Roman" panose="02020603050405020304" pitchFamily="18" charset="0"/>
+                <a:ea typeface="黑体" panose="02010609060101010101" pitchFamily="49" charset="-122"/>
+              </a:rPr>
+              <a:t>IT</a:t>
+            </a:r>
+            <a:r>
+              <a:rPr lang="zh-CN" altLang="en-US" sz="2600" dirty="0">
+                <a:latin typeface="Times New Roman" panose="02020603050405020304" pitchFamily="18" charset="0"/>
+                <a:ea typeface="黑体" panose="02010609060101010101" pitchFamily="49" charset="-122"/>
+              </a:rPr>
+              <a:t>治理模型，以帮助他们深入理解和管理</a:t>
+            </a:r>
+            <a:r>
+              <a:rPr lang="en-US" altLang="zh-CN" sz="2600" dirty="0">
+                <a:latin typeface="Times New Roman" panose="02020603050405020304" pitchFamily="18" charset="0"/>
+                <a:ea typeface="黑体" panose="02010609060101010101" pitchFamily="49" charset="-122"/>
+              </a:rPr>
+              <a:t>IT</a:t>
+            </a:r>
+            <a:r>
+              <a:rPr lang="zh-CN" altLang="en-US" sz="2600" dirty="0">
+                <a:latin typeface="Times New Roman" panose="02020603050405020304" pitchFamily="18" charset="0"/>
+                <a:ea typeface="黑体" panose="02010609060101010101" pitchFamily="49" charset="-122"/>
+              </a:rPr>
+              <a:t>相关风险。</a:t>
+            </a:r>
+            <a:endParaRPr lang="en-US" altLang="zh-CN" sz="2600" dirty="0">
+              <a:latin typeface="Times New Roman" panose="02020603050405020304" pitchFamily="18" charset="0"/>
+              <a:ea typeface="黑体" panose="02010609060101010101" pitchFamily="49" charset="-122"/>
+            </a:endParaRPr>
+          </a:p>
+          <a:p>
+            <a:pPr marL="0" lvl="1" indent="0" algn="just">
+              <a:lnSpc>
+                <a:spcPct val="150000"/>
+              </a:lnSpc>
+              <a:buFont typeface="Wingdings" panose="05000000000000000000" pitchFamily="2" charset="2"/>
+              <a:buChar char="Ø"/>
+            </a:pPr>
+            <a:r>
+              <a:rPr lang="en-US" altLang="zh-CN" sz="2600" dirty="0">
+                <a:latin typeface="Times New Roman" panose="02020603050405020304" pitchFamily="18" charset="0"/>
+                <a:ea typeface="黑体" panose="02010609060101010101" pitchFamily="49" charset="-122"/>
+              </a:rPr>
+              <a:t>COBIT</a:t>
+            </a:r>
+            <a:r>
+              <a:rPr lang="zh-CN" altLang="en-US" sz="2600" dirty="0">
+                <a:latin typeface="Times New Roman" panose="02020603050405020304" pitchFamily="18" charset="0"/>
+                <a:ea typeface="黑体" panose="02010609060101010101" pitchFamily="49" charset="-122"/>
+              </a:rPr>
+              <a:t>的思想基础是</a:t>
+            </a:r>
+            <a:r>
+              <a:rPr lang="en-US" altLang="zh-CN" sz="2600" dirty="0">
+                <a:latin typeface="Times New Roman" panose="02020603050405020304" pitchFamily="18" charset="0"/>
+                <a:ea typeface="黑体" panose="02010609060101010101" pitchFamily="49" charset="-122"/>
+              </a:rPr>
+              <a:t>IT</a:t>
+            </a:r>
+            <a:r>
+              <a:rPr lang="zh-CN" altLang="en-US" sz="2600" dirty="0">
+                <a:latin typeface="Times New Roman" panose="02020603050405020304" pitchFamily="18" charset="0"/>
+                <a:ea typeface="黑体" panose="02010609060101010101" pitchFamily="49" charset="-122"/>
+              </a:rPr>
+              <a:t>资源管理需要一系列的流程，以确保组织能够得到为达到其目标所需的可靠信息，并通过平衡</a:t>
+            </a:r>
+            <a:r>
+              <a:rPr lang="en-US" altLang="zh-CN" sz="2600" dirty="0">
+                <a:latin typeface="Times New Roman" panose="02020603050405020304" pitchFamily="18" charset="0"/>
+                <a:ea typeface="黑体" panose="02010609060101010101" pitchFamily="49" charset="-122"/>
+              </a:rPr>
+              <a:t>IT</a:t>
+            </a:r>
+            <a:r>
+              <a:rPr lang="zh-CN" altLang="en-US" sz="2600" dirty="0">
+                <a:latin typeface="Times New Roman" panose="02020603050405020304" pitchFamily="18" charset="0"/>
+                <a:ea typeface="黑体" panose="02010609060101010101" pitchFamily="49" charset="-122"/>
+              </a:rPr>
+              <a:t>及其过程的风险与回报提高价值，实现组织的战略目标</a:t>
+            </a:r>
+            <a:r>
+              <a:rPr lang="en-US" altLang="zh-CN" sz="2600" dirty="0">
+                <a:latin typeface="Times New Roman" panose="02020603050405020304" pitchFamily="18" charset="0"/>
+                <a:ea typeface="黑体" panose="02010609060101010101" pitchFamily="49" charset="-122"/>
+              </a:rPr>
+              <a:t>.</a:t>
+            </a:r>
+          </a:p>
+        </p:txBody>
+      </p:sp>
+      <p:sp>
+        <p:nvSpPr>
+          <p:cNvPr id="34819" name="Rectangle 6">
+            <a:extLst>
+              <a:ext uri="{FF2B5EF4-FFF2-40B4-BE49-F238E27FC236}">
+                <a16:creationId xmlns:a16="http://schemas.microsoft.com/office/drawing/2014/main" id="{559C840E-881B-4F7F-A419-F04A639E2CB9}"/>
+              </a:ext>
+            </a:extLst>
+          </p:cNvPr>
+          <p:cNvSpPr>
+            <a:spLocks noGrp="1" noChangeArrowheads="1"/>
+          </p:cNvSpPr>
+          <p:nvPr>
+            <p:ph type="title" idx="4294967295"/>
+          </p:nvPr>
+        </p:nvSpPr>
+        <p:spPr>
+          <a:xfrm>
+            <a:off x="914400" y="130175"/>
+            <a:ext cx="8229600" cy="346075"/>
+          </a:xfrm>
+        </p:spPr>
+        <p:txBody>
+          <a:bodyPr>
+            <a:normAutofit fontScale="90000"/>
+          </a:bodyPr>
+          <a:lstStyle/>
+          <a:p>
+            <a:pPr>
+              <a:defRPr/>
+            </a:pPr>
+            <a:r>
+              <a:rPr lang="zh-CN" altLang="en-US" sz="2000">
+                <a:solidFill>
+                  <a:srgbClr val="0000FF"/>
+                </a:solidFill>
+              </a:rPr>
+              <a:t>十一五规划教材                                          </a:t>
+            </a:r>
+            <a:r>
+              <a:rPr lang="en-US" altLang="zh-CN" sz="2000">
+                <a:solidFill>
+                  <a:srgbClr val="0000FF"/>
+                </a:solidFill>
+              </a:rPr>
+              <a:t>《</a:t>
+            </a:r>
+            <a:r>
+              <a:rPr lang="zh-CN" altLang="en-US" sz="2000">
+                <a:solidFill>
+                  <a:srgbClr val="0000FF"/>
+                </a:solidFill>
+              </a:rPr>
+              <a:t>信息系统项目管理</a:t>
+            </a:r>
+            <a:r>
+              <a:rPr lang="en-US" altLang="zh-CN" sz="2000">
+                <a:solidFill>
+                  <a:srgbClr val="0000FF"/>
+                </a:solidFill>
+              </a:rPr>
+              <a:t>》</a:t>
+            </a:r>
+            <a:r>
+              <a:rPr lang="zh-CN" altLang="en-US" sz="2000">
+                <a:solidFill>
+                  <a:srgbClr val="0000FF"/>
+                </a:solidFill>
+              </a:rPr>
+              <a:t>讲义</a:t>
+            </a:r>
+          </a:p>
+        </p:txBody>
+      </p:sp>
+      <p:sp>
+        <p:nvSpPr>
+          <p:cNvPr id="41988" name="Line 7">
+            <a:extLst>
+              <a:ext uri="{FF2B5EF4-FFF2-40B4-BE49-F238E27FC236}">
+                <a16:creationId xmlns:a16="http://schemas.microsoft.com/office/drawing/2014/main" id="{C776352F-2163-4947-8C41-A4F235A4C755}"/>
+              </a:ext>
+            </a:extLst>
+          </p:cNvPr>
+          <p:cNvSpPr>
+            <a:spLocks noChangeShapeType="1"/>
+          </p:cNvSpPr>
+          <p:nvPr/>
+        </p:nvSpPr>
+        <p:spPr bwMode="auto">
+          <a:xfrm>
+            <a:off x="0" y="476250"/>
+            <a:ext cx="9144000" cy="0"/>
+          </a:xfrm>
+          <a:prstGeom prst="line">
+            <a:avLst/>
+          </a:prstGeom>
+          <a:noFill/>
+          <a:ln w="9525">
+            <a:solidFill>
+              <a:srgbClr val="9900CC"/>
+            </a:solidFill>
+            <a:round/>
+            <a:headEnd/>
+            <a:tailEnd/>
+          </a:ln>
+          <a:extLst>
+            <a:ext uri="{909E8E84-426E-40DD-AFC4-6F175D3DCCD1}">
+              <a14:hiddenFill xmlns:a14="http://schemas.microsoft.com/office/drawing/2010/main">
+                <a:noFill/>
+              </a14:hiddenFill>
+            </a:ext>
+          </a:extLst>
+        </p:spPr>
+        <p:txBody>
+          <a:bodyPr/>
+          <a:lstStyle/>
+          <a:p>
+            <a:endParaRPr lang="zh-CN" altLang="en-US"/>
+          </a:p>
+        </p:txBody>
+      </p:sp>
+    </p:spTree>
+  </p:cSld>
+  <p:clrMapOvr>
+    <a:masterClrMapping/>
+  </p:clrMapOvr>
+</p:sld>
+</file>
+
+<file path=ppt/slides/slide41.xml><?xml version="1.0" encoding="utf-8"?>
+<p:sld xmlns:a="http://schemas.openxmlformats.org/drawingml/2006/main" xmlns:r="http://schemas.openxmlformats.org/officeDocument/2006/relationships" xmlns:p="http://schemas.openxmlformats.org/presentationml/2006/main">
+  <p:cSld>
+    <p:spTree>
+      <p:nvGrpSpPr>
+        <p:cNvPr id="1" name=""/>
+        <p:cNvGrpSpPr/>
+        <p:nvPr/>
+      </p:nvGrpSpPr>
+      <p:grpSpPr>
+        <a:xfrm>
+          <a:off x="0" y="0"/>
+          <a:ext cx="0" cy="0"/>
+          <a:chOff x="0" y="0"/>
+          <a:chExt cx="0" cy="0"/>
+        </a:xfrm>
+      </p:grpSpPr>
+      <p:sp>
+        <p:nvSpPr>
+          <p:cNvPr id="35842" name="Rectangle 5">
+            <a:extLst>
+              <a:ext uri="{FF2B5EF4-FFF2-40B4-BE49-F238E27FC236}">
+                <a16:creationId xmlns:a16="http://schemas.microsoft.com/office/drawing/2014/main" id="{B39E898A-80D9-4810-BD4B-AC76BBA51F13}"/>
+              </a:ext>
+            </a:extLst>
+          </p:cNvPr>
+          <p:cNvSpPr>
+            <a:spLocks noGrp="1" noChangeArrowheads="1"/>
+          </p:cNvSpPr>
+          <p:nvPr>
+            <p:ph type="body" idx="4294967295"/>
+          </p:nvPr>
+        </p:nvSpPr>
+        <p:spPr>
+          <a:xfrm>
+            <a:off x="179512" y="742949"/>
+            <a:ext cx="8712968" cy="3478137"/>
+          </a:xfrm>
+        </p:spPr>
+        <p:txBody>
+          <a:bodyPr>
+            <a:noAutofit/>
+          </a:bodyPr>
+          <a:lstStyle/>
+          <a:p>
+            <a:pPr>
+              <a:defRPr/>
+            </a:pPr>
+            <a:r>
+              <a:rPr lang="en-US" altLang="zh-CN" sz="4000" dirty="0"/>
+              <a:t>1.3.1 IT</a:t>
+            </a:r>
+            <a:r>
+              <a:rPr lang="zh-CN" altLang="en-US" sz="4000" dirty="0"/>
+              <a:t>治理的含义和框架</a:t>
+            </a:r>
+            <a:endParaRPr lang="en-US" altLang="zh-CN" sz="4000" dirty="0"/>
+          </a:p>
+          <a:p>
+            <a:pPr marL="0" lvl="1" indent="0" algn="just">
+              <a:lnSpc>
+                <a:spcPct val="150000"/>
+              </a:lnSpc>
+              <a:spcBef>
+                <a:spcPts val="0"/>
+              </a:spcBef>
+              <a:buFont typeface="Wingdings" panose="05000000000000000000" pitchFamily="2" charset="2"/>
+              <a:buChar char="Ø"/>
+              <a:defRPr/>
+            </a:pPr>
+            <a:r>
+              <a:rPr lang="en-US" altLang="zh-CN" dirty="0"/>
+              <a:t>COBIT</a:t>
+            </a:r>
+            <a:r>
+              <a:rPr lang="zh-CN" altLang="en-US" dirty="0"/>
+              <a:t>控制目标体系从一个简单而实际的假设开始：为了提供组织达到其目标而需要的信息，</a:t>
+            </a:r>
+            <a:r>
+              <a:rPr lang="en-US" altLang="zh-CN" dirty="0"/>
+              <a:t> IT</a:t>
+            </a:r>
+            <a:r>
+              <a:rPr lang="zh-CN" altLang="en-US" dirty="0"/>
+              <a:t>资源（</a:t>
+            </a:r>
+            <a:r>
+              <a:rPr lang="en-US" altLang="zh-CN" dirty="0"/>
+              <a:t>IT Resources</a:t>
+            </a:r>
+            <a:r>
+              <a:rPr lang="zh-CN" altLang="en-US" dirty="0"/>
+              <a:t>）需要由一组自然分类的</a:t>
+            </a:r>
+            <a:r>
+              <a:rPr lang="en-US" altLang="zh-CN" dirty="0"/>
+              <a:t>IT</a:t>
+            </a:r>
+            <a:r>
+              <a:rPr lang="zh-CN" altLang="en-US" dirty="0"/>
+              <a:t>过程（</a:t>
+            </a:r>
+            <a:r>
+              <a:rPr lang="en-US" altLang="zh-CN" dirty="0"/>
+              <a:t>IT Processes</a:t>
+            </a:r>
+            <a:r>
+              <a:rPr lang="zh-CN" altLang="en-US" dirty="0"/>
+              <a:t>）管理。</a:t>
+            </a:r>
+            <a:r>
+              <a:rPr lang="en-US" altLang="zh-CN" dirty="0"/>
+              <a:t>COBIT</a:t>
+            </a:r>
+            <a:r>
+              <a:rPr lang="zh-CN" altLang="en-US" dirty="0"/>
+              <a:t>三维体系模型中的三维分别是：</a:t>
+            </a:r>
+            <a:r>
+              <a:rPr lang="en-US" altLang="zh-CN" dirty="0"/>
+              <a:t>IT</a:t>
+            </a:r>
+            <a:r>
+              <a:rPr lang="zh-CN" altLang="en-US" dirty="0"/>
+              <a:t>资源维，</a:t>
+            </a:r>
+            <a:r>
+              <a:rPr lang="en-US" altLang="zh-CN" dirty="0"/>
+              <a:t>IT</a:t>
+            </a:r>
+            <a:r>
+              <a:rPr lang="zh-CN" altLang="en-US" dirty="0"/>
+              <a:t>准则维和</a:t>
+            </a:r>
+            <a:r>
+              <a:rPr lang="en-US" altLang="zh-CN" dirty="0"/>
+              <a:t>IT</a:t>
+            </a:r>
+            <a:r>
+              <a:rPr lang="zh-CN" altLang="en-US" dirty="0"/>
+              <a:t>过程维，</a:t>
+            </a:r>
+            <a:r>
+              <a:rPr lang="en-US" altLang="zh-CN" dirty="0"/>
+              <a:t>COBIT</a:t>
+            </a:r>
+            <a:r>
+              <a:rPr lang="zh-CN" altLang="en-US" dirty="0"/>
+              <a:t>三维体系模型如下图所示</a:t>
+            </a:r>
+            <a:endParaRPr lang="en-US" altLang="zh-CN" dirty="0"/>
+          </a:p>
+        </p:txBody>
+      </p:sp>
+      <p:sp>
+        <p:nvSpPr>
+          <p:cNvPr id="35843" name="Rectangle 6">
+            <a:extLst>
+              <a:ext uri="{FF2B5EF4-FFF2-40B4-BE49-F238E27FC236}">
+                <a16:creationId xmlns:a16="http://schemas.microsoft.com/office/drawing/2014/main" id="{A6EAE0AD-FF69-4E89-B94C-A8B660F887C8}"/>
+              </a:ext>
+            </a:extLst>
+          </p:cNvPr>
+          <p:cNvSpPr>
+            <a:spLocks noGrp="1" noChangeArrowheads="1"/>
+          </p:cNvSpPr>
+          <p:nvPr>
+            <p:ph type="title" idx="4294967295"/>
+          </p:nvPr>
+        </p:nvSpPr>
+        <p:spPr>
+          <a:xfrm>
+            <a:off x="914400" y="130175"/>
+            <a:ext cx="8229600" cy="346075"/>
+          </a:xfrm>
+        </p:spPr>
+        <p:txBody>
+          <a:bodyPr>
+            <a:normAutofit fontScale="90000"/>
+          </a:bodyPr>
+          <a:lstStyle/>
+          <a:p>
+            <a:pPr>
+              <a:defRPr/>
+            </a:pPr>
+            <a:r>
+              <a:rPr lang="zh-CN" altLang="en-US" sz="2000">
+                <a:solidFill>
+                  <a:srgbClr val="0000FF"/>
+                </a:solidFill>
+              </a:rPr>
+              <a:t>十一五规划教材                                          </a:t>
+            </a:r>
+            <a:r>
+              <a:rPr lang="en-US" altLang="zh-CN" sz="2000">
+                <a:solidFill>
+                  <a:srgbClr val="0000FF"/>
+                </a:solidFill>
+              </a:rPr>
+              <a:t>《</a:t>
+            </a:r>
+            <a:r>
+              <a:rPr lang="zh-CN" altLang="en-US" sz="2000">
+                <a:solidFill>
+                  <a:srgbClr val="0000FF"/>
+                </a:solidFill>
+              </a:rPr>
+              <a:t>信息系统项目管理</a:t>
+            </a:r>
+            <a:r>
+              <a:rPr lang="en-US" altLang="zh-CN" sz="2000">
+                <a:solidFill>
+                  <a:srgbClr val="0000FF"/>
+                </a:solidFill>
+              </a:rPr>
+              <a:t>》</a:t>
+            </a:r>
+            <a:r>
+              <a:rPr lang="zh-CN" altLang="en-US" sz="2000">
+                <a:solidFill>
+                  <a:srgbClr val="0000FF"/>
+                </a:solidFill>
+              </a:rPr>
+              <a:t>讲义</a:t>
+            </a:r>
+          </a:p>
+        </p:txBody>
+      </p:sp>
+      <p:sp>
+        <p:nvSpPr>
+          <p:cNvPr id="43012" name="Line 7">
+            <a:extLst>
+              <a:ext uri="{FF2B5EF4-FFF2-40B4-BE49-F238E27FC236}">
+                <a16:creationId xmlns:a16="http://schemas.microsoft.com/office/drawing/2014/main" id="{C12ED661-8DFF-4A26-8B75-FEC5A48133C6}"/>
+              </a:ext>
+            </a:extLst>
+          </p:cNvPr>
+          <p:cNvSpPr>
+            <a:spLocks noChangeShapeType="1"/>
+          </p:cNvSpPr>
+          <p:nvPr/>
+        </p:nvSpPr>
+        <p:spPr bwMode="auto">
+          <a:xfrm>
+            <a:off x="0" y="476250"/>
+            <a:ext cx="9144000" cy="0"/>
+          </a:xfrm>
+          <a:prstGeom prst="line">
+            <a:avLst/>
+          </a:prstGeom>
+          <a:noFill/>
+          <a:ln w="9525">
+            <a:solidFill>
+              <a:srgbClr val="9900CC"/>
+            </a:solidFill>
+            <a:round/>
+            <a:headEnd/>
+            <a:tailEnd/>
+          </a:ln>
+          <a:extLst>
+            <a:ext uri="{909E8E84-426E-40DD-AFC4-6F175D3DCCD1}">
+              <a14:hiddenFill xmlns:a14="http://schemas.microsoft.com/office/drawing/2010/main">
+                <a:noFill/>
+              </a14:hiddenFill>
+            </a:ext>
+          </a:extLst>
+        </p:spPr>
+        <p:txBody>
+          <a:bodyPr/>
+          <a:lstStyle/>
+          <a:p>
+            <a:endParaRPr lang="zh-CN" altLang="en-US"/>
+          </a:p>
+        </p:txBody>
+      </p:sp>
+    </p:spTree>
+  </p:cSld>
+  <p:clrMapOvr>
+    <a:masterClrMapping/>
+  </p:clrMapOvr>
+</p:sld>
+</file>
+
+<file path=ppt/slides/slide42.xml><?xml version="1.0" encoding="utf-8"?>
+<p:sld xmlns:a="http://schemas.openxmlformats.org/drawingml/2006/main" xmlns:r="http://schemas.openxmlformats.org/officeDocument/2006/relationships" xmlns:p="http://schemas.openxmlformats.org/presentationml/2006/main">
+  <p:cSld>
+    <p:spTree>
+      <p:nvGrpSpPr>
+        <p:cNvPr id="1" name=""/>
+        <p:cNvGrpSpPr/>
+        <p:nvPr/>
+      </p:nvGrpSpPr>
+      <p:grpSpPr>
+        <a:xfrm>
+          <a:off x="0" y="0"/>
+          <a:ext cx="0" cy="0"/>
+          <a:chOff x="0" y="0"/>
+          <a:chExt cx="0" cy="0"/>
+        </a:xfrm>
+      </p:grpSpPr>
+      <p:sp>
+        <p:nvSpPr>
           <p:cNvPr id="36866" name="Rectangle 6">
             <a:extLst>
               <a:ext uri="{FF2B5EF4-FFF2-40B4-BE49-F238E27FC236}">
@@ -19655,7 +20054,7 @@
 </p:sld>
 </file>
 
-<file path=ppt/slides/slide41.xml><?xml version="1.0" encoding="utf-8"?>
+<file path=ppt/slides/slide43.xml><?xml version="1.0" encoding="utf-8"?>
 <p:sld xmlns:a="http://schemas.openxmlformats.org/drawingml/2006/main" xmlns:r="http://schemas.openxmlformats.org/officeDocument/2006/relationships" xmlns:p="http://schemas.openxmlformats.org/presentationml/2006/main">
   <p:cSld>
     <p:spTree>
@@ -19902,7 +20301,7 @@
 </p:sld>
 </file>
 
-<file path=ppt/slides/slide42.xml><?xml version="1.0" encoding="utf-8"?>
+<file path=ppt/slides/slide44.xml><?xml version="1.0" encoding="utf-8"?>
 <p:sld xmlns:a="http://schemas.openxmlformats.org/drawingml/2006/main" xmlns:r="http://schemas.openxmlformats.org/officeDocument/2006/relationships" xmlns:p="http://schemas.openxmlformats.org/presentationml/2006/main">
   <p:cSld>
     <p:spTree>
@@ -20120,7 +20519,7 @@
 </p:sld>
 </file>
 
-<file path=ppt/slides/slide43.xml><?xml version="1.0" encoding="utf-8"?>
+<file path=ppt/slides/slide45.xml><?xml version="1.0" encoding="utf-8"?>
 <p:sld xmlns:a="http://schemas.openxmlformats.org/drawingml/2006/main" xmlns:r="http://schemas.openxmlformats.org/officeDocument/2006/relationships" xmlns:p="http://schemas.openxmlformats.org/presentationml/2006/main">
   <p:cSld>
     <p:spTree>
@@ -20194,7 +20593,19 @@
             </a:pPr>
             <a:r>
               <a:rPr lang="zh-CN" altLang="en-US" sz="2400" dirty="0"/>
-              <a:t>信息化战略的构成要素包括信息化的目的、方针和计划。它关注组织的信息需求和供应，以及管理者态度。信息战略与组织的整体战略密切相关，它属于职能管理战略之一，同时推动其他职能管理战略的执行</a:t>
+              <a:t>信息化战略的构成要素包括信息化的</a:t>
+            </a:r>
+            <a:r>
+              <a:rPr lang="zh-CN" altLang="en-US" sz="2400" dirty="0">
+                <a:solidFill>
+                  <a:srgbClr val="FF0000"/>
+                </a:solidFill>
+              </a:rPr>
+              <a:t>目的、方针和计划</a:t>
+            </a:r>
+            <a:r>
+              <a:rPr lang="zh-CN" altLang="en-US" sz="2400" dirty="0"/>
+              <a:t>。它关注组织的信息需求和供应，以及管理者态度。信息战略与组织的整体战略密切相关，它属于职能管理战略之一，同时推动其他职能管理战略的执行</a:t>
             </a:r>
             <a:endParaRPr lang="en-US" altLang="zh-CN" sz="2400" dirty="0"/>
           </a:p>
@@ -20348,7 +20759,7 @@
 </p:sld>
 </file>
 
-<file path=ppt/slides/slide44.xml><?xml version="1.0" encoding="utf-8"?>
+<file path=ppt/slides/slide46.xml><?xml version="1.0" encoding="utf-8"?>
 <p:sld xmlns:a="http://schemas.openxmlformats.org/drawingml/2006/main" xmlns:r="http://schemas.openxmlformats.org/officeDocument/2006/relationships" xmlns:p="http://schemas.openxmlformats.org/presentationml/2006/main">
   <p:cSld>
     <p:spTree>
@@ -20629,7 +21040,7 @@
 </p:sld>
 </file>
 
-<file path=ppt/slides/slide45.xml><?xml version="1.0" encoding="utf-8"?>
+<file path=ppt/slides/slide47.xml><?xml version="1.0" encoding="utf-8"?>
 <p:sld xmlns:a="http://schemas.openxmlformats.org/drawingml/2006/main" xmlns:r="http://schemas.openxmlformats.org/officeDocument/2006/relationships" xmlns:p="http://schemas.openxmlformats.org/presentationml/2006/main">
   <p:cSld>
     <p:spTree>
@@ -20883,7 +21294,7 @@
 </p:sld>
 </file>
 
-<file path=ppt/slides/slide46.xml><?xml version="1.0" encoding="utf-8"?>
+<file path=ppt/slides/slide48.xml><?xml version="1.0" encoding="utf-8"?>
 <p:sld xmlns:a="http://schemas.openxmlformats.org/drawingml/2006/main" xmlns:r="http://schemas.openxmlformats.org/officeDocument/2006/relationships" xmlns:p="http://schemas.openxmlformats.org/presentationml/2006/main">
   <p:cSld>
     <p:spTree>
@@ -21173,7 +21584,7 @@
 </p:sld>
 </file>
 
-<file path=ppt/slides/slide47.xml><?xml version="1.0" encoding="utf-8"?>
+<file path=ppt/slides/slide49.xml><?xml version="1.0" encoding="utf-8"?>
 <p:sld xmlns:a="http://schemas.openxmlformats.org/drawingml/2006/main" xmlns:r="http://schemas.openxmlformats.org/officeDocument/2006/relationships" xmlns:p="http://schemas.openxmlformats.org/presentationml/2006/main">
   <p:cSld>
     <p:spTree>
@@ -21307,595 +21718,6 @@
             <a:extLst>
               <a:ext uri="{FF2B5EF4-FFF2-40B4-BE49-F238E27FC236}">
                 <a16:creationId xmlns:a16="http://schemas.microsoft.com/office/drawing/2014/main" id="{7EE59672-50E3-40D2-A562-2CD7432BDC81}"/>
-              </a:ext>
-            </a:extLst>
-          </p:cNvPr>
-          <p:cNvSpPr>
-            <a:spLocks noChangeShapeType="1"/>
-          </p:cNvSpPr>
-          <p:nvPr/>
-        </p:nvSpPr>
-        <p:spPr bwMode="auto">
-          <a:xfrm>
-            <a:off x="0" y="476250"/>
-            <a:ext cx="9144000" cy="0"/>
-          </a:xfrm>
-          <a:prstGeom prst="line">
-            <a:avLst/>
-          </a:prstGeom>
-          <a:noFill/>
-          <a:ln w="9525">
-            <a:solidFill>
-              <a:srgbClr val="9900CC"/>
-            </a:solidFill>
-            <a:round/>
-            <a:headEnd/>
-            <a:tailEnd/>
-          </a:ln>
-          <a:extLst>
-            <a:ext uri="{909E8E84-426E-40DD-AFC4-6F175D3DCCD1}">
-              <a14:hiddenFill xmlns:a14="http://schemas.microsoft.com/office/drawing/2010/main">
-                <a:noFill/>
-              </a14:hiddenFill>
-            </a:ext>
-          </a:extLst>
-        </p:spPr>
-        <p:txBody>
-          <a:bodyPr/>
-          <a:lstStyle/>
-          <a:p>
-            <a:endParaRPr lang="zh-CN" altLang="en-US"/>
-          </a:p>
-        </p:txBody>
-      </p:sp>
-    </p:spTree>
-  </p:cSld>
-  <p:clrMapOvr>
-    <a:masterClrMapping/>
-  </p:clrMapOvr>
-</p:sld>
-</file>
-
-<file path=ppt/slides/slide48.xml><?xml version="1.0" encoding="utf-8"?>
-<p:sld xmlns:a="http://schemas.openxmlformats.org/drawingml/2006/main" xmlns:r="http://schemas.openxmlformats.org/officeDocument/2006/relationships" xmlns:p="http://schemas.openxmlformats.org/presentationml/2006/main">
-  <p:cSld>
-    <p:spTree>
-      <p:nvGrpSpPr>
-        <p:cNvPr id="1" name=""/>
-        <p:cNvGrpSpPr/>
-        <p:nvPr/>
-      </p:nvGrpSpPr>
-      <p:grpSpPr>
-        <a:xfrm>
-          <a:off x="0" y="0"/>
-          <a:ext cx="0" cy="0"/>
-          <a:chOff x="0" y="0"/>
-          <a:chExt cx="0" cy="0"/>
-        </a:xfrm>
-      </p:grpSpPr>
-      <p:sp>
-        <p:nvSpPr>
-          <p:cNvPr id="45058" name="Rectangle 5">
-            <a:extLst>
-              <a:ext uri="{FF2B5EF4-FFF2-40B4-BE49-F238E27FC236}">
-                <a16:creationId xmlns:a16="http://schemas.microsoft.com/office/drawing/2014/main" id="{57482D9E-21EF-4BD1-808E-39EBB588C509}"/>
-              </a:ext>
-            </a:extLst>
-          </p:cNvPr>
-          <p:cNvSpPr>
-            <a:spLocks noGrp="1" noChangeArrowheads="1"/>
-          </p:cNvSpPr>
-          <p:nvPr>
-            <p:ph type="body" idx="4294967295"/>
-          </p:nvPr>
-        </p:nvSpPr>
-        <p:spPr>
-          <a:xfrm>
-            <a:off x="0" y="617538"/>
-            <a:ext cx="8229600" cy="4525962"/>
-          </a:xfrm>
-        </p:spPr>
-        <p:txBody>
-          <a:bodyPr>
-            <a:normAutofit lnSpcReduction="10000"/>
-          </a:bodyPr>
-          <a:lstStyle/>
-          <a:p>
-            <a:pPr>
-              <a:defRPr/>
-            </a:pPr>
-            <a:r>
-              <a:rPr lang="en-US" altLang="zh-CN" sz="4000" dirty="0"/>
-              <a:t>1.4.1 </a:t>
-            </a:r>
-            <a:r>
-              <a:rPr lang="zh-CN" altLang="en-US" sz="4000" dirty="0"/>
-              <a:t>信息化项目规划的步骤</a:t>
-            </a:r>
-          </a:p>
-          <a:p>
-            <a:pPr marL="971550" lvl="1" indent="-514350">
-              <a:buFontTx/>
-              <a:buAutoNum type="arabicPeriod"/>
-              <a:defRPr/>
-            </a:pPr>
-            <a:endParaRPr lang="en-US" altLang="zh-CN" dirty="0"/>
-          </a:p>
-          <a:p>
-            <a:pPr marL="971550" lvl="1" indent="-514350">
-              <a:buFontTx/>
-              <a:buAutoNum type="arabicPeriod"/>
-              <a:defRPr/>
-            </a:pPr>
-            <a:r>
-              <a:rPr lang="zh-CN" altLang="en-US" dirty="0"/>
-              <a:t>了解组织当前信息系统以及管理状况</a:t>
-            </a:r>
-            <a:endParaRPr lang="en-US" altLang="zh-CN" dirty="0"/>
-          </a:p>
-          <a:p>
-            <a:pPr marL="971550" lvl="1" indent="-514350">
-              <a:buFontTx/>
-              <a:buAutoNum type="arabicPeriod"/>
-              <a:defRPr/>
-            </a:pPr>
-            <a:endParaRPr lang="en-US" altLang="zh-CN" dirty="0"/>
-          </a:p>
-          <a:p>
-            <a:pPr marL="971550" lvl="1" indent="-514350">
-              <a:buFontTx/>
-              <a:buAutoNum type="arabicPeriod"/>
-              <a:defRPr/>
-            </a:pPr>
-            <a:r>
-              <a:rPr lang="zh-CN" altLang="en-US" dirty="0"/>
-              <a:t>对相关信息技术发展进行预测</a:t>
-            </a:r>
-            <a:endParaRPr lang="en-US" altLang="zh-CN" dirty="0"/>
-          </a:p>
-          <a:p>
-            <a:pPr marL="971550" lvl="1" indent="-514350">
-              <a:buFontTx/>
-              <a:buAutoNum type="arabicPeriod"/>
-              <a:defRPr/>
-            </a:pPr>
-            <a:endParaRPr lang="en-US" altLang="zh-CN" dirty="0"/>
-          </a:p>
-          <a:p>
-            <a:pPr marL="971550" lvl="1" indent="-514350">
-              <a:buFontTx/>
-              <a:buAutoNum type="arabicPeriod"/>
-              <a:defRPr/>
-            </a:pPr>
-            <a:r>
-              <a:rPr lang="zh-CN" altLang="en-US" dirty="0"/>
-              <a:t>制定信息系统的总目标和阶段性目标</a:t>
-            </a:r>
-            <a:endParaRPr lang="en-US" altLang="zh-CN" dirty="0"/>
-          </a:p>
-          <a:p>
-            <a:pPr marL="971550" lvl="1" indent="-514350">
-              <a:buFontTx/>
-              <a:buAutoNum type="arabicPeriod"/>
-              <a:defRPr/>
-            </a:pPr>
-            <a:endParaRPr lang="en-US" altLang="zh-CN" dirty="0"/>
-          </a:p>
-          <a:p>
-            <a:pPr marL="971550" lvl="1" indent="-514350">
-              <a:buFontTx/>
-              <a:buAutoNum type="arabicPeriod"/>
-              <a:defRPr/>
-            </a:pPr>
-            <a:r>
-              <a:rPr lang="zh-CN" altLang="en-US" dirty="0"/>
-              <a:t>列出带有优先权的信息化项目的建设清单</a:t>
-            </a:r>
-            <a:endParaRPr lang="en-US" altLang="zh-CN" dirty="0"/>
-          </a:p>
-          <a:p>
-            <a:pPr marL="971550" lvl="1" indent="-514350">
-              <a:buFontTx/>
-              <a:buAutoNum type="arabicPeriod"/>
-              <a:defRPr/>
-            </a:pPr>
-            <a:endParaRPr lang="en-US" altLang="zh-CN" dirty="0"/>
-          </a:p>
-          <a:p>
-            <a:pPr marL="971550" lvl="1" indent="-514350">
-              <a:buFontTx/>
-              <a:buAutoNum type="arabicPeriod"/>
-              <a:defRPr/>
-            </a:pPr>
-            <a:r>
-              <a:rPr lang="zh-CN" altLang="en-US" dirty="0"/>
-              <a:t>撰写并审批信息化项目规划报告</a:t>
-            </a:r>
-          </a:p>
-        </p:txBody>
-      </p:sp>
-      <p:sp>
-        <p:nvSpPr>
-          <p:cNvPr id="45059" name="Rectangle 6">
-            <a:extLst>
-              <a:ext uri="{FF2B5EF4-FFF2-40B4-BE49-F238E27FC236}">
-                <a16:creationId xmlns:a16="http://schemas.microsoft.com/office/drawing/2014/main" id="{CA5E7C12-2BA6-4D9A-8CCB-70469683522E}"/>
-              </a:ext>
-            </a:extLst>
-          </p:cNvPr>
-          <p:cNvSpPr>
-            <a:spLocks noGrp="1" noChangeArrowheads="1"/>
-          </p:cNvSpPr>
-          <p:nvPr>
-            <p:ph type="title" idx="4294967295"/>
-          </p:nvPr>
-        </p:nvSpPr>
-        <p:spPr>
-          <a:xfrm>
-            <a:off x="914400" y="130175"/>
-            <a:ext cx="8229600" cy="346075"/>
-          </a:xfrm>
-        </p:spPr>
-        <p:txBody>
-          <a:bodyPr>
-            <a:normAutofit fontScale="90000"/>
-          </a:bodyPr>
-          <a:lstStyle/>
-          <a:p>
-            <a:pPr>
-              <a:defRPr/>
-            </a:pPr>
-            <a:r>
-              <a:rPr lang="zh-CN" altLang="en-US" sz="2000">
-                <a:solidFill>
-                  <a:srgbClr val="0000FF"/>
-                </a:solidFill>
-              </a:rPr>
-              <a:t>十一五规划教材                                          </a:t>
-            </a:r>
-            <a:r>
-              <a:rPr lang="en-US" altLang="zh-CN" sz="2000">
-                <a:solidFill>
-                  <a:srgbClr val="0000FF"/>
-                </a:solidFill>
-              </a:rPr>
-              <a:t>《</a:t>
-            </a:r>
-            <a:r>
-              <a:rPr lang="zh-CN" altLang="en-US" sz="2000">
-                <a:solidFill>
-                  <a:srgbClr val="0000FF"/>
-                </a:solidFill>
-              </a:rPr>
-              <a:t>信息系统项目管理</a:t>
-            </a:r>
-            <a:r>
-              <a:rPr lang="en-US" altLang="zh-CN" sz="2000">
-                <a:solidFill>
-                  <a:srgbClr val="0000FF"/>
-                </a:solidFill>
-              </a:rPr>
-              <a:t>》</a:t>
-            </a:r>
-            <a:r>
-              <a:rPr lang="zh-CN" altLang="en-US" sz="2000">
-                <a:solidFill>
-                  <a:srgbClr val="0000FF"/>
-                </a:solidFill>
-              </a:rPr>
-              <a:t>讲义</a:t>
-            </a:r>
-          </a:p>
-        </p:txBody>
-      </p:sp>
-      <p:sp>
-        <p:nvSpPr>
-          <p:cNvPr id="52228" name="Line 7">
-            <a:extLst>
-              <a:ext uri="{FF2B5EF4-FFF2-40B4-BE49-F238E27FC236}">
-                <a16:creationId xmlns:a16="http://schemas.microsoft.com/office/drawing/2014/main" id="{16DCB688-6840-4480-B8C9-FCC05220EC48}"/>
-              </a:ext>
-            </a:extLst>
-          </p:cNvPr>
-          <p:cNvSpPr>
-            <a:spLocks noChangeShapeType="1"/>
-          </p:cNvSpPr>
-          <p:nvPr/>
-        </p:nvSpPr>
-        <p:spPr bwMode="auto">
-          <a:xfrm>
-            <a:off x="0" y="476250"/>
-            <a:ext cx="9144000" cy="0"/>
-          </a:xfrm>
-          <a:prstGeom prst="line">
-            <a:avLst/>
-          </a:prstGeom>
-          <a:noFill/>
-          <a:ln w="9525">
-            <a:solidFill>
-              <a:srgbClr val="9900CC"/>
-            </a:solidFill>
-            <a:round/>
-            <a:headEnd/>
-            <a:tailEnd/>
-          </a:ln>
-          <a:extLst>
-            <a:ext uri="{909E8E84-426E-40DD-AFC4-6F175D3DCCD1}">
-              <a14:hiddenFill xmlns:a14="http://schemas.microsoft.com/office/drawing/2010/main">
-                <a:noFill/>
-              </a14:hiddenFill>
-            </a:ext>
-          </a:extLst>
-        </p:spPr>
-        <p:txBody>
-          <a:bodyPr/>
-          <a:lstStyle/>
-          <a:p>
-            <a:endParaRPr lang="zh-CN" altLang="en-US"/>
-          </a:p>
-        </p:txBody>
-      </p:sp>
-    </p:spTree>
-  </p:cSld>
-  <p:clrMapOvr>
-    <a:masterClrMapping/>
-  </p:clrMapOvr>
-</p:sld>
-</file>
-
-<file path=ppt/slides/slide49.xml><?xml version="1.0" encoding="utf-8"?>
-<p:sld xmlns:a="http://schemas.openxmlformats.org/drawingml/2006/main" xmlns:r="http://schemas.openxmlformats.org/officeDocument/2006/relationships" xmlns:p="http://schemas.openxmlformats.org/presentationml/2006/main">
-  <p:cSld>
-    <p:spTree>
-      <p:nvGrpSpPr>
-        <p:cNvPr id="1" name=""/>
-        <p:cNvGrpSpPr/>
-        <p:nvPr/>
-      </p:nvGrpSpPr>
-      <p:grpSpPr>
-        <a:xfrm>
-          <a:off x="0" y="0"/>
-          <a:ext cx="0" cy="0"/>
-          <a:chOff x="0" y="0"/>
-          <a:chExt cx="0" cy="0"/>
-        </a:xfrm>
-      </p:grpSpPr>
-      <p:sp>
-        <p:nvSpPr>
-          <p:cNvPr id="46082" name="Rectangle 5">
-            <a:extLst>
-              <a:ext uri="{FF2B5EF4-FFF2-40B4-BE49-F238E27FC236}">
-                <a16:creationId xmlns:a16="http://schemas.microsoft.com/office/drawing/2014/main" id="{EBC95350-CB67-4BE2-8F32-DDBBFD17B108}"/>
-              </a:ext>
-            </a:extLst>
-          </p:cNvPr>
-          <p:cNvSpPr>
-            <a:spLocks noGrp="1" noChangeArrowheads="1"/>
-          </p:cNvSpPr>
-          <p:nvPr>
-            <p:ph type="body" idx="4294967295"/>
-          </p:nvPr>
-        </p:nvSpPr>
-        <p:spPr>
-          <a:xfrm>
-            <a:off x="0" y="428625"/>
-            <a:ext cx="8229600" cy="5043488"/>
-          </a:xfrm>
-        </p:spPr>
-        <p:txBody>
-          <a:bodyPr>
-            <a:normAutofit/>
-          </a:bodyPr>
-          <a:lstStyle/>
-          <a:p>
-            <a:pPr>
-              <a:defRPr/>
-            </a:pPr>
-            <a:r>
-              <a:rPr lang="en-US" altLang="zh-CN" sz="4000" dirty="0"/>
-              <a:t>1.4.2 </a:t>
-            </a:r>
-            <a:r>
-              <a:rPr lang="zh-CN" altLang="en-US" sz="4000" dirty="0"/>
-              <a:t>信息化项目规划的内容</a:t>
-            </a:r>
-          </a:p>
-          <a:p>
-            <a:pPr marL="971550" lvl="1" indent="-514350">
-              <a:buFontTx/>
-              <a:buAutoNum type="arabicPeriod"/>
-              <a:defRPr/>
-            </a:pPr>
-            <a:endParaRPr lang="en-US" altLang="zh-CN" dirty="0"/>
-          </a:p>
-          <a:p>
-            <a:pPr marL="971550" lvl="1" indent="-514350">
-              <a:buFontTx/>
-              <a:buAutoNum type="arabicPeriod"/>
-              <a:defRPr/>
-            </a:pPr>
-            <a:r>
-              <a:rPr lang="zh-CN" altLang="en-US" dirty="0"/>
-              <a:t>主要包括三个方面的内容</a:t>
-            </a:r>
-            <a:endParaRPr lang="en-US" altLang="zh-CN" dirty="0"/>
-          </a:p>
-          <a:p>
-            <a:pPr marL="1371600" lvl="2" indent="-514350">
-              <a:buFont typeface="Wingdings" panose="05000000000000000000" pitchFamily="2" charset="2"/>
-              <a:buChar char="Ø"/>
-              <a:defRPr/>
-            </a:pPr>
-            <a:r>
-              <a:rPr lang="zh-CN" altLang="en-US" dirty="0"/>
-              <a:t>带有优先权的项目清单的设计</a:t>
-            </a:r>
-            <a:endParaRPr lang="en-US" altLang="zh-CN" dirty="0"/>
-          </a:p>
-          <a:p>
-            <a:pPr marL="1828800" lvl="3" indent="-514350">
-              <a:lnSpc>
-                <a:spcPts val="2863"/>
-              </a:lnSpc>
-              <a:buFont typeface="Wingdings" panose="05000000000000000000" pitchFamily="2" charset="2"/>
-              <a:buChar char="ü"/>
-              <a:defRPr/>
-            </a:pPr>
-            <a:r>
-              <a:rPr lang="zh-CN" altLang="en-US" dirty="0"/>
-              <a:t>体现为各阶段需要实现的功能是什么，需要通过什么应用来具体实现，突破口如何选择等问题；</a:t>
-            </a:r>
-            <a:endParaRPr lang="en-US" altLang="zh-CN" dirty="0"/>
-          </a:p>
-          <a:p>
-            <a:pPr marL="1371600" lvl="2" indent="-514350">
-              <a:buFont typeface="Wingdings" panose="05000000000000000000" pitchFamily="2" charset="2"/>
-              <a:buChar char="Ø"/>
-              <a:defRPr/>
-            </a:pPr>
-            <a:r>
-              <a:rPr lang="zh-CN" altLang="en-US" dirty="0"/>
-              <a:t>信息系统项目建设方式的考虑</a:t>
-            </a:r>
-            <a:endParaRPr lang="en-US" altLang="zh-CN" dirty="0"/>
-          </a:p>
-          <a:p>
-            <a:pPr marL="1828800" lvl="3" indent="-514350">
-              <a:lnSpc>
-                <a:spcPts val="2863"/>
-              </a:lnSpc>
-              <a:buFont typeface="Wingdings" panose="05000000000000000000" pitchFamily="2" charset="2"/>
-              <a:buChar char="ü"/>
-              <a:defRPr/>
-            </a:pPr>
-            <a:r>
-              <a:rPr lang="zh-CN" altLang="en-US" dirty="0"/>
-              <a:t>比如是自行建设还是外包，是采取一步到位的策略还是分步实施的策略等问题</a:t>
-            </a:r>
-            <a:endParaRPr lang="en-US" altLang="zh-CN" dirty="0"/>
-          </a:p>
-          <a:p>
-            <a:pPr marL="1371600" lvl="2" indent="-514350">
-              <a:buFont typeface="Wingdings" panose="05000000000000000000" pitchFamily="2" charset="2"/>
-              <a:buChar char="Ø"/>
-              <a:defRPr/>
-            </a:pPr>
-            <a:r>
-              <a:rPr lang="zh-CN" altLang="en-US" dirty="0"/>
-              <a:t>业务和技术标准的设计</a:t>
-            </a:r>
-            <a:endParaRPr lang="en-US" altLang="zh-CN" dirty="0"/>
-          </a:p>
-          <a:p>
-            <a:pPr marL="1828800" lvl="3" indent="-514350">
-              <a:buFont typeface="Wingdings" panose="05000000000000000000" pitchFamily="2" charset="2"/>
-              <a:buChar char="ü"/>
-              <a:defRPr/>
-            </a:pPr>
-            <a:r>
-              <a:rPr lang="zh-CN" altLang="en-US" dirty="0"/>
-              <a:t>采用什么样的业务流程优化原则、采用什么样的信息资源整合的标准和原则、采用什么样的开发框架、协议和标准等问题</a:t>
-            </a:r>
-            <a:endParaRPr lang="en-US" altLang="zh-CN" dirty="0"/>
-          </a:p>
-          <a:p>
-            <a:pPr marL="1371600" lvl="2" indent="-514350">
-              <a:buFont typeface="Wingdings" panose="05000000000000000000" pitchFamily="2" charset="2"/>
-              <a:buChar char="Ø"/>
-              <a:defRPr/>
-            </a:pPr>
-            <a:endParaRPr lang="en-US" altLang="zh-CN" dirty="0"/>
-          </a:p>
-          <a:p>
-            <a:pPr marL="1371600" lvl="2" indent="-514350">
-              <a:buFont typeface="Wingdings" panose="05000000000000000000" pitchFamily="2" charset="2"/>
-              <a:buChar char="Ø"/>
-              <a:defRPr/>
-            </a:pPr>
-            <a:endParaRPr lang="en-US" altLang="zh-CN" dirty="0"/>
-          </a:p>
-        </p:txBody>
-      </p:sp>
-      <p:sp>
-        <p:nvSpPr>
-          <p:cNvPr id="46083" name="Rectangle 6">
-            <a:extLst>
-              <a:ext uri="{FF2B5EF4-FFF2-40B4-BE49-F238E27FC236}">
-                <a16:creationId xmlns:a16="http://schemas.microsoft.com/office/drawing/2014/main" id="{01B861AD-AB75-4C04-BC3D-6B55D79FF655}"/>
-              </a:ext>
-            </a:extLst>
-          </p:cNvPr>
-          <p:cNvSpPr>
-            <a:spLocks noGrp="1" noChangeArrowheads="1"/>
-          </p:cNvSpPr>
-          <p:nvPr>
-            <p:ph type="title" idx="4294967295"/>
-          </p:nvPr>
-        </p:nvSpPr>
-        <p:spPr>
-          <a:xfrm>
-            <a:off x="914400" y="130175"/>
-            <a:ext cx="8229600" cy="346075"/>
-          </a:xfrm>
-        </p:spPr>
-        <p:txBody>
-          <a:bodyPr>
-            <a:normAutofit fontScale="90000"/>
-          </a:bodyPr>
-          <a:lstStyle/>
-          <a:p>
-            <a:pPr>
-              <a:defRPr/>
-            </a:pPr>
-            <a:r>
-              <a:rPr lang="zh-CN" altLang="en-US" sz="2000">
-                <a:solidFill>
-                  <a:srgbClr val="0000FF"/>
-                </a:solidFill>
-              </a:rPr>
-              <a:t>十一五规划教材                                          </a:t>
-            </a:r>
-            <a:r>
-              <a:rPr lang="en-US" altLang="zh-CN" sz="2000">
-                <a:solidFill>
-                  <a:srgbClr val="0000FF"/>
-                </a:solidFill>
-              </a:rPr>
-              <a:t>《</a:t>
-            </a:r>
-            <a:r>
-              <a:rPr lang="zh-CN" altLang="en-US" sz="2000">
-                <a:solidFill>
-                  <a:srgbClr val="0000FF"/>
-                </a:solidFill>
-              </a:rPr>
-              <a:t>信息系统项目管理</a:t>
-            </a:r>
-            <a:r>
-              <a:rPr lang="en-US" altLang="zh-CN" sz="2000">
-                <a:solidFill>
-                  <a:srgbClr val="0000FF"/>
-                </a:solidFill>
-              </a:rPr>
-              <a:t>》</a:t>
-            </a:r>
-            <a:r>
-              <a:rPr lang="zh-CN" altLang="en-US" sz="2000">
-                <a:solidFill>
-                  <a:srgbClr val="0000FF"/>
-                </a:solidFill>
-              </a:rPr>
-              <a:t>讲义</a:t>
-            </a:r>
-          </a:p>
-        </p:txBody>
-      </p:sp>
-      <p:sp>
-        <p:nvSpPr>
-          <p:cNvPr id="53252" name="Line 7">
-            <a:extLst>
-              <a:ext uri="{FF2B5EF4-FFF2-40B4-BE49-F238E27FC236}">
-                <a16:creationId xmlns:a16="http://schemas.microsoft.com/office/drawing/2014/main" id="{EA3A90D6-A268-43BF-A221-8CB2ED16510D}"/>
               </a:ext>
             </a:extLst>
           </p:cNvPr>
@@ -22189,6 +22011,595 @@
       </p:grpSpPr>
       <p:sp>
         <p:nvSpPr>
+          <p:cNvPr id="45058" name="Rectangle 5">
+            <a:extLst>
+              <a:ext uri="{FF2B5EF4-FFF2-40B4-BE49-F238E27FC236}">
+                <a16:creationId xmlns:a16="http://schemas.microsoft.com/office/drawing/2014/main" id="{57482D9E-21EF-4BD1-808E-39EBB588C509}"/>
+              </a:ext>
+            </a:extLst>
+          </p:cNvPr>
+          <p:cNvSpPr>
+            <a:spLocks noGrp="1" noChangeArrowheads="1"/>
+          </p:cNvSpPr>
+          <p:nvPr>
+            <p:ph type="body" idx="4294967295"/>
+          </p:nvPr>
+        </p:nvSpPr>
+        <p:spPr>
+          <a:xfrm>
+            <a:off x="0" y="617538"/>
+            <a:ext cx="8229600" cy="4525962"/>
+          </a:xfrm>
+        </p:spPr>
+        <p:txBody>
+          <a:bodyPr>
+            <a:normAutofit lnSpcReduction="10000"/>
+          </a:bodyPr>
+          <a:lstStyle/>
+          <a:p>
+            <a:pPr>
+              <a:defRPr/>
+            </a:pPr>
+            <a:r>
+              <a:rPr lang="en-US" altLang="zh-CN" sz="4000" dirty="0"/>
+              <a:t>1.4.1 </a:t>
+            </a:r>
+            <a:r>
+              <a:rPr lang="zh-CN" altLang="en-US" sz="4000" dirty="0"/>
+              <a:t>信息化项目规划的步骤</a:t>
+            </a:r>
+          </a:p>
+          <a:p>
+            <a:pPr marL="971550" lvl="1" indent="-514350">
+              <a:buFontTx/>
+              <a:buAutoNum type="arabicPeriod"/>
+              <a:defRPr/>
+            </a:pPr>
+            <a:endParaRPr lang="en-US" altLang="zh-CN" dirty="0"/>
+          </a:p>
+          <a:p>
+            <a:pPr marL="971550" lvl="1" indent="-514350">
+              <a:buFontTx/>
+              <a:buAutoNum type="arabicPeriod"/>
+              <a:defRPr/>
+            </a:pPr>
+            <a:r>
+              <a:rPr lang="zh-CN" altLang="en-US" dirty="0"/>
+              <a:t>了解组织当前信息系统以及管理状况</a:t>
+            </a:r>
+            <a:endParaRPr lang="en-US" altLang="zh-CN" dirty="0"/>
+          </a:p>
+          <a:p>
+            <a:pPr marL="971550" lvl="1" indent="-514350">
+              <a:buFontTx/>
+              <a:buAutoNum type="arabicPeriod"/>
+              <a:defRPr/>
+            </a:pPr>
+            <a:endParaRPr lang="en-US" altLang="zh-CN" dirty="0"/>
+          </a:p>
+          <a:p>
+            <a:pPr marL="971550" lvl="1" indent="-514350">
+              <a:buFontTx/>
+              <a:buAutoNum type="arabicPeriod"/>
+              <a:defRPr/>
+            </a:pPr>
+            <a:r>
+              <a:rPr lang="zh-CN" altLang="en-US" dirty="0"/>
+              <a:t>对相关信息技术发展进行预测</a:t>
+            </a:r>
+            <a:endParaRPr lang="en-US" altLang="zh-CN" dirty="0"/>
+          </a:p>
+          <a:p>
+            <a:pPr marL="971550" lvl="1" indent="-514350">
+              <a:buFontTx/>
+              <a:buAutoNum type="arabicPeriod"/>
+              <a:defRPr/>
+            </a:pPr>
+            <a:endParaRPr lang="en-US" altLang="zh-CN" dirty="0"/>
+          </a:p>
+          <a:p>
+            <a:pPr marL="971550" lvl="1" indent="-514350">
+              <a:buFontTx/>
+              <a:buAutoNum type="arabicPeriod"/>
+              <a:defRPr/>
+            </a:pPr>
+            <a:r>
+              <a:rPr lang="zh-CN" altLang="en-US" dirty="0"/>
+              <a:t>制定信息系统的总目标和阶段性目标</a:t>
+            </a:r>
+            <a:endParaRPr lang="en-US" altLang="zh-CN" dirty="0"/>
+          </a:p>
+          <a:p>
+            <a:pPr marL="971550" lvl="1" indent="-514350">
+              <a:buFontTx/>
+              <a:buAutoNum type="arabicPeriod"/>
+              <a:defRPr/>
+            </a:pPr>
+            <a:endParaRPr lang="en-US" altLang="zh-CN" dirty="0"/>
+          </a:p>
+          <a:p>
+            <a:pPr marL="971550" lvl="1" indent="-514350">
+              <a:buFontTx/>
+              <a:buAutoNum type="arabicPeriod"/>
+              <a:defRPr/>
+            </a:pPr>
+            <a:r>
+              <a:rPr lang="zh-CN" altLang="en-US" dirty="0"/>
+              <a:t>列出带有优先权的信息化项目的建设清单</a:t>
+            </a:r>
+            <a:endParaRPr lang="en-US" altLang="zh-CN" dirty="0"/>
+          </a:p>
+          <a:p>
+            <a:pPr marL="971550" lvl="1" indent="-514350">
+              <a:buFontTx/>
+              <a:buAutoNum type="arabicPeriod"/>
+              <a:defRPr/>
+            </a:pPr>
+            <a:endParaRPr lang="en-US" altLang="zh-CN" dirty="0"/>
+          </a:p>
+          <a:p>
+            <a:pPr marL="971550" lvl="1" indent="-514350">
+              <a:buFontTx/>
+              <a:buAutoNum type="arabicPeriod"/>
+              <a:defRPr/>
+            </a:pPr>
+            <a:r>
+              <a:rPr lang="zh-CN" altLang="en-US" dirty="0"/>
+              <a:t>撰写并审批信息化项目规划报告</a:t>
+            </a:r>
+          </a:p>
+        </p:txBody>
+      </p:sp>
+      <p:sp>
+        <p:nvSpPr>
+          <p:cNvPr id="45059" name="Rectangle 6">
+            <a:extLst>
+              <a:ext uri="{FF2B5EF4-FFF2-40B4-BE49-F238E27FC236}">
+                <a16:creationId xmlns:a16="http://schemas.microsoft.com/office/drawing/2014/main" id="{CA5E7C12-2BA6-4D9A-8CCB-70469683522E}"/>
+              </a:ext>
+            </a:extLst>
+          </p:cNvPr>
+          <p:cNvSpPr>
+            <a:spLocks noGrp="1" noChangeArrowheads="1"/>
+          </p:cNvSpPr>
+          <p:nvPr>
+            <p:ph type="title" idx="4294967295"/>
+          </p:nvPr>
+        </p:nvSpPr>
+        <p:spPr>
+          <a:xfrm>
+            <a:off x="914400" y="130175"/>
+            <a:ext cx="8229600" cy="346075"/>
+          </a:xfrm>
+        </p:spPr>
+        <p:txBody>
+          <a:bodyPr>
+            <a:normAutofit fontScale="90000"/>
+          </a:bodyPr>
+          <a:lstStyle/>
+          <a:p>
+            <a:pPr>
+              <a:defRPr/>
+            </a:pPr>
+            <a:r>
+              <a:rPr lang="zh-CN" altLang="en-US" sz="2000">
+                <a:solidFill>
+                  <a:srgbClr val="0000FF"/>
+                </a:solidFill>
+              </a:rPr>
+              <a:t>十一五规划教材                                          </a:t>
+            </a:r>
+            <a:r>
+              <a:rPr lang="en-US" altLang="zh-CN" sz="2000">
+                <a:solidFill>
+                  <a:srgbClr val="0000FF"/>
+                </a:solidFill>
+              </a:rPr>
+              <a:t>《</a:t>
+            </a:r>
+            <a:r>
+              <a:rPr lang="zh-CN" altLang="en-US" sz="2000">
+                <a:solidFill>
+                  <a:srgbClr val="0000FF"/>
+                </a:solidFill>
+              </a:rPr>
+              <a:t>信息系统项目管理</a:t>
+            </a:r>
+            <a:r>
+              <a:rPr lang="en-US" altLang="zh-CN" sz="2000">
+                <a:solidFill>
+                  <a:srgbClr val="0000FF"/>
+                </a:solidFill>
+              </a:rPr>
+              <a:t>》</a:t>
+            </a:r>
+            <a:r>
+              <a:rPr lang="zh-CN" altLang="en-US" sz="2000">
+                <a:solidFill>
+                  <a:srgbClr val="0000FF"/>
+                </a:solidFill>
+              </a:rPr>
+              <a:t>讲义</a:t>
+            </a:r>
+          </a:p>
+        </p:txBody>
+      </p:sp>
+      <p:sp>
+        <p:nvSpPr>
+          <p:cNvPr id="52228" name="Line 7">
+            <a:extLst>
+              <a:ext uri="{FF2B5EF4-FFF2-40B4-BE49-F238E27FC236}">
+                <a16:creationId xmlns:a16="http://schemas.microsoft.com/office/drawing/2014/main" id="{16DCB688-6840-4480-B8C9-FCC05220EC48}"/>
+              </a:ext>
+            </a:extLst>
+          </p:cNvPr>
+          <p:cNvSpPr>
+            <a:spLocks noChangeShapeType="1"/>
+          </p:cNvSpPr>
+          <p:nvPr/>
+        </p:nvSpPr>
+        <p:spPr bwMode="auto">
+          <a:xfrm>
+            <a:off x="0" y="476250"/>
+            <a:ext cx="9144000" cy="0"/>
+          </a:xfrm>
+          <a:prstGeom prst="line">
+            <a:avLst/>
+          </a:prstGeom>
+          <a:noFill/>
+          <a:ln w="9525">
+            <a:solidFill>
+              <a:srgbClr val="9900CC"/>
+            </a:solidFill>
+            <a:round/>
+            <a:headEnd/>
+            <a:tailEnd/>
+          </a:ln>
+          <a:extLst>
+            <a:ext uri="{909E8E84-426E-40DD-AFC4-6F175D3DCCD1}">
+              <a14:hiddenFill xmlns:a14="http://schemas.microsoft.com/office/drawing/2010/main">
+                <a:noFill/>
+              </a14:hiddenFill>
+            </a:ext>
+          </a:extLst>
+        </p:spPr>
+        <p:txBody>
+          <a:bodyPr/>
+          <a:lstStyle/>
+          <a:p>
+            <a:endParaRPr lang="zh-CN" altLang="en-US"/>
+          </a:p>
+        </p:txBody>
+      </p:sp>
+    </p:spTree>
+  </p:cSld>
+  <p:clrMapOvr>
+    <a:masterClrMapping/>
+  </p:clrMapOvr>
+</p:sld>
+</file>
+
+<file path=ppt/slides/slide51.xml><?xml version="1.0" encoding="utf-8"?>
+<p:sld xmlns:a="http://schemas.openxmlformats.org/drawingml/2006/main" xmlns:r="http://schemas.openxmlformats.org/officeDocument/2006/relationships" xmlns:p="http://schemas.openxmlformats.org/presentationml/2006/main">
+  <p:cSld>
+    <p:spTree>
+      <p:nvGrpSpPr>
+        <p:cNvPr id="1" name=""/>
+        <p:cNvGrpSpPr/>
+        <p:nvPr/>
+      </p:nvGrpSpPr>
+      <p:grpSpPr>
+        <a:xfrm>
+          <a:off x="0" y="0"/>
+          <a:ext cx="0" cy="0"/>
+          <a:chOff x="0" y="0"/>
+          <a:chExt cx="0" cy="0"/>
+        </a:xfrm>
+      </p:grpSpPr>
+      <p:sp>
+        <p:nvSpPr>
+          <p:cNvPr id="46082" name="Rectangle 5">
+            <a:extLst>
+              <a:ext uri="{FF2B5EF4-FFF2-40B4-BE49-F238E27FC236}">
+                <a16:creationId xmlns:a16="http://schemas.microsoft.com/office/drawing/2014/main" id="{EBC95350-CB67-4BE2-8F32-DDBBFD17B108}"/>
+              </a:ext>
+            </a:extLst>
+          </p:cNvPr>
+          <p:cNvSpPr>
+            <a:spLocks noGrp="1" noChangeArrowheads="1"/>
+          </p:cNvSpPr>
+          <p:nvPr>
+            <p:ph type="body" idx="4294967295"/>
+          </p:nvPr>
+        </p:nvSpPr>
+        <p:spPr>
+          <a:xfrm>
+            <a:off x="0" y="428625"/>
+            <a:ext cx="8229600" cy="5043488"/>
+          </a:xfrm>
+        </p:spPr>
+        <p:txBody>
+          <a:bodyPr>
+            <a:normAutofit/>
+          </a:bodyPr>
+          <a:lstStyle/>
+          <a:p>
+            <a:pPr>
+              <a:defRPr/>
+            </a:pPr>
+            <a:r>
+              <a:rPr lang="en-US" altLang="zh-CN" sz="4000" dirty="0"/>
+              <a:t>1.4.2 </a:t>
+            </a:r>
+            <a:r>
+              <a:rPr lang="zh-CN" altLang="en-US" sz="4000" dirty="0"/>
+              <a:t>信息化项目规划的内容</a:t>
+            </a:r>
+          </a:p>
+          <a:p>
+            <a:pPr marL="971550" lvl="1" indent="-514350">
+              <a:buFontTx/>
+              <a:buAutoNum type="arabicPeriod"/>
+              <a:defRPr/>
+            </a:pPr>
+            <a:endParaRPr lang="en-US" altLang="zh-CN" dirty="0"/>
+          </a:p>
+          <a:p>
+            <a:pPr marL="971550" lvl="1" indent="-514350">
+              <a:buFontTx/>
+              <a:buAutoNum type="arabicPeriod"/>
+              <a:defRPr/>
+            </a:pPr>
+            <a:r>
+              <a:rPr lang="zh-CN" altLang="en-US" dirty="0"/>
+              <a:t>主要包括三个方面的内容</a:t>
+            </a:r>
+            <a:endParaRPr lang="en-US" altLang="zh-CN" dirty="0"/>
+          </a:p>
+          <a:p>
+            <a:pPr marL="1371600" lvl="2" indent="-514350">
+              <a:buFont typeface="Wingdings" panose="05000000000000000000" pitchFamily="2" charset="2"/>
+              <a:buChar char="Ø"/>
+              <a:defRPr/>
+            </a:pPr>
+            <a:r>
+              <a:rPr lang="zh-CN" altLang="en-US" dirty="0"/>
+              <a:t>带有优先权的项目清单的设计</a:t>
+            </a:r>
+            <a:endParaRPr lang="en-US" altLang="zh-CN" dirty="0"/>
+          </a:p>
+          <a:p>
+            <a:pPr marL="1828800" lvl="3" indent="-514350">
+              <a:lnSpc>
+                <a:spcPts val="2863"/>
+              </a:lnSpc>
+              <a:buFont typeface="Wingdings" panose="05000000000000000000" pitchFamily="2" charset="2"/>
+              <a:buChar char="ü"/>
+              <a:defRPr/>
+            </a:pPr>
+            <a:r>
+              <a:rPr lang="zh-CN" altLang="en-US" dirty="0"/>
+              <a:t>体现为各阶段需要实现的功能是什么，需要通过什么应用来具体实现，突破口如何选择等问题；</a:t>
+            </a:r>
+            <a:endParaRPr lang="en-US" altLang="zh-CN" dirty="0"/>
+          </a:p>
+          <a:p>
+            <a:pPr marL="1371600" lvl="2" indent="-514350">
+              <a:buFont typeface="Wingdings" panose="05000000000000000000" pitchFamily="2" charset="2"/>
+              <a:buChar char="Ø"/>
+              <a:defRPr/>
+            </a:pPr>
+            <a:r>
+              <a:rPr lang="zh-CN" altLang="en-US" dirty="0"/>
+              <a:t>信息系统项目建设方式的考虑</a:t>
+            </a:r>
+            <a:endParaRPr lang="en-US" altLang="zh-CN" dirty="0"/>
+          </a:p>
+          <a:p>
+            <a:pPr marL="1828800" lvl="3" indent="-514350">
+              <a:lnSpc>
+                <a:spcPts val="2863"/>
+              </a:lnSpc>
+              <a:buFont typeface="Wingdings" panose="05000000000000000000" pitchFamily="2" charset="2"/>
+              <a:buChar char="ü"/>
+              <a:defRPr/>
+            </a:pPr>
+            <a:r>
+              <a:rPr lang="zh-CN" altLang="en-US" dirty="0"/>
+              <a:t>比如是自行建设还是外包，是采取一步到位的策略还是分步实施的策略等问题</a:t>
+            </a:r>
+            <a:endParaRPr lang="en-US" altLang="zh-CN" dirty="0"/>
+          </a:p>
+          <a:p>
+            <a:pPr marL="1371600" lvl="2" indent="-514350">
+              <a:buFont typeface="Wingdings" panose="05000000000000000000" pitchFamily="2" charset="2"/>
+              <a:buChar char="Ø"/>
+              <a:defRPr/>
+            </a:pPr>
+            <a:r>
+              <a:rPr lang="zh-CN" altLang="en-US" dirty="0"/>
+              <a:t>业务和技术标准的设计</a:t>
+            </a:r>
+            <a:endParaRPr lang="en-US" altLang="zh-CN" dirty="0"/>
+          </a:p>
+          <a:p>
+            <a:pPr marL="1828800" lvl="3" indent="-514350">
+              <a:buFont typeface="Wingdings" panose="05000000000000000000" pitchFamily="2" charset="2"/>
+              <a:buChar char="ü"/>
+              <a:defRPr/>
+            </a:pPr>
+            <a:r>
+              <a:rPr lang="zh-CN" altLang="en-US" dirty="0"/>
+              <a:t>采用什么样的业务流程优化原则、采用什么样的信息资源整合的标准和原则、采用什么样的开发框架、协议和标准等问题</a:t>
+            </a:r>
+            <a:endParaRPr lang="en-US" altLang="zh-CN" dirty="0"/>
+          </a:p>
+          <a:p>
+            <a:pPr marL="1371600" lvl="2" indent="-514350">
+              <a:buFont typeface="Wingdings" panose="05000000000000000000" pitchFamily="2" charset="2"/>
+              <a:buChar char="Ø"/>
+              <a:defRPr/>
+            </a:pPr>
+            <a:endParaRPr lang="en-US" altLang="zh-CN" dirty="0"/>
+          </a:p>
+          <a:p>
+            <a:pPr marL="1371600" lvl="2" indent="-514350">
+              <a:buFont typeface="Wingdings" panose="05000000000000000000" pitchFamily="2" charset="2"/>
+              <a:buChar char="Ø"/>
+              <a:defRPr/>
+            </a:pPr>
+            <a:endParaRPr lang="en-US" altLang="zh-CN" dirty="0"/>
+          </a:p>
+        </p:txBody>
+      </p:sp>
+      <p:sp>
+        <p:nvSpPr>
+          <p:cNvPr id="46083" name="Rectangle 6">
+            <a:extLst>
+              <a:ext uri="{FF2B5EF4-FFF2-40B4-BE49-F238E27FC236}">
+                <a16:creationId xmlns:a16="http://schemas.microsoft.com/office/drawing/2014/main" id="{01B861AD-AB75-4C04-BC3D-6B55D79FF655}"/>
+              </a:ext>
+            </a:extLst>
+          </p:cNvPr>
+          <p:cNvSpPr>
+            <a:spLocks noGrp="1" noChangeArrowheads="1"/>
+          </p:cNvSpPr>
+          <p:nvPr>
+            <p:ph type="title" idx="4294967295"/>
+          </p:nvPr>
+        </p:nvSpPr>
+        <p:spPr>
+          <a:xfrm>
+            <a:off x="914400" y="130175"/>
+            <a:ext cx="8229600" cy="346075"/>
+          </a:xfrm>
+        </p:spPr>
+        <p:txBody>
+          <a:bodyPr>
+            <a:normAutofit fontScale="90000"/>
+          </a:bodyPr>
+          <a:lstStyle/>
+          <a:p>
+            <a:pPr>
+              <a:defRPr/>
+            </a:pPr>
+            <a:r>
+              <a:rPr lang="zh-CN" altLang="en-US" sz="2000">
+                <a:solidFill>
+                  <a:srgbClr val="0000FF"/>
+                </a:solidFill>
+              </a:rPr>
+              <a:t>十一五规划教材                                          </a:t>
+            </a:r>
+            <a:r>
+              <a:rPr lang="en-US" altLang="zh-CN" sz="2000">
+                <a:solidFill>
+                  <a:srgbClr val="0000FF"/>
+                </a:solidFill>
+              </a:rPr>
+              <a:t>《</a:t>
+            </a:r>
+            <a:r>
+              <a:rPr lang="zh-CN" altLang="en-US" sz="2000">
+                <a:solidFill>
+                  <a:srgbClr val="0000FF"/>
+                </a:solidFill>
+              </a:rPr>
+              <a:t>信息系统项目管理</a:t>
+            </a:r>
+            <a:r>
+              <a:rPr lang="en-US" altLang="zh-CN" sz="2000">
+                <a:solidFill>
+                  <a:srgbClr val="0000FF"/>
+                </a:solidFill>
+              </a:rPr>
+              <a:t>》</a:t>
+            </a:r>
+            <a:r>
+              <a:rPr lang="zh-CN" altLang="en-US" sz="2000">
+                <a:solidFill>
+                  <a:srgbClr val="0000FF"/>
+                </a:solidFill>
+              </a:rPr>
+              <a:t>讲义</a:t>
+            </a:r>
+          </a:p>
+        </p:txBody>
+      </p:sp>
+      <p:sp>
+        <p:nvSpPr>
+          <p:cNvPr id="53252" name="Line 7">
+            <a:extLst>
+              <a:ext uri="{FF2B5EF4-FFF2-40B4-BE49-F238E27FC236}">
+                <a16:creationId xmlns:a16="http://schemas.microsoft.com/office/drawing/2014/main" id="{EA3A90D6-A268-43BF-A221-8CB2ED16510D}"/>
+              </a:ext>
+            </a:extLst>
+          </p:cNvPr>
+          <p:cNvSpPr>
+            <a:spLocks noChangeShapeType="1"/>
+          </p:cNvSpPr>
+          <p:nvPr/>
+        </p:nvSpPr>
+        <p:spPr bwMode="auto">
+          <a:xfrm>
+            <a:off x="0" y="476250"/>
+            <a:ext cx="9144000" cy="0"/>
+          </a:xfrm>
+          <a:prstGeom prst="line">
+            <a:avLst/>
+          </a:prstGeom>
+          <a:noFill/>
+          <a:ln w="9525">
+            <a:solidFill>
+              <a:srgbClr val="9900CC"/>
+            </a:solidFill>
+            <a:round/>
+            <a:headEnd/>
+            <a:tailEnd/>
+          </a:ln>
+          <a:extLst>
+            <a:ext uri="{909E8E84-426E-40DD-AFC4-6F175D3DCCD1}">
+              <a14:hiddenFill xmlns:a14="http://schemas.microsoft.com/office/drawing/2010/main">
+                <a:noFill/>
+              </a14:hiddenFill>
+            </a:ext>
+          </a:extLst>
+        </p:spPr>
+        <p:txBody>
+          <a:bodyPr/>
+          <a:lstStyle/>
+          <a:p>
+            <a:endParaRPr lang="zh-CN" altLang="en-US"/>
+          </a:p>
+        </p:txBody>
+      </p:sp>
+    </p:spTree>
+  </p:cSld>
+  <p:clrMapOvr>
+    <a:masterClrMapping/>
+  </p:clrMapOvr>
+</p:sld>
+</file>
+
+<file path=ppt/slides/slide52.xml><?xml version="1.0" encoding="utf-8"?>
+<p:sld xmlns:a="http://schemas.openxmlformats.org/drawingml/2006/main" xmlns:r="http://schemas.openxmlformats.org/officeDocument/2006/relationships" xmlns:p="http://schemas.openxmlformats.org/presentationml/2006/main">
+  <p:cSld>
+    <p:spTree>
+      <p:nvGrpSpPr>
+        <p:cNvPr id="1" name=""/>
+        <p:cNvGrpSpPr/>
+        <p:nvPr/>
+      </p:nvGrpSpPr>
+      <p:grpSpPr>
+        <a:xfrm>
+          <a:off x="0" y="0"/>
+          <a:ext cx="0" cy="0"/>
+          <a:chOff x="0" y="0"/>
+          <a:chExt cx="0" cy="0"/>
+        </a:xfrm>
+      </p:grpSpPr>
+      <p:sp>
+        <p:nvSpPr>
           <p:cNvPr id="54274" name="Rectangle 5">
             <a:extLst>
               <a:ext uri="{FF2B5EF4-FFF2-40B4-BE49-F238E27FC236}">
@@ -22420,7 +22831,7 @@
 </p:sld>
 </file>
 
-<file path=ppt/slides/slide51.xml><?xml version="1.0" encoding="utf-8"?>
+<file path=ppt/slides/slide53.xml><?xml version="1.0" encoding="utf-8"?>
 <p:sld xmlns:a="http://schemas.openxmlformats.org/drawingml/2006/main" xmlns:r="http://schemas.openxmlformats.org/officeDocument/2006/relationships" xmlns:p="http://schemas.openxmlformats.org/presentationml/2006/main">
   <p:cSld>
     <p:spTree>
@@ -22673,7 +23084,7 @@
 </p:sld>
 </file>
 
-<file path=ppt/slides/slide52.xml><?xml version="1.0" encoding="utf-8"?>
+<file path=ppt/slides/slide54.xml><?xml version="1.0" encoding="utf-8"?>
 <p:sld xmlns:a="http://schemas.openxmlformats.org/drawingml/2006/main" xmlns:r="http://schemas.openxmlformats.org/officeDocument/2006/relationships" xmlns:p="http://schemas.openxmlformats.org/presentationml/2006/main">
   <p:cSld>
     <p:spTree>
@@ -22918,7 +23329,7 @@
 </p:sld>
 </file>
 
-<file path=ppt/slides/slide53.xml><?xml version="1.0" encoding="utf-8"?>
+<file path=ppt/slides/slide55.xml><?xml version="1.0" encoding="utf-8"?>
 <p:sld xmlns:a="http://schemas.openxmlformats.org/drawingml/2006/main" xmlns:r="http://schemas.openxmlformats.org/officeDocument/2006/relationships" xmlns:p="http://schemas.openxmlformats.org/presentationml/2006/main">
   <p:cSld>
     <p:spTree>
@@ -23167,7 +23578,7 @@
 </p:sld>
 </file>
 
-<file path=ppt/slides/slide54.xml><?xml version="1.0" encoding="utf-8"?>
+<file path=ppt/slides/slide56.xml><?xml version="1.0" encoding="utf-8"?>
 <p:sld xmlns:a="http://schemas.openxmlformats.org/drawingml/2006/main" xmlns:r="http://schemas.openxmlformats.org/officeDocument/2006/relationships" xmlns:p="http://schemas.openxmlformats.org/presentationml/2006/main">
   <p:cSld>
     <p:spTree>
@@ -23429,7 +23840,7 @@
 </p:sld>
 </file>
 
-<file path=ppt/slides/slide55.xml><?xml version="1.0" encoding="utf-8"?>
+<file path=ppt/slides/slide57.xml><?xml version="1.0" encoding="utf-8"?>
 <p:sld xmlns:a="http://schemas.openxmlformats.org/drawingml/2006/main" xmlns:r="http://schemas.openxmlformats.org/officeDocument/2006/relationships" xmlns:p="http://schemas.openxmlformats.org/presentationml/2006/main">
   <p:cSld>
     <p:spTree>
@@ -23726,7 +24137,7 @@
 </p:sld>
 </file>
 
-<file path=ppt/slides/slide56.xml><?xml version="1.0" encoding="utf-8"?>
+<file path=ppt/slides/slide58.xml><?xml version="1.0" encoding="utf-8"?>
 <p:sld xmlns:a="http://schemas.openxmlformats.org/drawingml/2006/main" xmlns:r="http://schemas.openxmlformats.org/officeDocument/2006/relationships" xmlns:p="http://schemas.openxmlformats.org/presentationml/2006/main">
   <p:cSld>
     <p:spTree>
@@ -24009,7 +24420,7 @@
 </p:sld>
 </file>
 
-<file path=ppt/slides/slide57.xml><?xml version="1.0" encoding="utf-8"?>
+<file path=ppt/slides/slide59.xml><?xml version="1.0" encoding="utf-8"?>
 <p:sld xmlns:a="http://schemas.openxmlformats.org/drawingml/2006/main" xmlns:r="http://schemas.openxmlformats.org/officeDocument/2006/relationships" xmlns:p="http://schemas.openxmlformats.org/presentationml/2006/main">
   <p:cSld>
     <p:spTree>
@@ -27082,7 +27493,116 @@
 </p:sld>
 </file>
 
-<file path=ppt/slides/slide58.xml><?xml version="1.0" encoding="utf-8"?>
+<file path=ppt/slides/slide6.xml><?xml version="1.0" encoding="utf-8"?>
+<p:sld xmlns:a="http://schemas.openxmlformats.org/drawingml/2006/main" xmlns:r="http://schemas.openxmlformats.org/officeDocument/2006/relationships" xmlns:p="http://schemas.openxmlformats.org/presentationml/2006/main">
+  <p:cSld>
+    <p:spTree>
+      <p:nvGrpSpPr>
+        <p:cNvPr id="1" name=""/>
+        <p:cNvGrpSpPr/>
+        <p:nvPr/>
+      </p:nvGrpSpPr>
+      <p:grpSpPr>
+        <a:xfrm>
+          <a:off x="0" y="0"/>
+          <a:ext cx="0" cy="0"/>
+          <a:chOff x="0" y="0"/>
+          <a:chExt cx="0" cy="0"/>
+        </a:xfrm>
+      </p:grpSpPr>
+      <p:sp>
+        <p:nvSpPr>
+          <p:cNvPr id="13314" name="Rectangle 4">
+            <a:extLst>
+              <a:ext uri="{FF2B5EF4-FFF2-40B4-BE49-F238E27FC236}">
+                <a16:creationId xmlns:a16="http://schemas.microsoft.com/office/drawing/2014/main" id="{D6152818-AC6C-44B0-A42D-13FC0AAE36D8}"/>
+              </a:ext>
+            </a:extLst>
+          </p:cNvPr>
+          <p:cNvSpPr>
+            <a:spLocks noGrp="1" noChangeArrowheads="1"/>
+          </p:cNvSpPr>
+          <p:nvPr>
+            <p:ph type="title" idx="4294967295"/>
+          </p:nvPr>
+        </p:nvSpPr>
+        <p:spPr>
+          <a:xfrm>
+            <a:off x="0" y="1500188"/>
+            <a:ext cx="8229600" cy="3000375"/>
+          </a:xfrm>
+        </p:spPr>
+        <p:txBody>
+          <a:bodyPr/>
+          <a:lstStyle/>
+          <a:p>
+            <a:r>
+              <a:rPr lang="en-US" altLang="zh-CN" sz="4800" dirty="0"/>
+              <a:t>1.1   </a:t>
+            </a:r>
+            <a:r>
+              <a:rPr lang="zh-CN" altLang="en-US" sz="4800" dirty="0"/>
+              <a:t>项目管理的基本内容</a:t>
+            </a:r>
+          </a:p>
+        </p:txBody>
+      </p:sp>
+      <p:sp>
+        <p:nvSpPr>
+          <p:cNvPr id="13316" name="Line 7">
+            <a:extLst>
+              <a:ext uri="{FF2B5EF4-FFF2-40B4-BE49-F238E27FC236}">
+                <a16:creationId xmlns:a16="http://schemas.microsoft.com/office/drawing/2014/main" id="{5F68D850-91B5-4FDF-A77D-E7544385BC8B}"/>
+              </a:ext>
+            </a:extLst>
+          </p:cNvPr>
+          <p:cNvSpPr>
+            <a:spLocks noChangeShapeType="1"/>
+          </p:cNvSpPr>
+          <p:nvPr/>
+        </p:nvSpPr>
+        <p:spPr bwMode="auto">
+          <a:xfrm>
+            <a:off x="0" y="476250"/>
+            <a:ext cx="9144000" cy="0"/>
+          </a:xfrm>
+          <a:prstGeom prst="line">
+            <a:avLst/>
+          </a:prstGeom>
+          <a:noFill/>
+          <a:ln w="9525">
+            <a:solidFill>
+              <a:srgbClr val="9900CC"/>
+            </a:solidFill>
+            <a:round/>
+            <a:headEnd/>
+            <a:tailEnd/>
+          </a:ln>
+          <a:extLst>
+            <a:ext uri="{909E8E84-426E-40DD-AFC4-6F175D3DCCD1}">
+              <a14:hiddenFill xmlns:a14="http://schemas.microsoft.com/office/drawing/2010/main">
+                <a:noFill/>
+              </a14:hiddenFill>
+            </a:ext>
+          </a:extLst>
+        </p:spPr>
+        <p:txBody>
+          <a:bodyPr/>
+          <a:lstStyle/>
+          <a:p>
+            <a:endParaRPr lang="zh-CN" altLang="en-US"/>
+          </a:p>
+        </p:txBody>
+      </p:sp>
+    </p:spTree>
+  </p:cSld>
+  <p:clrMapOvr>
+    <a:masterClrMapping/>
+  </p:clrMapOvr>
+</p:sld>
+</file>
+
+<file path=ppt/slides/slide60.xml><?xml version="1.0" encoding="utf-8"?>
 <p:sld xmlns:a="http://schemas.openxmlformats.org/drawingml/2006/main" xmlns:r="http://schemas.openxmlformats.org/officeDocument/2006/relationships" xmlns:p="http://schemas.openxmlformats.org/presentationml/2006/main">
   <p:cSld>
     <p:spTree>
@@ -30291,7 +30811,7 @@
 </p:sld>
 </file>
 
-<file path=ppt/slides/slide59.xml><?xml version="1.0" encoding="utf-8"?>
+<file path=ppt/slides/slide61.xml><?xml version="1.0" encoding="utf-8"?>
 <p:sld xmlns:a="http://schemas.openxmlformats.org/drawingml/2006/main" xmlns:r="http://schemas.openxmlformats.org/officeDocument/2006/relationships" xmlns:p="http://schemas.openxmlformats.org/presentationml/2006/main">
   <p:cSld>
     <p:spTree>
@@ -30438,115 +30958,6 @@
 </p:sld>
 </file>
 
-<file path=ppt/slides/slide6.xml><?xml version="1.0" encoding="utf-8"?>
-<p:sld xmlns:a="http://schemas.openxmlformats.org/drawingml/2006/main" xmlns:r="http://schemas.openxmlformats.org/officeDocument/2006/relationships" xmlns:p="http://schemas.openxmlformats.org/presentationml/2006/main">
-  <p:cSld>
-    <p:spTree>
-      <p:nvGrpSpPr>
-        <p:cNvPr id="1" name=""/>
-        <p:cNvGrpSpPr/>
-        <p:nvPr/>
-      </p:nvGrpSpPr>
-      <p:grpSpPr>
-        <a:xfrm>
-          <a:off x="0" y="0"/>
-          <a:ext cx="0" cy="0"/>
-          <a:chOff x="0" y="0"/>
-          <a:chExt cx="0" cy="0"/>
-        </a:xfrm>
-      </p:grpSpPr>
-      <p:sp>
-        <p:nvSpPr>
-          <p:cNvPr id="13314" name="Rectangle 4">
-            <a:extLst>
-              <a:ext uri="{FF2B5EF4-FFF2-40B4-BE49-F238E27FC236}">
-                <a16:creationId xmlns:a16="http://schemas.microsoft.com/office/drawing/2014/main" id="{D6152818-AC6C-44B0-A42D-13FC0AAE36D8}"/>
-              </a:ext>
-            </a:extLst>
-          </p:cNvPr>
-          <p:cNvSpPr>
-            <a:spLocks noGrp="1" noChangeArrowheads="1"/>
-          </p:cNvSpPr>
-          <p:nvPr>
-            <p:ph type="title" idx="4294967295"/>
-          </p:nvPr>
-        </p:nvSpPr>
-        <p:spPr>
-          <a:xfrm>
-            <a:off x="0" y="1500188"/>
-            <a:ext cx="8229600" cy="3000375"/>
-          </a:xfrm>
-        </p:spPr>
-        <p:txBody>
-          <a:bodyPr/>
-          <a:lstStyle/>
-          <a:p>
-            <a:r>
-              <a:rPr lang="en-US" altLang="zh-CN" sz="4800" dirty="0"/>
-              <a:t>1.1   </a:t>
-            </a:r>
-            <a:r>
-              <a:rPr lang="zh-CN" altLang="en-US" sz="4800" dirty="0"/>
-              <a:t>项目管理的基本内容</a:t>
-            </a:r>
-          </a:p>
-        </p:txBody>
-      </p:sp>
-      <p:sp>
-        <p:nvSpPr>
-          <p:cNvPr id="13316" name="Line 7">
-            <a:extLst>
-              <a:ext uri="{FF2B5EF4-FFF2-40B4-BE49-F238E27FC236}">
-                <a16:creationId xmlns:a16="http://schemas.microsoft.com/office/drawing/2014/main" id="{5F68D850-91B5-4FDF-A77D-E7544385BC8B}"/>
-              </a:ext>
-            </a:extLst>
-          </p:cNvPr>
-          <p:cNvSpPr>
-            <a:spLocks noChangeShapeType="1"/>
-          </p:cNvSpPr>
-          <p:nvPr/>
-        </p:nvSpPr>
-        <p:spPr bwMode="auto">
-          <a:xfrm>
-            <a:off x="0" y="476250"/>
-            <a:ext cx="9144000" cy="0"/>
-          </a:xfrm>
-          <a:prstGeom prst="line">
-            <a:avLst/>
-          </a:prstGeom>
-          <a:noFill/>
-          <a:ln w="9525">
-            <a:solidFill>
-              <a:srgbClr val="9900CC"/>
-            </a:solidFill>
-            <a:round/>
-            <a:headEnd/>
-            <a:tailEnd/>
-          </a:ln>
-          <a:extLst>
-            <a:ext uri="{909E8E84-426E-40DD-AFC4-6F175D3DCCD1}">
-              <a14:hiddenFill xmlns:a14="http://schemas.microsoft.com/office/drawing/2010/main">
-                <a:noFill/>
-              </a14:hiddenFill>
-            </a:ext>
-          </a:extLst>
-        </p:spPr>
-        <p:txBody>
-          <a:bodyPr/>
-          <a:lstStyle/>
-          <a:p>
-            <a:endParaRPr lang="zh-CN" altLang="en-US"/>
-          </a:p>
-        </p:txBody>
-      </p:sp>
-    </p:spTree>
-  </p:cSld>
-  <p:clrMapOvr>
-    <a:masterClrMapping/>
-  </p:clrMapOvr>
-</p:sld>
-</file>
-
 <file path=ppt/slides/slide7.xml><?xml version="1.0" encoding="utf-8"?>
 <p:sld xmlns:a="http://schemas.openxmlformats.org/drawingml/2006/main" xmlns:r="http://schemas.openxmlformats.org/officeDocument/2006/relationships" xmlns:p="http://schemas.openxmlformats.org/presentationml/2006/main">
   <p:cSld>
@@ -30583,7 +30994,7 @@
         <p:spPr>
           <a:xfrm>
             <a:off x="-38" y="188640"/>
-            <a:ext cx="8964526" cy="6336704"/>
+            <a:ext cx="8964526" cy="5184576"/>
           </a:xfrm>
         </p:spPr>
         <p:txBody>
@@ -30693,10 +31104,6 @@
               <a:defRPr/>
             </a:pPr>
             <a:r>
-              <a:rPr lang="zh-CN" altLang="en-US" dirty="0"/>
-              <a:t>所谓</a:t>
-            </a:r>
-            <a:r>
               <a:rPr lang="zh-CN" altLang="en-US" dirty="0">
                 <a:solidFill>
                   <a:srgbClr val="FF0000"/>
@@ -30706,7 +31113,7 @@
             </a:r>
             <a:r>
               <a:rPr lang="zh-CN" altLang="en-US" dirty="0"/>
-              <a:t>，就是指在项目活动中运用知识、技能、工具和技术，以满足项目干系人对项目的需求和期望的过程</a:t>
+              <a:t>指在项目活动中运用知识、技能、工具和技术，以满足项目干系人对项目的需求和期望的过程</a:t>
             </a:r>
             <a:r>
               <a:rPr lang="en-US" altLang="zh-CN" dirty="0"/>
@@ -30738,136 +31145,6 @@
               <a:t>是指能影响项目决策、活动或结果的个人、群体或组织，以及会受或自认为会受项目决策、活动或结果影响的个人、群体或组织。</a:t>
             </a:r>
             <a:endParaRPr lang="en-US" altLang="zh-CN" dirty="0"/>
-          </a:p>
-          <a:p>
-            <a:pPr marL="0" lvl="1" indent="0" algn="just">
-              <a:lnSpc>
-                <a:spcPct val="150000"/>
-              </a:lnSpc>
-              <a:spcBef>
-                <a:spcPts val="0"/>
-              </a:spcBef>
-              <a:buNone/>
-              <a:defRPr/>
-            </a:pPr>
-            <a:r>
-              <a:rPr lang="en-US" altLang="zh-CN" dirty="0"/>
-              <a:t>2.</a:t>
-            </a:r>
-            <a:r>
-              <a:rPr lang="zh-CN" altLang="en-US" dirty="0"/>
-              <a:t>项目管理发展的标志性事件：</a:t>
-            </a:r>
-            <a:endParaRPr lang="en-US" altLang="zh-CN" dirty="0"/>
-          </a:p>
-          <a:p>
-            <a:pPr marL="0" lvl="1" indent="0" algn="just">
-              <a:lnSpc>
-                <a:spcPct val="150000"/>
-              </a:lnSpc>
-              <a:spcBef>
-                <a:spcPts val="0"/>
-              </a:spcBef>
-              <a:buFont typeface="Wingdings" panose="05000000000000000000" pitchFamily="2" charset="2"/>
-              <a:buChar char="Ø"/>
-              <a:defRPr/>
-            </a:pPr>
-            <a:r>
-              <a:rPr lang="en-US" altLang="zh-CN" dirty="0"/>
-              <a:t>1917</a:t>
-            </a:r>
-            <a:r>
-              <a:rPr lang="zh-CN" altLang="en-US" dirty="0"/>
-              <a:t>甘特图</a:t>
-            </a:r>
-            <a:r>
-              <a:rPr lang="en-US" altLang="zh-CN" dirty="0"/>
-              <a:t>——1957</a:t>
-            </a:r>
-            <a:r>
-              <a:rPr lang="zh-CN" altLang="en-US" dirty="0"/>
-              <a:t>关键路径法（</a:t>
-            </a:r>
-            <a:r>
-              <a:rPr lang="en-US" altLang="zh-CN" dirty="0"/>
-              <a:t>CPM</a:t>
-            </a:r>
-            <a:r>
-              <a:rPr lang="zh-CN" altLang="en-US" dirty="0"/>
-              <a:t>）</a:t>
-            </a:r>
-            <a:r>
-              <a:rPr lang="en-US" altLang="zh-CN" dirty="0"/>
-              <a:t>——1958</a:t>
-            </a:r>
-            <a:r>
-              <a:rPr lang="zh-CN" altLang="en-US" dirty="0"/>
-              <a:t>计划评审技术（</a:t>
-            </a:r>
-            <a:r>
-              <a:rPr lang="en-US" altLang="zh-CN" dirty="0"/>
-              <a:t>PERT</a:t>
-            </a:r>
-            <a:r>
-              <a:rPr lang="zh-CN" altLang="en-US" dirty="0"/>
-              <a:t>）</a:t>
-            </a:r>
-            <a:r>
-              <a:rPr lang="en-US" altLang="zh-CN" dirty="0"/>
-              <a:t>——</a:t>
-            </a:r>
-            <a:r>
-              <a:rPr lang="zh-CN" altLang="en-US" dirty="0"/>
-              <a:t>阿波罗登月计划采用的网络计划技术</a:t>
-            </a:r>
-            <a:endParaRPr lang="en-US" altLang="zh-CN" dirty="0"/>
-          </a:p>
-        </p:txBody>
-      </p:sp>
-      <p:sp>
-        <p:nvSpPr>
-          <p:cNvPr id="14340" name="Line 7">
-            <a:extLst>
-              <a:ext uri="{FF2B5EF4-FFF2-40B4-BE49-F238E27FC236}">
-                <a16:creationId xmlns:a16="http://schemas.microsoft.com/office/drawing/2014/main" id="{F00BD3F0-4320-490D-96F9-168B09013020}"/>
-              </a:ext>
-            </a:extLst>
-          </p:cNvPr>
-          <p:cNvSpPr>
-            <a:spLocks noChangeShapeType="1"/>
-          </p:cNvSpPr>
-          <p:nvPr/>
-        </p:nvSpPr>
-        <p:spPr bwMode="auto">
-          <a:xfrm>
-            <a:off x="0" y="476250"/>
-            <a:ext cx="9144000" cy="0"/>
-          </a:xfrm>
-          <a:prstGeom prst="line">
-            <a:avLst/>
-          </a:prstGeom>
-          <a:noFill/>
-          <a:ln w="9525">
-            <a:solidFill>
-              <a:srgbClr val="9900CC"/>
-            </a:solidFill>
-            <a:round/>
-            <a:headEnd/>
-            <a:tailEnd/>
-          </a:ln>
-          <a:extLst>
-            <a:ext uri="{909E8E84-426E-40DD-AFC4-6F175D3DCCD1}">
-              <a14:hiddenFill xmlns:a14="http://schemas.microsoft.com/office/drawing/2010/main">
-                <a:noFill/>
-              </a14:hiddenFill>
-            </a:ext>
-          </a:extLst>
-        </p:spPr>
-        <p:txBody>
-          <a:bodyPr/>
-          <a:lstStyle/>
-          <a:p>
-            <a:endParaRPr lang="zh-CN" altLang="en-US"/>
           </a:p>
         </p:txBody>
       </p:sp>
@@ -31080,104 +31357,6 @@
                       </p:childTnLst>
                     </p:cTn>
                   </p:par>
-                  <p:par>
-                    <p:cTn id="19" fill="hold">
-                      <p:stCondLst>
-                        <p:cond delay="indefinite"/>
-                      </p:stCondLst>
-                      <p:childTnLst>
-                        <p:par>
-                          <p:cTn id="20" fill="hold">
-                            <p:stCondLst>
-                              <p:cond delay="0"/>
-                            </p:stCondLst>
-                            <p:childTnLst>
-                              <p:par>
-                                <p:cTn id="21" presetID="1" presetClass="entr" presetSubtype="0" fill="hold" nodeType="clickEffect">
-                                  <p:stCondLst>
-                                    <p:cond delay="0"/>
-                                  </p:stCondLst>
-                                  <p:childTnLst>
-                                    <p:set>
-                                      <p:cBhvr>
-                                        <p:cTn id="22" dur="1" fill="hold">
-                                          <p:stCondLst>
-                                            <p:cond delay="0"/>
-                                          </p:stCondLst>
-                                        </p:cTn>
-                                        <p:tgtEl>
-                                          <p:spTgt spid="7170">
-                                            <p:txEl>
-                                              <p:pRg st="6" end="6"/>
-                                            </p:txEl>
-                                          </p:spTgt>
-                                        </p:tgtEl>
-                                        <p:attrNameLst>
-                                          <p:attrName>style.visibility</p:attrName>
-                                        </p:attrNameLst>
-                                      </p:cBhvr>
-                                      <p:to>
-                                        <p:strVal val="visible"/>
-                                      </p:to>
-                                    </p:set>
-                                  </p:childTnLst>
-                                </p:cTn>
-                              </p:par>
-                            </p:childTnLst>
-                          </p:cTn>
-                        </p:par>
-                      </p:childTnLst>
-                    </p:cTn>
-                  </p:par>
-                  <p:par>
-                    <p:cTn id="23" fill="hold">
-                      <p:stCondLst>
-                        <p:cond delay="indefinite"/>
-                      </p:stCondLst>
-                      <p:childTnLst>
-                        <p:par>
-                          <p:cTn id="24" fill="hold">
-                            <p:stCondLst>
-                              <p:cond delay="0"/>
-                            </p:stCondLst>
-                            <p:childTnLst>
-                              <p:par>
-                                <p:cTn id="25" presetID="1" presetClass="entr" presetSubtype="0" fill="hold" nodeType="clickEffect">
-                                  <p:stCondLst>
-                                    <p:cond delay="0"/>
-                                  </p:stCondLst>
-                                  <p:childTnLst>
-                                    <p:set>
-                                      <p:cBhvr>
-                                        <p:cTn id="26" dur="1" fill="hold">
-                                          <p:stCondLst>
-                                            <p:cond delay="0"/>
-                                          </p:stCondLst>
-                                        </p:cTn>
-                                        <p:tgtEl>
-                                          <p:spTgt spid="7170">
-                                            <p:txEl>
-                                              <p:pRg st="7" end="7"/>
-                                            </p:txEl>
-                                          </p:spTgt>
-                                        </p:tgtEl>
-                                        <p:attrNameLst>
-                                          <p:attrName>style.visibility</p:attrName>
-                                        </p:attrNameLst>
-                                      </p:cBhvr>
-                                      <p:to>
-                                        <p:strVal val="visible"/>
-                                      </p:to>
-                                    </p:set>
-                                  </p:childTnLst>
-                                </p:cTn>
-                              </p:par>
-                            </p:childTnLst>
-                          </p:cTn>
-                        </p:par>
-                      </p:childTnLst>
-                    </p:cTn>
-                  </p:par>
                 </p:childTnLst>
               </p:cTn>
               <p:prevCondLst>
@@ -31222,10 +31401,10 @@
       </p:grpSpPr>
       <p:sp>
         <p:nvSpPr>
-          <p:cNvPr id="15362" name="Rectangle 5">
+          <p:cNvPr id="7170" name="Rectangle 5">
             <a:extLst>
               <a:ext uri="{FF2B5EF4-FFF2-40B4-BE49-F238E27FC236}">
-                <a16:creationId xmlns:a16="http://schemas.microsoft.com/office/drawing/2014/main" id="{15A83B6D-2E79-4AB4-A2DC-C846F8A45758}"/>
+                <a16:creationId xmlns:a16="http://schemas.microsoft.com/office/drawing/2014/main" id="{C218356E-3E85-4885-80D9-61ABEA29E859}"/>
               </a:ext>
             </a:extLst>
           </p:cNvPr>
@@ -31238,203 +31417,8 @@
         </p:nvSpPr>
         <p:spPr>
           <a:xfrm>
-            <a:off x="0" y="760413"/>
-            <a:ext cx="8229600" cy="4525962"/>
-          </a:xfrm>
-        </p:spPr>
-        <p:txBody>
-          <a:bodyPr/>
-          <a:lstStyle/>
-          <a:p>
-            <a:r>
-              <a:rPr lang="en-US" altLang="zh-CN" sz="4000"/>
-              <a:t>1.1.1 </a:t>
-            </a:r>
-            <a:r>
-              <a:rPr lang="zh-CN" altLang="en-US" sz="4000"/>
-              <a:t>项目管理的由来与发展</a:t>
-            </a:r>
-          </a:p>
-          <a:p>
-            <a:pPr marL="914400" lvl="1" indent="-514350">
-              <a:buFontTx/>
-              <a:buNone/>
-            </a:pPr>
-            <a:endParaRPr lang="en-US" altLang="zh-CN"/>
-          </a:p>
-          <a:p>
-            <a:pPr marL="914400" lvl="1" indent="-514350">
-              <a:buFontTx/>
-              <a:buNone/>
-            </a:pPr>
-            <a:r>
-              <a:rPr lang="en-US" altLang="zh-CN"/>
-              <a:t>3.  </a:t>
-            </a:r>
-            <a:r>
-              <a:rPr lang="zh-CN" altLang="en-US"/>
-              <a:t>项目管理两阶段</a:t>
-            </a:r>
-            <a:r>
-              <a:rPr lang="en-US" altLang="zh-CN"/>
-              <a:t>: </a:t>
-            </a:r>
-          </a:p>
-          <a:p>
-            <a:pPr marL="914400" lvl="1" indent="-514350">
-              <a:buFont typeface="Wingdings" panose="05000000000000000000" pitchFamily="2" charset="2"/>
-              <a:buChar char="Ø"/>
-            </a:pPr>
-            <a:r>
-              <a:rPr lang="en-US" altLang="zh-CN"/>
-              <a:t>20</a:t>
-            </a:r>
-            <a:r>
-              <a:rPr lang="zh-CN" altLang="en-US"/>
-              <a:t>世纪</a:t>
-            </a:r>
-            <a:r>
-              <a:rPr lang="en-US" altLang="zh-CN"/>
-              <a:t>80</a:t>
-            </a:r>
-            <a:r>
-              <a:rPr lang="zh-CN" altLang="en-US"/>
-              <a:t>年代作为分水岭</a:t>
-            </a:r>
-            <a:r>
-              <a:rPr lang="en-US" altLang="zh-CN"/>
-              <a:t>,</a:t>
-            </a:r>
-            <a:r>
-              <a:rPr lang="zh-CN" altLang="en-US"/>
-              <a:t>分为传统的项目管理与现代项目管理</a:t>
-            </a:r>
-            <a:endParaRPr lang="en-US" altLang="zh-CN"/>
-          </a:p>
-          <a:p>
-            <a:pPr marL="914400" lvl="1" indent="-514350">
-              <a:buFont typeface="Wingdings" panose="05000000000000000000" pitchFamily="2" charset="2"/>
-              <a:buChar char="Ø"/>
-            </a:pPr>
-            <a:r>
-              <a:rPr lang="zh-CN" altLang="en-US"/>
-              <a:t>传统的项目管理主要运用于建筑、国防、航天等少数行业的工程项目</a:t>
-            </a:r>
-            <a:endParaRPr lang="en-US" altLang="zh-CN"/>
-          </a:p>
-          <a:p>
-            <a:pPr marL="914400" lvl="1" indent="-514350">
-              <a:buFont typeface="Wingdings" panose="05000000000000000000" pitchFamily="2" charset="2"/>
-              <a:buChar char="Ø"/>
-            </a:pPr>
-            <a:r>
-              <a:rPr lang="zh-CN" altLang="en-US"/>
-              <a:t>现代项目管理已经泛化至一切一次性的活动，尤其是</a:t>
-            </a:r>
-            <a:r>
-              <a:rPr lang="en-US" altLang="zh-CN"/>
-              <a:t>IT</a:t>
-            </a:r>
-            <a:r>
-              <a:rPr lang="zh-CN" altLang="en-US"/>
-              <a:t>行业</a:t>
-            </a:r>
-            <a:endParaRPr lang="en-US" altLang="zh-CN"/>
-          </a:p>
-        </p:txBody>
-      </p:sp>
-      <p:sp>
-        <p:nvSpPr>
-          <p:cNvPr id="15364" name="Line 7">
-            <a:extLst>
-              <a:ext uri="{FF2B5EF4-FFF2-40B4-BE49-F238E27FC236}">
-                <a16:creationId xmlns:a16="http://schemas.microsoft.com/office/drawing/2014/main" id="{264B0349-A1AE-4EAF-9B6E-3B340892A9B1}"/>
-              </a:ext>
-            </a:extLst>
-          </p:cNvPr>
-          <p:cNvSpPr>
-            <a:spLocks noChangeShapeType="1"/>
-          </p:cNvSpPr>
-          <p:nvPr/>
-        </p:nvSpPr>
-        <p:spPr bwMode="auto">
-          <a:xfrm>
-            <a:off x="0" y="476250"/>
-            <a:ext cx="9144000" cy="0"/>
-          </a:xfrm>
-          <a:prstGeom prst="line">
-            <a:avLst/>
-          </a:prstGeom>
-          <a:noFill/>
-          <a:ln w="9525">
-            <a:solidFill>
-              <a:srgbClr val="9900CC"/>
-            </a:solidFill>
-            <a:round/>
-            <a:headEnd/>
-            <a:tailEnd/>
-          </a:ln>
-          <a:extLst>
-            <a:ext uri="{909E8E84-426E-40DD-AFC4-6F175D3DCCD1}">
-              <a14:hiddenFill xmlns:a14="http://schemas.microsoft.com/office/drawing/2010/main">
-                <a:noFill/>
-              </a14:hiddenFill>
-            </a:ext>
-          </a:extLst>
-        </p:spPr>
-        <p:txBody>
-          <a:bodyPr/>
-          <a:lstStyle/>
-          <a:p>
-            <a:endParaRPr lang="zh-CN" altLang="en-US"/>
-          </a:p>
-        </p:txBody>
-      </p:sp>
-    </p:spTree>
-  </p:cSld>
-  <p:clrMapOvr>
-    <a:masterClrMapping/>
-  </p:clrMapOvr>
-</p:sld>
-</file>
-
-<file path=ppt/slides/slide9.xml><?xml version="1.0" encoding="utf-8"?>
-<p:sld xmlns:a="http://schemas.openxmlformats.org/drawingml/2006/main" xmlns:r="http://schemas.openxmlformats.org/officeDocument/2006/relationships" xmlns:p="http://schemas.openxmlformats.org/presentationml/2006/main">
-  <p:cSld>
-    <p:spTree>
-      <p:nvGrpSpPr>
-        <p:cNvPr id="1" name=""/>
-        <p:cNvGrpSpPr/>
-        <p:nvPr/>
-      </p:nvGrpSpPr>
-      <p:grpSpPr>
-        <a:xfrm>
-          <a:off x="0" y="0"/>
-          <a:ext cx="0" cy="0"/>
-          <a:chOff x="0" y="0"/>
-          <a:chExt cx="0" cy="0"/>
-        </a:xfrm>
-      </p:grpSpPr>
-      <p:sp>
-        <p:nvSpPr>
-          <p:cNvPr id="9218" name="Rectangle 5">
-            <a:extLst>
-              <a:ext uri="{FF2B5EF4-FFF2-40B4-BE49-F238E27FC236}">
-                <a16:creationId xmlns:a16="http://schemas.microsoft.com/office/drawing/2014/main" id="{2AD482B6-3F37-42EC-9122-5AFB93B58125}"/>
-              </a:ext>
-            </a:extLst>
-          </p:cNvPr>
-          <p:cNvSpPr>
-            <a:spLocks noGrp="1" noChangeArrowheads="1"/>
-          </p:cNvSpPr>
-          <p:nvPr>
-            <p:ph type="body" idx="4294967295"/>
-          </p:nvPr>
-        </p:nvSpPr>
-        <p:spPr>
-          <a:xfrm>
-            <a:off x="179512" y="548680"/>
-            <a:ext cx="8568952" cy="6048670"/>
+            <a:off x="-38" y="188640"/>
+            <a:ext cx="8964526" cy="6336704"/>
           </a:xfrm>
         </p:spPr>
         <p:txBody>
@@ -31443,49 +31427,47 @@
           </a:bodyPr>
           <a:lstStyle/>
           <a:p>
-            <a:pPr>
+            <a:pPr indent="0" algn="just">
+              <a:lnSpc>
+                <a:spcPct val="100000"/>
+              </a:lnSpc>
               <a:defRPr/>
             </a:pPr>
             <a:r>
               <a:rPr lang="en-US" altLang="zh-CN" sz="4000" dirty="0"/>
-              <a:t>1.1.2 </a:t>
+              <a:t>1.1.1 </a:t>
             </a:r>
             <a:r>
               <a:rPr lang="zh-CN" altLang="en-US" sz="4000" dirty="0"/>
-              <a:t>推广项目管理的权威机构</a:t>
+              <a:t>项目管理的由来与发展</a:t>
             </a:r>
             <a:endParaRPr lang="en-US" altLang="zh-CN" dirty="0"/>
           </a:p>
           <a:p>
-            <a:pPr marL="0" lvl="1" indent="0">
+            <a:pPr marL="0" lvl="1" indent="0" algn="just">
               <a:lnSpc>
-                <a:spcPct val="160000"/>
+                <a:spcPct val="150000"/>
               </a:lnSpc>
               <a:spcBef>
                 <a:spcPts val="0"/>
               </a:spcBef>
-              <a:buFontTx/>
-              <a:buAutoNum type="arabicPeriod"/>
+              <a:buNone/>
               <a:defRPr/>
             </a:pPr>
             <a:r>
+              <a:rPr lang="en-US" altLang="zh-CN" dirty="0"/>
+              <a:t>2.</a:t>
+            </a:r>
+            <a:r>
               <a:rPr lang="zh-CN" altLang="en-US" dirty="0"/>
-              <a:t>美国项目管理学会（</a:t>
-            </a:r>
-            <a:r>
-              <a:rPr lang="en-US" altLang="zh-CN" dirty="0"/>
-              <a:t>PMI</a:t>
-            </a:r>
-            <a:r>
-              <a:rPr lang="zh-CN" altLang="en-US" dirty="0"/>
-              <a:t>）</a:t>
+              <a:t>项目管理的起源与发展</a:t>
             </a:r>
             <a:endParaRPr lang="en-US" altLang="zh-CN" dirty="0"/>
           </a:p>
           <a:p>
-            <a:pPr marL="0" lvl="1" indent="0">
+            <a:pPr marL="0" lvl="1" indent="0" algn="just">
               <a:lnSpc>
-                <a:spcPct val="160000"/>
+                <a:spcPct val="150000"/>
               </a:lnSpc>
               <a:spcBef>
                 <a:spcPts val="0"/>
@@ -31496,34 +31478,18 @@
             </a:pPr>
             <a:r>
               <a:rPr lang="en-US" altLang="zh-CN" dirty="0"/>
-              <a:t>PMI</a:t>
+              <a:t>1917</a:t>
             </a:r>
             <a:r>
               <a:rPr lang="zh-CN" altLang="en-US" dirty="0"/>
-              <a:t>（</a:t>
-            </a:r>
-            <a:r>
-              <a:rPr lang="en-US" altLang="zh-CN" dirty="0"/>
-              <a:t>Project Management Institute</a:t>
-            </a:r>
-            <a:r>
-              <a:rPr lang="zh-CN" altLang="en-US" dirty="0"/>
-              <a:t>），是成立于</a:t>
-            </a:r>
-            <a:r>
-              <a:rPr lang="en-US" altLang="zh-CN" dirty="0"/>
-              <a:t>1969</a:t>
-            </a:r>
-            <a:r>
-              <a:rPr lang="zh-CN" altLang="en-US" dirty="0"/>
-              <a:t>年一个国际性组织，是项目管理专业领域中最大的、由研究人员、学者、顾问和经理组成的全球性专业组织</a:t>
+              <a:t>甘特图</a:t>
             </a:r>
             <a:endParaRPr lang="en-US" altLang="zh-CN" dirty="0"/>
           </a:p>
           <a:p>
-            <a:pPr marL="0" lvl="1" indent="0">
+            <a:pPr marL="0" lvl="1" indent="0" algn="just">
               <a:lnSpc>
-                <a:spcPct val="160000"/>
+                <a:spcPct val="150000"/>
               </a:lnSpc>
               <a:spcBef>
                 <a:spcPts val="0"/>
@@ -31533,63 +31499,27 @@
               <a:defRPr/>
             </a:pPr>
             <a:r>
+              <a:rPr lang="en-US" altLang="zh-CN" dirty="0"/>
+              <a:t>1957</a:t>
+            </a:r>
+            <a:r>
               <a:rPr lang="zh-CN" altLang="en-US" dirty="0"/>
-              <a:t>其推出了项目管理知识体系指南（</a:t>
+              <a:t>关键路径法（</a:t>
             </a:r>
             <a:r>
               <a:rPr lang="en-US" altLang="zh-CN" dirty="0"/>
-              <a:t>Project Management Body of Knowledge</a:t>
+              <a:t>CPM</a:t>
             </a:r>
             <a:r>
               <a:rPr lang="zh-CN" altLang="en-US" dirty="0"/>
-              <a:t>，</a:t>
-            </a:r>
-            <a:r>
-              <a:rPr lang="en-US" altLang="zh-CN" dirty="0"/>
-              <a:t>PMBOK</a:t>
-            </a:r>
-            <a:r>
-              <a:rPr lang="zh-CN" altLang="en-US" dirty="0"/>
-              <a:t>）是项目管理发展史上地一个里程碑。</a:t>
-            </a:r>
-            <a:r>
-              <a:rPr lang="en-US" altLang="zh-CN" dirty="0"/>
-              <a:t>PMBOK</a:t>
-            </a:r>
-            <a:r>
-              <a:rPr lang="zh-CN" altLang="en-US" dirty="0"/>
-              <a:t>定义了项目管理的</a:t>
-            </a:r>
-            <a:r>
-              <a:rPr lang="zh-CN" altLang="en-US" dirty="0">
-                <a:solidFill>
-                  <a:srgbClr val="FF0000"/>
-                </a:solidFill>
-              </a:rPr>
-              <a:t>十大知识领域</a:t>
-            </a:r>
-            <a:r>
-              <a:rPr lang="zh-CN" altLang="en-US" dirty="0"/>
-              <a:t>和</a:t>
-            </a:r>
-            <a:r>
-              <a:rPr lang="zh-CN" altLang="en-US" dirty="0">
-                <a:solidFill>
-                  <a:srgbClr val="FF0000"/>
-                </a:solidFill>
-              </a:rPr>
-              <a:t>五大管理过程</a:t>
-            </a:r>
-            <a:r>
-              <a:rPr lang="zh-CN" altLang="en-US" dirty="0"/>
-              <a:t>。</a:t>
+              <a:t>）</a:t>
             </a:r>
             <a:endParaRPr lang="en-US" altLang="zh-CN" dirty="0"/>
           </a:p>
           <a:p>
-            <a:pPr marL="0" lvl="1" indent="0">
+            <a:pPr marL="0" lvl="1" indent="0" algn="just">
               <a:lnSpc>
-                <a:spcPct val="160000"/>
+                <a:spcPct val="150000"/>
               </a:lnSpc>
               <a:spcBef>
                 <a:spcPts val="0"/>
@@ -31600,80 +31530,48 @@
             </a:pPr>
             <a:r>
               <a:rPr lang="en-US" altLang="zh-CN" dirty="0"/>
-              <a:t>PMI</a:t>
+              <a:t>1958</a:t>
             </a:r>
             <a:r>
               <a:rPr lang="zh-CN" altLang="en-US" dirty="0"/>
-              <a:t>组织的项目管理资格认证考试（</a:t>
+              <a:t>计划评审技术（</a:t>
             </a:r>
             <a:r>
               <a:rPr lang="en-US" altLang="zh-CN" dirty="0"/>
-              <a:t>PMP</a:t>
+              <a:t>PERT</a:t>
             </a:r>
             <a:r>
               <a:rPr lang="zh-CN" altLang="en-US" dirty="0"/>
-              <a:t>，</a:t>
-            </a:r>
-            <a:r>
-              <a:rPr lang="en-US" altLang="zh-CN" dirty="0"/>
-              <a:t>Project Management Professional</a:t>
-            </a:r>
+              <a:t>）</a:t>
+            </a:r>
+            <a:endParaRPr lang="en-US" altLang="zh-CN" dirty="0"/>
+          </a:p>
+          <a:p>
+            <a:pPr marL="0" lvl="1" indent="0" algn="just">
+              <a:lnSpc>
+                <a:spcPct val="150000"/>
+              </a:lnSpc>
+              <a:spcBef>
+                <a:spcPts val="0"/>
+              </a:spcBef>
+              <a:buFont typeface="Wingdings" panose="05000000000000000000" pitchFamily="2" charset="2"/>
+              <a:buChar char="Ø"/>
+              <a:defRPr/>
+            </a:pPr>
             <a:r>
               <a:rPr lang="zh-CN" altLang="en-US" dirty="0"/>
-              <a:t>）已经成为项目管理领域的权威认证。</a:t>
+              <a:t>阿波罗登月计划采用的网络计划技术</a:t>
             </a:r>
             <a:endParaRPr lang="en-US" altLang="zh-CN" dirty="0"/>
-          </a:p>
-        </p:txBody>
-      </p:sp>
-      <p:sp>
-        <p:nvSpPr>
-          <p:cNvPr id="16388" name="Line 7">
-            <a:extLst>
-              <a:ext uri="{FF2B5EF4-FFF2-40B4-BE49-F238E27FC236}">
-                <a16:creationId xmlns:a16="http://schemas.microsoft.com/office/drawing/2014/main" id="{9910477A-33AD-4F94-961F-2ADBEC6D3793}"/>
-              </a:ext>
-            </a:extLst>
-          </p:cNvPr>
-          <p:cNvSpPr>
-            <a:spLocks noChangeShapeType="1"/>
-          </p:cNvSpPr>
-          <p:nvPr/>
-        </p:nvSpPr>
-        <p:spPr bwMode="auto">
-          <a:xfrm>
-            <a:off x="0" y="476250"/>
-            <a:ext cx="9144000" cy="0"/>
-          </a:xfrm>
-          <a:prstGeom prst="line">
-            <a:avLst/>
-          </a:prstGeom>
-          <a:noFill/>
-          <a:ln w="9525">
-            <a:solidFill>
-              <a:srgbClr val="9900CC"/>
-            </a:solidFill>
-            <a:round/>
-            <a:headEnd/>
-            <a:tailEnd/>
-          </a:ln>
-          <a:extLst>
-            <a:ext uri="{909E8E84-426E-40DD-AFC4-6F175D3DCCD1}">
-              <a14:hiddenFill xmlns:a14="http://schemas.microsoft.com/office/drawing/2010/main">
-                <a:noFill/>
-              </a14:hiddenFill>
-            </a:ext>
-          </a:extLst>
-        </p:spPr>
-        <p:txBody>
-          <a:bodyPr/>
-          <a:lstStyle/>
-          <a:p>
-            <a:endParaRPr lang="zh-CN" altLang="en-US"/>
           </a:p>
         </p:txBody>
       </p:sp>
     </p:spTree>
+    <p:extLst>
+      <p:ext uri="{BB962C8B-B14F-4D97-AF65-F5344CB8AC3E}">
+        <p14:creationId xmlns:p14="http://schemas.microsoft.com/office/powerpoint/2010/main" val="3106134951"/>
+      </p:ext>
+    </p:extLst>
   </p:cSld>
   <p:clrMapOvr>
     <a:masterClrMapping/>
@@ -31712,9 +31610,9 @@
                                           </p:stCondLst>
                                         </p:cTn>
                                         <p:tgtEl>
-                                          <p:spTgt spid="9218">
+                                          <p:spTgt spid="7170">
                                             <p:txEl>
-                                              <p:pRg st="3" end="3"/>
+                                              <p:pRg st="1" end="1"/>
                                             </p:txEl>
                                           </p:spTgt>
                                         </p:tgtEl>
@@ -31761,9 +31659,156 @@
                                           </p:stCondLst>
                                         </p:cTn>
                                         <p:tgtEl>
-                                          <p:spTgt spid="9218">
+                                          <p:spTgt spid="7170">
+                                            <p:txEl>
+                                              <p:pRg st="2" end="2"/>
+                                            </p:txEl>
+                                          </p:spTgt>
+                                        </p:tgtEl>
+                                        <p:attrNameLst>
+                                          <p:attrName>style.visibility</p:attrName>
+                                        </p:attrNameLst>
+                                      </p:cBhvr>
+                                      <p:to>
+                                        <p:strVal val="visible"/>
+                                      </p:to>
+                                    </p:set>
+                                  </p:childTnLst>
+                                </p:cTn>
+                              </p:par>
+                            </p:childTnLst>
+                          </p:cTn>
+                        </p:par>
+                      </p:childTnLst>
+                    </p:cTn>
+                  </p:par>
+                  <p:par>
+                    <p:cTn id="11" fill="hold">
+                      <p:stCondLst>
+                        <p:cond delay="indefinite"/>
+                      </p:stCondLst>
+                      <p:childTnLst>
+                        <p:par>
+                          <p:cTn id="12" fill="hold">
+                            <p:stCondLst>
+                              <p:cond delay="0"/>
+                            </p:stCondLst>
+                            <p:childTnLst>
+                              <p:par>
+                                <p:cTn id="13" presetID="1" presetClass="entr" presetSubtype="0" fill="hold" nodeType="clickEffect">
+                                  <p:stCondLst>
+                                    <p:cond delay="0"/>
+                                  </p:stCondLst>
+                                  <p:childTnLst>
+                                    <p:set>
+                                      <p:cBhvr>
+                                        <p:cTn id="14" dur="1" fill="hold">
+                                          <p:stCondLst>
+                                            <p:cond delay="0"/>
+                                          </p:stCondLst>
+                                        </p:cTn>
+                                        <p:tgtEl>
+                                          <p:spTgt spid="7170">
+                                            <p:txEl>
+                                              <p:pRg st="3" end="3"/>
+                                            </p:txEl>
+                                          </p:spTgt>
+                                        </p:tgtEl>
+                                        <p:attrNameLst>
+                                          <p:attrName>style.visibility</p:attrName>
+                                        </p:attrNameLst>
+                                      </p:cBhvr>
+                                      <p:to>
+                                        <p:strVal val="visible"/>
+                                      </p:to>
+                                    </p:set>
+                                  </p:childTnLst>
+                                </p:cTn>
+                              </p:par>
+                            </p:childTnLst>
+                          </p:cTn>
+                        </p:par>
+                      </p:childTnLst>
+                    </p:cTn>
+                  </p:par>
+                  <p:par>
+                    <p:cTn id="15" fill="hold">
+                      <p:stCondLst>
+                        <p:cond delay="indefinite"/>
+                      </p:stCondLst>
+                      <p:childTnLst>
+                        <p:par>
+                          <p:cTn id="16" fill="hold">
+                            <p:stCondLst>
+                              <p:cond delay="0"/>
+                            </p:stCondLst>
+                            <p:childTnLst>
+                              <p:par>
+                                <p:cTn id="17" presetID="1" presetClass="entr" presetSubtype="0" fill="hold" nodeType="clickEffect">
+                                  <p:stCondLst>
+                                    <p:cond delay="0"/>
+                                  </p:stCondLst>
+                                  <p:childTnLst>
+                                    <p:set>
+                                      <p:cBhvr>
+                                        <p:cTn id="18" dur="1" fill="hold">
+                                          <p:stCondLst>
+                                            <p:cond delay="0"/>
+                                          </p:stCondLst>
+                                        </p:cTn>
+                                        <p:tgtEl>
+                                          <p:spTgt spid="7170">
                                             <p:txEl>
                                               <p:pRg st="4" end="4"/>
+                                            </p:txEl>
+                                          </p:spTgt>
+                                        </p:tgtEl>
+                                        <p:attrNameLst>
+                                          <p:attrName>style.visibility</p:attrName>
+                                        </p:attrNameLst>
+                                      </p:cBhvr>
+                                      <p:to>
+                                        <p:strVal val="visible"/>
+                                      </p:to>
+                                    </p:set>
+                                  </p:childTnLst>
+                                </p:cTn>
+                              </p:par>
+                            </p:childTnLst>
+                          </p:cTn>
+                        </p:par>
+                      </p:childTnLst>
+                    </p:cTn>
+                  </p:par>
+                  <p:par>
+                    <p:cTn id="19" fill="hold">
+                      <p:stCondLst>
+                        <p:cond delay="indefinite"/>
+                      </p:stCondLst>
+                      <p:childTnLst>
+                        <p:par>
+                          <p:cTn id="20" fill="hold">
+                            <p:stCondLst>
+                              <p:cond delay="0"/>
+                            </p:stCondLst>
+                            <p:childTnLst>
+                              <p:par>
+                                <p:cTn id="21" presetID="1" presetClass="entr" presetSubtype="0" fill="hold" nodeType="clickEffect">
+                                  <p:stCondLst>
+                                    <p:cond delay="0"/>
+                                  </p:stCondLst>
+                                  <p:childTnLst>
+                                    <p:set>
+                                      <p:cBhvr>
+                                        <p:cTn id="22" dur="1" fill="hold">
+                                          <p:stCondLst>
+                                            <p:cond delay="0"/>
+                                          </p:stCondLst>
+                                        </p:cTn>
+                                        <p:tgtEl>
+                                          <p:spTgt spid="7170">
+                                            <p:txEl>
+                                              <p:pRg st="5" end="5"/>
                                             </p:txEl>
                                           </p:spTgt>
                                         </p:tgtEl>
@@ -31806,6 +31851,203 @@
       </p:par>
     </p:tnLst>
   </p:timing>
+</p:sld>
+</file>
+
+<file path=ppt/slides/slide9.xml><?xml version="1.0" encoding="utf-8"?>
+<p:sld xmlns:a="http://schemas.openxmlformats.org/drawingml/2006/main" xmlns:r="http://schemas.openxmlformats.org/officeDocument/2006/relationships" xmlns:p="http://schemas.openxmlformats.org/presentationml/2006/main">
+  <p:cSld>
+    <p:spTree>
+      <p:nvGrpSpPr>
+        <p:cNvPr id="1" name=""/>
+        <p:cNvGrpSpPr/>
+        <p:nvPr/>
+      </p:nvGrpSpPr>
+      <p:grpSpPr>
+        <a:xfrm>
+          <a:off x="0" y="0"/>
+          <a:ext cx="0" cy="0"/>
+          <a:chOff x="0" y="0"/>
+          <a:chExt cx="0" cy="0"/>
+        </a:xfrm>
+      </p:grpSpPr>
+      <p:sp>
+        <p:nvSpPr>
+          <p:cNvPr id="15362" name="Rectangle 5">
+            <a:extLst>
+              <a:ext uri="{FF2B5EF4-FFF2-40B4-BE49-F238E27FC236}">
+                <a16:creationId xmlns:a16="http://schemas.microsoft.com/office/drawing/2014/main" id="{15A83B6D-2E79-4AB4-A2DC-C846F8A45758}"/>
+              </a:ext>
+            </a:extLst>
+          </p:cNvPr>
+          <p:cNvSpPr>
+            <a:spLocks noGrp="1" noChangeArrowheads="1"/>
+          </p:cNvSpPr>
+          <p:nvPr>
+            <p:ph type="body" idx="4294967295"/>
+          </p:nvPr>
+        </p:nvSpPr>
+        <p:spPr>
+          <a:xfrm>
+            <a:off x="0" y="760413"/>
+            <a:ext cx="8820472" cy="4525962"/>
+          </a:xfrm>
+        </p:spPr>
+        <p:txBody>
+          <a:bodyPr>
+            <a:noAutofit/>
+          </a:bodyPr>
+          <a:lstStyle/>
+          <a:p>
+            <a:r>
+              <a:rPr lang="en-US" altLang="zh-CN" sz="4000" dirty="0"/>
+              <a:t>1.1.1 </a:t>
+            </a:r>
+            <a:r>
+              <a:rPr lang="zh-CN" altLang="en-US" sz="4000" dirty="0"/>
+              <a:t>项目管理的由来与发展</a:t>
+            </a:r>
+          </a:p>
+          <a:p>
+            <a:pPr marL="914400" lvl="1" indent="-514350">
+              <a:buFontTx/>
+              <a:buNone/>
+            </a:pPr>
+            <a:endParaRPr lang="en-US" altLang="zh-CN" dirty="0"/>
+          </a:p>
+          <a:p>
+            <a:pPr marL="914400" lvl="1" indent="-514350">
+              <a:buFontTx/>
+              <a:buNone/>
+            </a:pPr>
+            <a:r>
+              <a:rPr lang="en-US" altLang="zh-CN" dirty="0"/>
+              <a:t>3.  </a:t>
+            </a:r>
+            <a:r>
+              <a:rPr lang="zh-CN" altLang="en-US" dirty="0"/>
+              <a:t>项目管理两阶段</a:t>
+            </a:r>
+            <a:r>
+              <a:rPr lang="en-US" altLang="zh-CN" dirty="0"/>
+              <a:t>: </a:t>
+            </a:r>
+          </a:p>
+          <a:p>
+            <a:pPr marL="914400" lvl="1" indent="-514350">
+              <a:buFont typeface="Wingdings" panose="05000000000000000000" pitchFamily="2" charset="2"/>
+              <a:buChar char="Ø"/>
+            </a:pPr>
+            <a:r>
+              <a:rPr lang="en-US" altLang="zh-CN" dirty="0"/>
+              <a:t>20</a:t>
+            </a:r>
+            <a:r>
+              <a:rPr lang="zh-CN" altLang="en-US" dirty="0"/>
+              <a:t>世纪</a:t>
+            </a:r>
+            <a:r>
+              <a:rPr lang="en-US" altLang="zh-CN" dirty="0"/>
+              <a:t>80</a:t>
+            </a:r>
+            <a:r>
+              <a:rPr lang="zh-CN" altLang="en-US" dirty="0"/>
+              <a:t>年代作为分水岭</a:t>
+            </a:r>
+            <a:r>
+              <a:rPr lang="en-US" altLang="zh-CN" dirty="0"/>
+              <a:t>,</a:t>
+            </a:r>
+            <a:r>
+              <a:rPr lang="zh-CN" altLang="en-US" dirty="0"/>
+              <a:t>分为传统的项目管理与现代项目管理；</a:t>
+            </a:r>
+            <a:endParaRPr lang="en-US" altLang="zh-CN" dirty="0"/>
+          </a:p>
+          <a:p>
+            <a:pPr marL="914400" lvl="1" indent="-514350">
+              <a:buFont typeface="Wingdings" panose="05000000000000000000" pitchFamily="2" charset="2"/>
+              <a:buChar char="Ø"/>
+            </a:pPr>
+            <a:r>
+              <a:rPr lang="zh-CN" altLang="en-US" dirty="0"/>
+              <a:t>传统的项目管理主要运用于建筑、国防、航天等少数行业的工程项目；</a:t>
+            </a:r>
+            <a:endParaRPr lang="en-US" altLang="zh-CN" dirty="0"/>
+          </a:p>
+          <a:p>
+            <a:pPr marL="914400" lvl="1" indent="-514350">
+              <a:buFont typeface="Wingdings" panose="05000000000000000000" pitchFamily="2" charset="2"/>
+              <a:buChar char="Ø"/>
+            </a:pPr>
+            <a:r>
+              <a:rPr lang="zh-CN" altLang="en-US" dirty="0"/>
+              <a:t>现代项目管理已经泛化至一切一次性的活动，尤其是</a:t>
+            </a:r>
+            <a:r>
+              <a:rPr lang="en-US" altLang="zh-CN" dirty="0"/>
+              <a:t>IT</a:t>
+            </a:r>
+            <a:r>
+              <a:rPr lang="zh-CN" altLang="en-US" dirty="0"/>
+              <a:t>行业。</a:t>
+            </a:r>
+            <a:endParaRPr lang="en-US" altLang="zh-CN" dirty="0"/>
+          </a:p>
+        </p:txBody>
+      </p:sp>
+      <p:sp>
+        <p:nvSpPr>
+          <p:cNvPr id="15364" name="Line 7">
+            <a:extLst>
+              <a:ext uri="{FF2B5EF4-FFF2-40B4-BE49-F238E27FC236}">
+                <a16:creationId xmlns:a16="http://schemas.microsoft.com/office/drawing/2014/main" id="{264B0349-A1AE-4EAF-9B6E-3B340892A9B1}"/>
+              </a:ext>
+            </a:extLst>
+          </p:cNvPr>
+          <p:cNvSpPr>
+            <a:spLocks noChangeShapeType="1"/>
+          </p:cNvSpPr>
+          <p:nvPr/>
+        </p:nvSpPr>
+        <p:spPr bwMode="auto">
+          <a:xfrm>
+            <a:off x="0" y="476250"/>
+            <a:ext cx="9144000" cy="0"/>
+          </a:xfrm>
+          <a:prstGeom prst="line">
+            <a:avLst/>
+          </a:prstGeom>
+          <a:noFill/>
+          <a:ln w="9525">
+            <a:solidFill>
+              <a:srgbClr val="9900CC"/>
+            </a:solidFill>
+            <a:round/>
+            <a:headEnd/>
+            <a:tailEnd/>
+          </a:ln>
+          <a:extLst>
+            <a:ext uri="{909E8E84-426E-40DD-AFC4-6F175D3DCCD1}">
+              <a14:hiddenFill xmlns:a14="http://schemas.microsoft.com/office/drawing/2010/main">
+                <a:noFill/>
+              </a14:hiddenFill>
+            </a:ext>
+          </a:extLst>
+        </p:spPr>
+        <p:txBody>
+          <a:bodyPr/>
+          <a:lstStyle/>
+          <a:p>
+            <a:endParaRPr lang="zh-CN" altLang="en-US"/>
+          </a:p>
+        </p:txBody>
+      </p:sp>
+    </p:spTree>
+  </p:cSld>
+  <p:clrMapOvr>
+    <a:masterClrMapping/>
+  </p:clrMapOvr>
 </p:sld>
 </file>
 

--- a/第1章 信息系统项目的特点与规划.pptx
+++ b/第1章 信息系统项目的特点与规划.pptx
@@ -347,7 +347,7 @@
               <a:pPr>
                 <a:defRPr/>
               </a:pPr>
-              <a:t>3/1/2026</a:t>
+              <a:t>3/4/2026</a:t>
             </a:fld>
             <a:endParaRPr lang="en-US" altLang="zh-CN"/>
           </a:p>
@@ -3049,7 +3049,7 @@
           <a:p>
             <a:fld id="{48A87A34-81AB-432B-8DAE-1953F412C126}" type="datetimeFigureOut">
               <a:rPr lang="en-US" smtClean="0"/>
-              <a:t>3/1/2026</a:t>
+              <a:t>3/4/2026</a:t>
             </a:fld>
             <a:endParaRPr lang="en-US" dirty="0"/>
           </a:p>
@@ -3219,7 +3219,7 @@
           <a:p>
             <a:fld id="{48A87A34-81AB-432B-8DAE-1953F412C126}" type="datetimeFigureOut">
               <a:rPr lang="en-US" smtClean="0"/>
-              <a:t>3/1/2026</a:t>
+              <a:t>3/4/2026</a:t>
             </a:fld>
             <a:endParaRPr lang="en-US" dirty="0"/>
           </a:p>
@@ -3463,7 +3463,7 @@
           <a:p>
             <a:fld id="{48A87A34-81AB-432B-8DAE-1953F412C126}" type="datetimeFigureOut">
               <a:rPr lang="en-US" smtClean="0"/>
-              <a:t>3/1/2026</a:t>
+              <a:t>3/4/2026</a:t>
             </a:fld>
             <a:endParaRPr lang="en-US" dirty="0"/>
           </a:p>
@@ -3695,7 +3695,7 @@
           <a:p>
             <a:fld id="{48A87A34-81AB-432B-8DAE-1953F412C126}" type="datetimeFigureOut">
               <a:rPr lang="en-US" smtClean="0"/>
-              <a:t>3/1/2026</a:t>
+              <a:t>3/4/2026</a:t>
             </a:fld>
             <a:endParaRPr lang="en-US" dirty="0"/>
           </a:p>
@@ -4166,7 +4166,7 @@
           <a:p>
             <a:fld id="{48A87A34-81AB-432B-8DAE-1953F412C126}" type="datetimeFigureOut">
               <a:rPr lang="en-US" smtClean="0"/>
-              <a:t>3/1/2026</a:t>
+              <a:t>3/4/2026</a:t>
             </a:fld>
             <a:endParaRPr lang="en-US" dirty="0"/>
           </a:p>
@@ -4284,7 +4284,7 @@
           <a:p>
             <a:fld id="{48A87A34-81AB-432B-8DAE-1953F412C126}" type="datetimeFigureOut">
               <a:rPr lang="en-US" smtClean="0"/>
-              <a:t>3/1/2026</a:t>
+              <a:t>3/4/2026</a:t>
             </a:fld>
             <a:endParaRPr lang="en-US" dirty="0"/>
           </a:p>
@@ -4379,7 +4379,7 @@
           <a:p>
             <a:fld id="{48A87A34-81AB-432B-8DAE-1953F412C126}" type="datetimeFigureOut">
               <a:rPr lang="en-US" smtClean="0"/>
-              <a:t>3/1/2026</a:t>
+              <a:t>3/4/2026</a:t>
             </a:fld>
             <a:endParaRPr lang="en-US" dirty="0"/>
           </a:p>
@@ -4656,7 +4656,7 @@
           <a:p>
             <a:fld id="{48A87A34-81AB-432B-8DAE-1953F412C126}" type="datetimeFigureOut">
               <a:rPr lang="en-US" smtClean="0"/>
-              <a:t>3/1/2026</a:t>
+              <a:t>3/4/2026</a:t>
             </a:fld>
             <a:endParaRPr lang="en-US" dirty="0"/>
           </a:p>
@@ -4914,7 +4914,7 @@
             <a:fld id="{48A87A34-81AB-432B-8DAE-1953F412C126}" type="datetimeFigureOut">
               <a:rPr lang="en-US" smtClean="0"/>
               <a:pPr/>
-              <a:t>3/1/2026</a:t>
+              <a:t>3/4/2026</a:t>
             </a:fld>
             <a:endParaRPr lang="en-US" dirty="0"/>
           </a:p>
@@ -5084,7 +5084,7 @@
           <a:p>
             <a:fld id="{48A87A34-81AB-432B-8DAE-1953F412C126}" type="datetimeFigureOut">
               <a:rPr lang="en-US" smtClean="0"/>
-              <a:t>3/1/2026</a:t>
+              <a:t>3/4/2026</a:t>
             </a:fld>
             <a:endParaRPr lang="en-US" dirty="0"/>
           </a:p>
@@ -5264,7 +5264,7 @@
           <a:p>
             <a:fld id="{48A87A34-81AB-432B-8DAE-1953F412C126}" type="datetimeFigureOut">
               <a:rPr lang="en-US" smtClean="0"/>
-              <a:t>3/1/2026</a:t>
+              <a:t>3/4/2026</a:t>
             </a:fld>
             <a:endParaRPr lang="en-US" dirty="0"/>
           </a:p>
@@ -7608,7 +7608,7 @@
           <a:p>
             <a:fld id="{C764DE79-268F-4C1A-8933-263129D2AF90}" type="datetimeFigureOut">
               <a:rPr lang="en-US" dirty="0"/>
-              <a:t>3/1/2026</a:t>
+              <a:t>3/4/2026</a:t>
             </a:fld>
             <a:endParaRPr lang="en-US" dirty="0"/>
           </a:p>
